--- a/FeedIQ-TCT-Case-Study-Puneet-Arora.pptx
+++ b/FeedIQ-TCT-Case-Study-Puneet-Arora.pptx
@@ -4141,7 +4141,7 @@
         <p:spPr>
           <a:xfrm>
             <a:off x="731520" y="2103120"/>
-            <a:ext cx="3291840" cy="1554480"/>
+            <a:ext cx="3291840" cy="1645920"/>
           </a:xfrm>
           <a:prstGeom prst="roundRect">
             <a:avLst>
@@ -4187,7 +4187,7 @@
         </p:nvSpPr>
         <p:spPr>
           <a:xfrm>
-            <a:off x="960120" y="2240280"/>
+            <a:off x="960120" y="2212848"/>
             <a:ext cx="2834640" cy="457200"/>
           </a:xfrm>
           <a:prstGeom prst="rect">
@@ -4202,7 +4202,7 @@
           <a:lstStyle/>
           <a:p>
             <a:pPr algn="l">
-              <a:defRPr sz="3600" b="1">
+              <a:defRPr sz="3200" b="1">
                 <a:solidFill>
                   <a:srgbClr val="00C978"/>
                 </a:solidFill>
@@ -4223,7 +4223,7 @@
         </p:nvSpPr>
         <p:spPr>
           <a:xfrm>
-            <a:off x="960120" y="2743200"/>
+            <a:off x="960120" y="2697480"/>
             <a:ext cx="2834640" cy="228600"/>
           </a:xfrm>
           <a:prstGeom prst="rect">
@@ -4238,7 +4238,7 @@
           <a:lstStyle/>
           <a:p>
             <a:pPr algn="l">
-              <a:defRPr sz="900" b="1">
+              <a:defRPr sz="800" b="1">
                 <a:solidFill>
                   <a:srgbClr val="5A7268"/>
                 </a:solidFill>
@@ -4259,22 +4259,22 @@
         </p:nvSpPr>
         <p:spPr>
           <a:xfrm>
-            <a:off x="960120" y="3017520"/>
-            <a:ext cx="2834640" cy="548640"/>
-          </a:xfrm>
-          <a:prstGeom prst="rect">
-            <a:avLst/>
-          </a:prstGeom>
-          <a:noFill/>
-        </p:spPr>
-        <p:txBody>
-          <a:bodyPr wrap="square">
-            <a:spAutoFit/>
-          </a:bodyPr>
-          <a:lstStyle/>
-          <a:p>
-            <a:pPr algn="l">
-              <a:defRPr sz="1000" b="0">
+            <a:off x="960120" y="2971800"/>
+            <a:ext cx="2834640" cy="685800"/>
+          </a:xfrm>
+          <a:prstGeom prst="rect">
+            <a:avLst/>
+          </a:prstGeom>
+          <a:noFill/>
+        </p:spPr>
+        <p:txBody>
+          <a:bodyPr wrap="square">
+            <a:spAutoFit/>
+          </a:bodyPr>
+          <a:lstStyle/>
+          <a:p>
+            <a:pPr algn="l">
+              <a:defRPr sz="900" b="0">
                 <a:solidFill>
                   <a:srgbClr val="8FA89C"/>
                 </a:solidFill>
@@ -4296,7 +4296,7 @@
         <p:spPr>
           <a:xfrm>
             <a:off x="4206240" y="2103120"/>
-            <a:ext cx="3291840" cy="1554480"/>
+            <a:ext cx="3291840" cy="1645920"/>
           </a:xfrm>
           <a:prstGeom prst="roundRect">
             <a:avLst>
@@ -4342,7 +4342,7 @@
         </p:nvSpPr>
         <p:spPr>
           <a:xfrm>
-            <a:off x="4434840" y="2240280"/>
+            <a:off x="4434840" y="2212848"/>
             <a:ext cx="2834640" cy="457200"/>
           </a:xfrm>
           <a:prstGeom prst="rect">
@@ -4357,7 +4357,7 @@
           <a:lstStyle/>
           <a:p>
             <a:pPr algn="l">
-              <a:defRPr sz="3600" b="1">
+              <a:defRPr sz="3200" b="1">
                 <a:solidFill>
                   <a:srgbClr val="54A0FF"/>
                 </a:solidFill>
@@ -4378,7 +4378,7 @@
         </p:nvSpPr>
         <p:spPr>
           <a:xfrm>
-            <a:off x="4434840" y="2743200"/>
+            <a:off x="4434840" y="2697480"/>
             <a:ext cx="2834640" cy="228600"/>
           </a:xfrm>
           <a:prstGeom prst="rect">
@@ -4393,7 +4393,7 @@
           <a:lstStyle/>
           <a:p>
             <a:pPr algn="l">
-              <a:defRPr sz="900" b="1">
+              <a:defRPr sz="800" b="1">
                 <a:solidFill>
                   <a:srgbClr val="5A7268"/>
                 </a:solidFill>
@@ -4414,22 +4414,22 @@
         </p:nvSpPr>
         <p:spPr>
           <a:xfrm>
-            <a:off x="4434840" y="3017520"/>
-            <a:ext cx="2834640" cy="548640"/>
-          </a:xfrm>
-          <a:prstGeom prst="rect">
-            <a:avLst/>
-          </a:prstGeom>
-          <a:noFill/>
-        </p:spPr>
-        <p:txBody>
-          <a:bodyPr wrap="square">
-            <a:spAutoFit/>
-          </a:bodyPr>
-          <a:lstStyle/>
-          <a:p>
-            <a:pPr algn="l">
-              <a:defRPr sz="1000" b="0">
+            <a:off x="4434840" y="2971800"/>
+            <a:ext cx="2834640" cy="685800"/>
+          </a:xfrm>
+          <a:prstGeom prst="rect">
+            <a:avLst/>
+          </a:prstGeom>
+          <a:noFill/>
+        </p:spPr>
+        <p:txBody>
+          <a:bodyPr wrap="square">
+            <a:spAutoFit/>
+          </a:bodyPr>
+          <a:lstStyle/>
+          <a:p>
+            <a:pPr algn="l">
+              <a:defRPr sz="900" b="0">
                 <a:solidFill>
                   <a:srgbClr val="8FA89C"/>
                 </a:solidFill>
@@ -4451,7 +4451,7 @@
         <p:spPr>
           <a:xfrm>
             <a:off x="7680960" y="2103120"/>
-            <a:ext cx="3566160" cy="1554480"/>
+            <a:ext cx="3566160" cy="1645920"/>
           </a:xfrm>
           <a:prstGeom prst="roundRect">
             <a:avLst>
@@ -4497,7 +4497,7 @@
         </p:nvSpPr>
         <p:spPr>
           <a:xfrm>
-            <a:off x="7909560" y="2240280"/>
+            <a:off x="7909560" y="2212848"/>
             <a:ext cx="3108960" cy="457200"/>
           </a:xfrm>
           <a:prstGeom prst="rect">
@@ -4512,7 +4512,7 @@
           <a:lstStyle/>
           <a:p>
             <a:pPr algn="l">
-              <a:defRPr sz="3600" b="1">
+              <a:defRPr sz="3200" b="1">
                 <a:solidFill>
                   <a:srgbClr val="FF9F43"/>
                 </a:solidFill>
@@ -4533,7 +4533,7 @@
         </p:nvSpPr>
         <p:spPr>
           <a:xfrm>
-            <a:off x="7909560" y="2743200"/>
+            <a:off x="7909560" y="2697480"/>
             <a:ext cx="3108960" cy="228600"/>
           </a:xfrm>
           <a:prstGeom prst="rect">
@@ -4548,7 +4548,7 @@
           <a:lstStyle/>
           <a:p>
             <a:pPr algn="l">
-              <a:defRPr sz="900" b="1">
+              <a:defRPr sz="800" b="1">
                 <a:solidFill>
                   <a:srgbClr val="5A7268"/>
                 </a:solidFill>
@@ -4569,22 +4569,22 @@
         </p:nvSpPr>
         <p:spPr>
           <a:xfrm>
-            <a:off x="7909560" y="3017520"/>
-            <a:ext cx="3108960" cy="548640"/>
-          </a:xfrm>
-          <a:prstGeom prst="rect">
-            <a:avLst/>
-          </a:prstGeom>
-          <a:noFill/>
-        </p:spPr>
-        <p:txBody>
-          <a:bodyPr wrap="square">
-            <a:spAutoFit/>
-          </a:bodyPr>
-          <a:lstStyle/>
-          <a:p>
-            <a:pPr algn="l">
-              <a:defRPr sz="1000" b="0">
+            <a:off x="7909560" y="2971800"/>
+            <a:ext cx="3108960" cy="685800"/>
+          </a:xfrm>
+          <a:prstGeom prst="rect">
+            <a:avLst/>
+          </a:prstGeom>
+          <a:noFill/>
+        </p:spPr>
+        <p:txBody>
+          <a:bodyPr wrap="square">
+            <a:spAutoFit/>
+          </a:bodyPr>
+          <a:lstStyle/>
+          <a:p>
+            <a:pPr algn="l">
+              <a:defRPr sz="900" b="0">
                 <a:solidFill>
                   <a:srgbClr val="8FA89C"/>
                 </a:solidFill>
@@ -4703,7 +4703,7 @@
           <a:lstStyle/>
           <a:p>
             <a:pPr algn="l">
-              <a:defRPr sz="1100" b="1">
+              <a:defRPr sz="1000" b="1">
                 <a:solidFill>
                   <a:srgbClr val="00C978"/>
                 </a:solidFill>
@@ -4725,21 +4725,21 @@
         <p:spPr>
           <a:xfrm>
             <a:off x="1005840" y="4736592"/>
-            <a:ext cx="4754880" cy="640080"/>
-          </a:xfrm>
-          <a:prstGeom prst="rect">
-            <a:avLst/>
-          </a:prstGeom>
-          <a:noFill/>
-        </p:spPr>
-        <p:txBody>
-          <a:bodyPr wrap="square">
-            <a:spAutoFit/>
-          </a:bodyPr>
-          <a:lstStyle/>
-          <a:p>
-            <a:pPr algn="l">
-              <a:defRPr sz="1000" b="0">
+            <a:ext cx="4754880" cy="731520"/>
+          </a:xfrm>
+          <a:prstGeom prst="rect">
+            <a:avLst/>
+          </a:prstGeom>
+          <a:noFill/>
+        </p:spPr>
+        <p:txBody>
+          <a:bodyPr wrap="square">
+            <a:spAutoFit/>
+          </a:bodyPr>
+          <a:lstStyle/>
+          <a:p>
+            <a:pPr algn="l">
+              <a:defRPr sz="900" b="0">
                 <a:solidFill>
                   <a:srgbClr val="8FA89C"/>
                 </a:solidFill>
@@ -4775,7 +4775,7 @@
           <a:lstStyle/>
           <a:p>
             <a:pPr algn="l">
-              <a:defRPr sz="1100" b="1">
+              <a:defRPr sz="1000" b="1">
                 <a:solidFill>
                   <a:srgbClr val="00C978"/>
                 </a:solidFill>
@@ -4797,21 +4797,21 @@
         <p:spPr>
           <a:xfrm>
             <a:off x="6126480" y="4736592"/>
-            <a:ext cx="4754880" cy="640080"/>
-          </a:xfrm>
-          <a:prstGeom prst="rect">
-            <a:avLst/>
-          </a:prstGeom>
-          <a:noFill/>
-        </p:spPr>
-        <p:txBody>
-          <a:bodyPr wrap="square">
-            <a:spAutoFit/>
-          </a:bodyPr>
-          <a:lstStyle/>
-          <a:p>
-            <a:pPr algn="l">
-              <a:defRPr sz="1000" b="0">
+            <a:ext cx="4754880" cy="731520"/>
+          </a:xfrm>
+          <a:prstGeom prst="rect">
+            <a:avLst/>
+          </a:prstGeom>
+          <a:noFill/>
+        </p:spPr>
+        <p:txBody>
+          <a:bodyPr wrap="square">
+            <a:spAutoFit/>
+          </a:bodyPr>
+          <a:lstStyle/>
+          <a:p>
+            <a:pPr algn="l">
+              <a:defRPr sz="900" b="0">
                 <a:solidFill>
                   <a:srgbClr val="8FA89C"/>
                 </a:solidFill>
@@ -4832,7 +4832,7 @@
         </p:nvSpPr>
         <p:spPr>
           <a:xfrm>
-            <a:off x="1005840" y="5486400"/>
+            <a:off x="1005840" y="5532120"/>
             <a:ext cx="4754880" cy="228600"/>
           </a:xfrm>
           <a:prstGeom prst="rect">
@@ -4847,7 +4847,7 @@
           <a:lstStyle/>
           <a:p>
             <a:pPr algn="l">
-              <a:defRPr sz="1100" b="1">
+              <a:defRPr sz="1000" b="1">
                 <a:solidFill>
                   <a:srgbClr val="00C978"/>
                 </a:solidFill>
@@ -4868,22 +4868,22 @@
         </p:nvSpPr>
         <p:spPr>
           <a:xfrm>
-            <a:off x="1005840" y="5742432"/>
-            <a:ext cx="4754880" cy="640080"/>
-          </a:xfrm>
-          <a:prstGeom prst="rect">
-            <a:avLst/>
-          </a:prstGeom>
-          <a:noFill/>
-        </p:spPr>
-        <p:txBody>
-          <a:bodyPr wrap="square">
-            <a:spAutoFit/>
-          </a:bodyPr>
-          <a:lstStyle/>
-          <a:p>
-            <a:pPr algn="l">
-              <a:defRPr sz="1000" b="0">
+            <a:off x="1005840" y="5788152"/>
+            <a:ext cx="4754880" cy="731520"/>
+          </a:xfrm>
+          <a:prstGeom prst="rect">
+            <a:avLst/>
+          </a:prstGeom>
+          <a:noFill/>
+        </p:spPr>
+        <p:txBody>
+          <a:bodyPr wrap="square">
+            <a:spAutoFit/>
+          </a:bodyPr>
+          <a:lstStyle/>
+          <a:p>
+            <a:pPr algn="l">
+              <a:defRPr sz="900" b="0">
                 <a:solidFill>
                   <a:srgbClr val="8FA89C"/>
                 </a:solidFill>
@@ -4904,7 +4904,7 @@
         </p:nvSpPr>
         <p:spPr>
           <a:xfrm>
-            <a:off x="6126480" y="5486400"/>
+            <a:off x="6126480" y="5532120"/>
             <a:ext cx="4754880" cy="228600"/>
           </a:xfrm>
           <a:prstGeom prst="rect">
@@ -4919,7 +4919,7 @@
           <a:lstStyle/>
           <a:p>
             <a:pPr algn="l">
-              <a:defRPr sz="1100" b="1">
+              <a:defRPr sz="1000" b="1">
                 <a:solidFill>
                   <a:srgbClr val="00C978"/>
                 </a:solidFill>
@@ -4940,22 +4940,22 @@
         </p:nvSpPr>
         <p:spPr>
           <a:xfrm>
-            <a:off x="6126480" y="5742432"/>
-            <a:ext cx="4754880" cy="640080"/>
-          </a:xfrm>
-          <a:prstGeom prst="rect">
-            <a:avLst/>
-          </a:prstGeom>
-          <a:noFill/>
-        </p:spPr>
-        <p:txBody>
-          <a:bodyPr wrap="square">
-            <a:spAutoFit/>
-          </a:bodyPr>
-          <a:lstStyle/>
-          <a:p>
-            <a:pPr algn="l">
-              <a:defRPr sz="1000" b="0">
+            <a:off x="6126480" y="5788152"/>
+            <a:ext cx="4754880" cy="731520"/>
+          </a:xfrm>
+          <a:prstGeom prst="rect">
+            <a:avLst/>
+          </a:prstGeom>
+          <a:noFill/>
+        </p:spPr>
+        <p:txBody>
+          <a:bodyPr wrap="square">
+            <a:spAutoFit/>
+          </a:bodyPr>
+          <a:lstStyle/>
+          <a:p>
+            <a:pPr algn="l">
+              <a:defRPr sz="900" b="0">
                 <a:solidFill>
                   <a:srgbClr val="8FA89C"/>
                 </a:solidFill>
@@ -5624,7 +5624,7 @@
         <p:spPr>
           <a:xfrm>
             <a:off x="731520" y="1737360"/>
-            <a:ext cx="9144000" cy="2743200"/>
+            <a:ext cx="9144000" cy="493776"/>
           </a:xfrm>
           <a:prstGeom prst="rect">
             <a:avLst/>
@@ -12219,7 +12219,7 @@
           <a:lstStyle/>
           <a:p>
             <a:pPr algn="l">
-              <a:defRPr sz="1000" b="1">
+              <a:defRPr sz="900" b="1">
                 <a:solidFill>
                   <a:srgbClr val="00C978"/>
                 </a:solidFill>
@@ -12240,22 +12240,22 @@
         </p:nvSpPr>
         <p:spPr>
           <a:xfrm>
-            <a:off x="7589520" y="2788920"/>
-            <a:ext cx="3474720" cy="640080"/>
-          </a:xfrm>
-          <a:prstGeom prst="rect">
-            <a:avLst/>
-          </a:prstGeom>
-          <a:noFill/>
-        </p:spPr>
-        <p:txBody>
-          <a:bodyPr wrap="square">
-            <a:spAutoFit/>
-          </a:bodyPr>
-          <a:lstStyle/>
-          <a:p>
-            <a:pPr algn="l">
-              <a:defRPr sz="900" b="0">
+            <a:off x="7589520" y="2779776"/>
+            <a:ext cx="3474720" cy="731520"/>
+          </a:xfrm>
+          <a:prstGeom prst="rect">
+            <a:avLst/>
+          </a:prstGeom>
+          <a:noFill/>
+        </p:spPr>
+        <p:txBody>
+          <a:bodyPr wrap="square">
+            <a:spAutoFit/>
+          </a:bodyPr>
+          <a:lstStyle/>
+          <a:p>
+            <a:pPr algn="l">
+              <a:defRPr sz="800" b="0">
                 <a:solidFill>
                   <a:srgbClr val="8FA89C"/>
                 </a:solidFill>
@@ -12276,7 +12276,7 @@
         </p:nvSpPr>
         <p:spPr>
           <a:xfrm>
-            <a:off x="7589520" y="3337560"/>
+            <a:off x="7589520" y="3474720"/>
             <a:ext cx="3474720" cy="201168"/>
           </a:xfrm>
           <a:prstGeom prst="rect">
@@ -12291,7 +12291,7 @@
           <a:lstStyle/>
           <a:p>
             <a:pPr algn="l">
-              <a:defRPr sz="1000" b="1">
+              <a:defRPr sz="900" b="1">
                 <a:solidFill>
                   <a:srgbClr val="00C978"/>
                 </a:solidFill>
@@ -12312,22 +12312,22 @@
         </p:nvSpPr>
         <p:spPr>
           <a:xfrm>
-            <a:off x="7589520" y="3566160"/>
-            <a:ext cx="3474720" cy="640080"/>
-          </a:xfrm>
-          <a:prstGeom prst="rect">
-            <a:avLst/>
-          </a:prstGeom>
-          <a:noFill/>
-        </p:spPr>
-        <p:txBody>
-          <a:bodyPr wrap="square">
-            <a:spAutoFit/>
-          </a:bodyPr>
-          <a:lstStyle/>
-          <a:p>
-            <a:pPr algn="l">
-              <a:defRPr sz="900" b="0">
+            <a:off x="7589520" y="3694176"/>
+            <a:ext cx="3474720" cy="731520"/>
+          </a:xfrm>
+          <a:prstGeom prst="rect">
+            <a:avLst/>
+          </a:prstGeom>
+          <a:noFill/>
+        </p:spPr>
+        <p:txBody>
+          <a:bodyPr wrap="square">
+            <a:spAutoFit/>
+          </a:bodyPr>
+          <a:lstStyle/>
+          <a:p>
+            <a:pPr algn="l">
+              <a:defRPr sz="800" b="0">
                 <a:solidFill>
                   <a:srgbClr val="8FA89C"/>
                 </a:solidFill>
@@ -12348,7 +12348,7 @@
         </p:nvSpPr>
         <p:spPr>
           <a:xfrm>
-            <a:off x="7589520" y="4114800"/>
+            <a:off x="7589520" y="4389120"/>
             <a:ext cx="3474720" cy="201168"/>
           </a:xfrm>
           <a:prstGeom prst="rect">
@@ -12363,7 +12363,7 @@
           <a:lstStyle/>
           <a:p>
             <a:pPr algn="l">
-              <a:defRPr sz="1000" b="1">
+              <a:defRPr sz="900" b="1">
                 <a:solidFill>
                   <a:srgbClr val="00C978"/>
                 </a:solidFill>
@@ -12384,22 +12384,22 @@
         </p:nvSpPr>
         <p:spPr>
           <a:xfrm>
-            <a:off x="7589520" y="4343400"/>
-            <a:ext cx="3474720" cy="640080"/>
-          </a:xfrm>
-          <a:prstGeom prst="rect">
-            <a:avLst/>
-          </a:prstGeom>
-          <a:noFill/>
-        </p:spPr>
-        <p:txBody>
-          <a:bodyPr wrap="square">
-            <a:spAutoFit/>
-          </a:bodyPr>
-          <a:lstStyle/>
-          <a:p>
-            <a:pPr algn="l">
-              <a:defRPr sz="900" b="0">
+            <a:off x="7589520" y="4608576"/>
+            <a:ext cx="3474720" cy="731520"/>
+          </a:xfrm>
+          <a:prstGeom prst="rect">
+            <a:avLst/>
+          </a:prstGeom>
+          <a:noFill/>
+        </p:spPr>
+        <p:txBody>
+          <a:bodyPr wrap="square">
+            <a:spAutoFit/>
+          </a:bodyPr>
+          <a:lstStyle/>
+          <a:p>
+            <a:pPr algn="l">
+              <a:defRPr sz="800" b="0">
                 <a:solidFill>
                   <a:srgbClr val="8FA89C"/>
                 </a:solidFill>
@@ -12420,7 +12420,7 @@
         </p:nvSpPr>
         <p:spPr>
           <a:xfrm>
-            <a:off x="7589520" y="4892040"/>
+            <a:off x="7589520" y="5303520"/>
             <a:ext cx="3474720" cy="201168"/>
           </a:xfrm>
           <a:prstGeom prst="rect">
@@ -12435,7 +12435,7 @@
           <a:lstStyle/>
           <a:p>
             <a:pPr algn="l">
-              <a:defRPr sz="1000" b="1">
+              <a:defRPr sz="900" b="1">
                 <a:solidFill>
                   <a:srgbClr val="00C978"/>
                 </a:solidFill>
@@ -12456,22 +12456,22 @@
         </p:nvSpPr>
         <p:spPr>
           <a:xfrm>
-            <a:off x="7589520" y="5120640"/>
-            <a:ext cx="3474720" cy="640080"/>
-          </a:xfrm>
-          <a:prstGeom prst="rect">
-            <a:avLst/>
-          </a:prstGeom>
-          <a:noFill/>
-        </p:spPr>
-        <p:txBody>
-          <a:bodyPr wrap="square">
-            <a:spAutoFit/>
-          </a:bodyPr>
-          <a:lstStyle/>
-          <a:p>
-            <a:pPr algn="l">
-              <a:defRPr sz="900" b="0">
+            <a:off x="7589520" y="5522976"/>
+            <a:ext cx="3474720" cy="731520"/>
+          </a:xfrm>
+          <a:prstGeom prst="rect">
+            <a:avLst/>
+          </a:prstGeom>
+          <a:noFill/>
+        </p:spPr>
+        <p:txBody>
+          <a:bodyPr wrap="square">
+            <a:spAutoFit/>
+          </a:bodyPr>
+          <a:lstStyle/>
+          <a:p>
+            <a:pPr algn="l">
+              <a:defRPr sz="800" b="0">
                 <a:solidFill>
                   <a:srgbClr val="8FA89C"/>
                 </a:solidFill>
@@ -12750,7 +12750,7 @@
         <p:spPr>
           <a:xfrm>
             <a:off x="731520" y="1737360"/>
-            <a:ext cx="9144000" cy="2743200"/>
+            <a:ext cx="9144000" cy="493776"/>
           </a:xfrm>
           <a:prstGeom prst="rect">
             <a:avLst/>
@@ -12887,7 +12887,7 @@
           <a:lstStyle/>
           <a:p>
             <a:pPr algn="l">
-              <a:defRPr sz="1000" b="1">
+              <a:defRPr sz="900" b="1">
                 <a:solidFill>
                   <a:srgbClr val="00C978"/>
                 </a:solidFill>
@@ -12909,21 +12909,21 @@
         <p:spPr>
           <a:xfrm>
             <a:off x="1005840" y="3337560"/>
-            <a:ext cx="4572000" cy="365760"/>
-          </a:xfrm>
-          <a:prstGeom prst="rect">
-            <a:avLst/>
-          </a:prstGeom>
-          <a:noFill/>
-        </p:spPr>
-        <p:txBody>
-          <a:bodyPr wrap="square">
-            <a:spAutoFit/>
-          </a:bodyPr>
-          <a:lstStyle/>
-          <a:p>
-            <a:pPr algn="l">
-              <a:defRPr sz="900" b="0">
+            <a:ext cx="4572000" cy="411480"/>
+          </a:xfrm>
+          <a:prstGeom prst="rect">
+            <a:avLst/>
+          </a:prstGeom>
+          <a:noFill/>
+        </p:spPr>
+        <p:txBody>
+          <a:bodyPr wrap="square">
+            <a:spAutoFit/>
+          </a:bodyPr>
+          <a:lstStyle/>
+          <a:p>
+            <a:pPr algn="l">
+              <a:defRPr sz="800" b="0">
                 <a:solidFill>
                   <a:srgbClr val="8FA89C"/>
                 </a:solidFill>
@@ -12944,7 +12944,7 @@
         </p:nvSpPr>
         <p:spPr>
           <a:xfrm>
-            <a:off x="1005840" y="3657600"/>
+            <a:off x="1005840" y="3730752"/>
             <a:ext cx="4572000" cy="320040"/>
           </a:xfrm>
           <a:prstGeom prst="rect">
@@ -12959,7 +12959,7 @@
           <a:lstStyle/>
           <a:p>
             <a:pPr algn="l">
-              <a:defRPr sz="800" b="1">
+              <a:defRPr sz="700" b="1">
                 <a:solidFill>
                   <a:srgbClr val="E8F0EC"/>
                 </a:solidFill>
@@ -12980,7 +12980,7 @@
         </p:nvSpPr>
         <p:spPr>
           <a:xfrm>
-            <a:off x="1005840" y="4114800"/>
+            <a:off x="1005840" y="4160520"/>
             <a:ext cx="4572000" cy="201168"/>
           </a:xfrm>
           <a:prstGeom prst="rect">
@@ -12995,7 +12995,7 @@
           <a:lstStyle/>
           <a:p>
             <a:pPr algn="l">
-              <a:defRPr sz="1000" b="1">
+              <a:defRPr sz="900" b="1">
                 <a:solidFill>
                   <a:srgbClr val="00C978"/>
                 </a:solidFill>
@@ -13016,22 +13016,22 @@
         </p:nvSpPr>
         <p:spPr>
           <a:xfrm>
-            <a:off x="1005840" y="4343400"/>
-            <a:ext cx="4572000" cy="365760"/>
-          </a:xfrm>
-          <a:prstGeom prst="rect">
-            <a:avLst/>
-          </a:prstGeom>
-          <a:noFill/>
-        </p:spPr>
-        <p:txBody>
-          <a:bodyPr wrap="square">
-            <a:spAutoFit/>
-          </a:bodyPr>
-          <a:lstStyle/>
-          <a:p>
-            <a:pPr algn="l">
-              <a:defRPr sz="900" b="0">
+            <a:off x="1005840" y="4389120"/>
+            <a:ext cx="4572000" cy="411480"/>
+          </a:xfrm>
+          <a:prstGeom prst="rect">
+            <a:avLst/>
+          </a:prstGeom>
+          <a:noFill/>
+        </p:spPr>
+        <p:txBody>
+          <a:bodyPr wrap="square">
+            <a:spAutoFit/>
+          </a:bodyPr>
+          <a:lstStyle/>
+          <a:p>
+            <a:pPr algn="l">
+              <a:defRPr sz="800" b="0">
                 <a:solidFill>
                   <a:srgbClr val="8FA89C"/>
                 </a:solidFill>
@@ -13052,7 +13052,7 @@
         </p:nvSpPr>
         <p:spPr>
           <a:xfrm>
-            <a:off x="1005840" y="4663440"/>
+            <a:off x="1005840" y="4782312"/>
             <a:ext cx="4572000" cy="320040"/>
           </a:xfrm>
           <a:prstGeom prst="rect">
@@ -13067,7 +13067,7 @@
           <a:lstStyle/>
           <a:p>
             <a:pPr algn="l">
-              <a:defRPr sz="800" b="1">
+              <a:defRPr sz="700" b="1">
                 <a:solidFill>
                   <a:srgbClr val="E8F0EC"/>
                 </a:solidFill>
@@ -13088,7 +13088,7 @@
         </p:nvSpPr>
         <p:spPr>
           <a:xfrm>
-            <a:off x="1005840" y="5120640"/>
+            <a:off x="1005840" y="5212080"/>
             <a:ext cx="4572000" cy="201168"/>
           </a:xfrm>
           <a:prstGeom prst="rect">
@@ -13103,7 +13103,7 @@
           <a:lstStyle/>
           <a:p>
             <a:pPr algn="l">
-              <a:defRPr sz="1000" b="1">
+              <a:defRPr sz="900" b="1">
                 <a:solidFill>
                   <a:srgbClr val="00C978"/>
                 </a:solidFill>
@@ -13124,22 +13124,22 @@
         </p:nvSpPr>
         <p:spPr>
           <a:xfrm>
-            <a:off x="1005840" y="5349240"/>
-            <a:ext cx="4572000" cy="365760"/>
-          </a:xfrm>
-          <a:prstGeom prst="rect">
-            <a:avLst/>
-          </a:prstGeom>
-          <a:noFill/>
-        </p:spPr>
-        <p:txBody>
-          <a:bodyPr wrap="square">
-            <a:spAutoFit/>
-          </a:bodyPr>
-          <a:lstStyle/>
-          <a:p>
-            <a:pPr algn="l">
-              <a:defRPr sz="900" b="0">
+            <a:off x="1005840" y="5440680"/>
+            <a:ext cx="4572000" cy="411480"/>
+          </a:xfrm>
+          <a:prstGeom prst="rect">
+            <a:avLst/>
+          </a:prstGeom>
+          <a:noFill/>
+        </p:spPr>
+        <p:txBody>
+          <a:bodyPr wrap="square">
+            <a:spAutoFit/>
+          </a:bodyPr>
+          <a:lstStyle/>
+          <a:p>
+            <a:pPr algn="l">
+              <a:defRPr sz="800" b="0">
                 <a:solidFill>
                   <a:srgbClr val="8FA89C"/>
                 </a:solidFill>
@@ -13160,7 +13160,7 @@
         </p:nvSpPr>
         <p:spPr>
           <a:xfrm>
-            <a:off x="1005840" y="5669280"/>
+            <a:off x="1005840" y="5833872"/>
             <a:ext cx="4572000" cy="320040"/>
           </a:xfrm>
           <a:prstGeom prst="rect">
@@ -13175,7 +13175,7 @@
           <a:lstStyle/>
           <a:p>
             <a:pPr algn="l">
-              <a:defRPr sz="800" b="1">
+              <a:defRPr sz="700" b="1">
                 <a:solidFill>
                   <a:srgbClr val="E8F0EC"/>
                 </a:solidFill>
@@ -13617,7 +13617,7 @@
         <p:spPr>
           <a:xfrm>
             <a:off x="731520" y="1737360"/>
-            <a:ext cx="9144000" cy="2743200"/>
+            <a:ext cx="9144000" cy="493776"/>
           </a:xfrm>
           <a:prstGeom prst="rect">
             <a:avLst/>
@@ -14544,7 +14544,7 @@
         <p:spPr>
           <a:xfrm>
             <a:off x="731520" y="914400"/>
-            <a:ext cx="9144000" cy="1097280"/>
+            <a:ext cx="9144000" cy="594360"/>
           </a:xfrm>
           <a:prstGeom prst="rect">
             <a:avLst/>
@@ -14580,7 +14580,7 @@
         <p:spPr>
           <a:xfrm>
             <a:off x="731520" y="1737360"/>
-            <a:ext cx="9144000" cy="2743200"/>
+            <a:ext cx="9144000" cy="493776"/>
           </a:xfrm>
           <a:prstGeom prst="rect">
             <a:avLst/>
@@ -14800,7 +14800,7 @@
           <a:lstStyle/>
           <a:p>
             <a:pPr algn="l">
-              <a:defRPr sz="1200" b="1">
+              <a:defRPr sz="1100" b="1">
                 <a:solidFill>
                   <a:srgbClr val="E8F0EC"/>
                 </a:solidFill>
@@ -14822,21 +14822,21 @@
         <p:spPr>
           <a:xfrm>
             <a:off x="960120" y="4297680"/>
-            <a:ext cx="2926080" cy="274320"/>
-          </a:xfrm>
-          <a:prstGeom prst="rect">
-            <a:avLst/>
-          </a:prstGeom>
-          <a:noFill/>
-        </p:spPr>
-        <p:txBody>
-          <a:bodyPr wrap="square">
-            <a:spAutoFit/>
-          </a:bodyPr>
-          <a:lstStyle/>
-          <a:p>
-            <a:pPr algn="l">
-              <a:defRPr sz="800" b="0">
+            <a:ext cx="2926080" cy="320040"/>
+          </a:xfrm>
+          <a:prstGeom prst="rect">
+            <a:avLst/>
+          </a:prstGeom>
+          <a:noFill/>
+        </p:spPr>
+        <p:txBody>
+          <a:bodyPr wrap="square">
+            <a:spAutoFit/>
+          </a:bodyPr>
+          <a:lstStyle/>
+          <a:p>
+            <a:pPr algn="l">
+              <a:defRPr sz="700" b="0">
                 <a:solidFill>
                   <a:srgbClr val="8FA89C"/>
                 </a:solidFill>
@@ -14857,22 +14857,22 @@
         </p:nvSpPr>
         <p:spPr>
           <a:xfrm>
-            <a:off x="960120" y="4572000"/>
-            <a:ext cx="2926080" cy="274320"/>
-          </a:xfrm>
-          <a:prstGeom prst="rect">
-            <a:avLst/>
-          </a:prstGeom>
-          <a:noFill/>
-        </p:spPr>
-        <p:txBody>
-          <a:bodyPr wrap="square">
-            <a:spAutoFit/>
-          </a:bodyPr>
-          <a:lstStyle/>
-          <a:p>
-            <a:pPr algn="l">
-              <a:defRPr sz="800" b="0">
+            <a:off x="960120" y="4590288"/>
+            <a:ext cx="2926080" cy="320040"/>
+          </a:xfrm>
+          <a:prstGeom prst="rect">
+            <a:avLst/>
+          </a:prstGeom>
+          <a:noFill/>
+        </p:spPr>
+        <p:txBody>
+          <a:bodyPr wrap="square">
+            <a:spAutoFit/>
+          </a:bodyPr>
+          <a:lstStyle/>
+          <a:p>
+            <a:pPr algn="l">
+              <a:defRPr sz="700" b="0">
                 <a:solidFill>
                   <a:srgbClr val="8FA89C"/>
                 </a:solidFill>
@@ -14893,22 +14893,22 @@
         </p:nvSpPr>
         <p:spPr>
           <a:xfrm>
-            <a:off x="960120" y="4846320"/>
-            <a:ext cx="2926080" cy="274320"/>
-          </a:xfrm>
-          <a:prstGeom prst="rect">
-            <a:avLst/>
-          </a:prstGeom>
-          <a:noFill/>
-        </p:spPr>
-        <p:txBody>
-          <a:bodyPr wrap="square">
-            <a:spAutoFit/>
-          </a:bodyPr>
-          <a:lstStyle/>
-          <a:p>
-            <a:pPr algn="l">
-              <a:defRPr sz="800" b="0">
+            <a:off x="960120" y="4882896"/>
+            <a:ext cx="2926080" cy="320040"/>
+          </a:xfrm>
+          <a:prstGeom prst="rect">
+            <a:avLst/>
+          </a:prstGeom>
+          <a:noFill/>
+        </p:spPr>
+        <p:txBody>
+          <a:bodyPr wrap="square">
+            <a:spAutoFit/>
+          </a:bodyPr>
+          <a:lstStyle/>
+          <a:p>
+            <a:pPr algn="l">
+              <a:defRPr sz="700" b="0">
                 <a:solidFill>
                   <a:srgbClr val="8FA89C"/>
                 </a:solidFill>
@@ -14929,22 +14929,22 @@
         </p:nvSpPr>
         <p:spPr>
           <a:xfrm>
-            <a:off x="960120" y="5120640"/>
-            <a:ext cx="2926080" cy="274320"/>
-          </a:xfrm>
-          <a:prstGeom prst="rect">
-            <a:avLst/>
-          </a:prstGeom>
-          <a:noFill/>
-        </p:spPr>
-        <p:txBody>
-          <a:bodyPr wrap="square">
-            <a:spAutoFit/>
-          </a:bodyPr>
-          <a:lstStyle/>
-          <a:p>
-            <a:pPr algn="l">
-              <a:defRPr sz="800" b="0">
+            <a:off x="960120" y="5175504"/>
+            <a:ext cx="2926080" cy="320040"/>
+          </a:xfrm>
+          <a:prstGeom prst="rect">
+            <a:avLst/>
+          </a:prstGeom>
+          <a:noFill/>
+        </p:spPr>
+        <p:txBody>
+          <a:bodyPr wrap="square">
+            <a:spAutoFit/>
+          </a:bodyPr>
+          <a:lstStyle/>
+          <a:p>
+            <a:pPr algn="l">
+              <a:defRPr sz="700" b="0">
                 <a:solidFill>
                   <a:srgbClr val="8FA89C"/>
                 </a:solidFill>
@@ -14965,22 +14965,22 @@
         </p:nvSpPr>
         <p:spPr>
           <a:xfrm>
-            <a:off x="960120" y="5394960"/>
-            <a:ext cx="2926080" cy="274320"/>
-          </a:xfrm>
-          <a:prstGeom prst="rect">
-            <a:avLst/>
-          </a:prstGeom>
-          <a:noFill/>
-        </p:spPr>
-        <p:txBody>
-          <a:bodyPr wrap="square">
-            <a:spAutoFit/>
-          </a:bodyPr>
-          <a:lstStyle/>
-          <a:p>
-            <a:pPr algn="l">
-              <a:defRPr sz="800" b="0">
+            <a:off x="960120" y="5468112"/>
+            <a:ext cx="2926080" cy="320040"/>
+          </a:xfrm>
+          <a:prstGeom prst="rect">
+            <a:avLst/>
+          </a:prstGeom>
+          <a:noFill/>
+        </p:spPr>
+        <p:txBody>
+          <a:bodyPr wrap="square">
+            <a:spAutoFit/>
+          </a:bodyPr>
+          <a:lstStyle/>
+          <a:p>
+            <a:pPr algn="l">
+              <a:defRPr sz="700" b="0">
                 <a:solidFill>
                   <a:srgbClr val="8FA89C"/>
                 </a:solidFill>
@@ -15099,7 +15099,7 @@
           <a:lstStyle/>
           <a:p>
             <a:pPr algn="l">
-              <a:defRPr sz="1200" b="1">
+              <a:defRPr sz="1100" b="1">
                 <a:solidFill>
                   <a:srgbClr val="E8F0EC"/>
                 </a:solidFill>
@@ -15121,21 +15121,21 @@
         <p:spPr>
           <a:xfrm>
             <a:off x="4526280" y="4297680"/>
-            <a:ext cx="2926080" cy="274320"/>
-          </a:xfrm>
-          <a:prstGeom prst="rect">
-            <a:avLst/>
-          </a:prstGeom>
-          <a:noFill/>
-        </p:spPr>
-        <p:txBody>
-          <a:bodyPr wrap="square">
-            <a:spAutoFit/>
-          </a:bodyPr>
-          <a:lstStyle/>
-          <a:p>
-            <a:pPr algn="l">
-              <a:defRPr sz="800" b="0">
+            <a:ext cx="2926080" cy="320040"/>
+          </a:xfrm>
+          <a:prstGeom prst="rect">
+            <a:avLst/>
+          </a:prstGeom>
+          <a:noFill/>
+        </p:spPr>
+        <p:txBody>
+          <a:bodyPr wrap="square">
+            <a:spAutoFit/>
+          </a:bodyPr>
+          <a:lstStyle/>
+          <a:p>
+            <a:pPr algn="l">
+              <a:defRPr sz="700" b="0">
                 <a:solidFill>
                   <a:srgbClr val="8FA89C"/>
                 </a:solidFill>
@@ -15156,22 +15156,22 @@
         </p:nvSpPr>
         <p:spPr>
           <a:xfrm>
-            <a:off x="4526280" y="4572000"/>
-            <a:ext cx="2926080" cy="274320"/>
-          </a:xfrm>
-          <a:prstGeom prst="rect">
-            <a:avLst/>
-          </a:prstGeom>
-          <a:noFill/>
-        </p:spPr>
-        <p:txBody>
-          <a:bodyPr wrap="square">
-            <a:spAutoFit/>
-          </a:bodyPr>
-          <a:lstStyle/>
-          <a:p>
-            <a:pPr algn="l">
-              <a:defRPr sz="800" b="0">
+            <a:off x="4526280" y="4590288"/>
+            <a:ext cx="2926080" cy="320040"/>
+          </a:xfrm>
+          <a:prstGeom prst="rect">
+            <a:avLst/>
+          </a:prstGeom>
+          <a:noFill/>
+        </p:spPr>
+        <p:txBody>
+          <a:bodyPr wrap="square">
+            <a:spAutoFit/>
+          </a:bodyPr>
+          <a:lstStyle/>
+          <a:p>
+            <a:pPr algn="l">
+              <a:defRPr sz="700" b="0">
                 <a:solidFill>
                   <a:srgbClr val="8FA89C"/>
                 </a:solidFill>
@@ -15192,22 +15192,22 @@
         </p:nvSpPr>
         <p:spPr>
           <a:xfrm>
-            <a:off x="4526280" y="4846320"/>
-            <a:ext cx="2926080" cy="274320"/>
-          </a:xfrm>
-          <a:prstGeom prst="rect">
-            <a:avLst/>
-          </a:prstGeom>
-          <a:noFill/>
-        </p:spPr>
-        <p:txBody>
-          <a:bodyPr wrap="square">
-            <a:spAutoFit/>
-          </a:bodyPr>
-          <a:lstStyle/>
-          <a:p>
-            <a:pPr algn="l">
-              <a:defRPr sz="800" b="0">
+            <a:off x="4526280" y="4882896"/>
+            <a:ext cx="2926080" cy="320040"/>
+          </a:xfrm>
+          <a:prstGeom prst="rect">
+            <a:avLst/>
+          </a:prstGeom>
+          <a:noFill/>
+        </p:spPr>
+        <p:txBody>
+          <a:bodyPr wrap="square">
+            <a:spAutoFit/>
+          </a:bodyPr>
+          <a:lstStyle/>
+          <a:p>
+            <a:pPr algn="l">
+              <a:defRPr sz="700" b="0">
                 <a:solidFill>
                   <a:srgbClr val="8FA89C"/>
                 </a:solidFill>
@@ -15228,22 +15228,22 @@
         </p:nvSpPr>
         <p:spPr>
           <a:xfrm>
-            <a:off x="4526280" y="5120640"/>
-            <a:ext cx="2926080" cy="274320"/>
-          </a:xfrm>
-          <a:prstGeom prst="rect">
-            <a:avLst/>
-          </a:prstGeom>
-          <a:noFill/>
-        </p:spPr>
-        <p:txBody>
-          <a:bodyPr wrap="square">
-            <a:spAutoFit/>
-          </a:bodyPr>
-          <a:lstStyle/>
-          <a:p>
-            <a:pPr algn="l">
-              <a:defRPr sz="800" b="0">
+            <a:off x="4526280" y="5175504"/>
+            <a:ext cx="2926080" cy="320040"/>
+          </a:xfrm>
+          <a:prstGeom prst="rect">
+            <a:avLst/>
+          </a:prstGeom>
+          <a:noFill/>
+        </p:spPr>
+        <p:txBody>
+          <a:bodyPr wrap="square">
+            <a:spAutoFit/>
+          </a:bodyPr>
+          <a:lstStyle/>
+          <a:p>
+            <a:pPr algn="l">
+              <a:defRPr sz="700" b="0">
                 <a:solidFill>
                   <a:srgbClr val="8FA89C"/>
                 </a:solidFill>
@@ -15264,22 +15264,22 @@
         </p:nvSpPr>
         <p:spPr>
           <a:xfrm>
-            <a:off x="4526280" y="5394960"/>
-            <a:ext cx="2926080" cy="274320"/>
-          </a:xfrm>
-          <a:prstGeom prst="rect">
-            <a:avLst/>
-          </a:prstGeom>
-          <a:noFill/>
-        </p:spPr>
-        <p:txBody>
-          <a:bodyPr wrap="square">
-            <a:spAutoFit/>
-          </a:bodyPr>
-          <a:lstStyle/>
-          <a:p>
-            <a:pPr algn="l">
-              <a:defRPr sz="800" b="0">
+            <a:off x="4526280" y="5468112"/>
+            <a:ext cx="2926080" cy="320040"/>
+          </a:xfrm>
+          <a:prstGeom prst="rect">
+            <a:avLst/>
+          </a:prstGeom>
+          <a:noFill/>
+        </p:spPr>
+        <p:txBody>
+          <a:bodyPr wrap="square">
+            <a:spAutoFit/>
+          </a:bodyPr>
+          <a:lstStyle/>
+          <a:p>
+            <a:pPr algn="l">
+              <a:defRPr sz="700" b="0">
                 <a:solidFill>
                   <a:srgbClr val="8FA89C"/>
                 </a:solidFill>
@@ -15398,7 +15398,7 @@
           <a:lstStyle/>
           <a:p>
             <a:pPr algn="l">
-              <a:defRPr sz="1200" b="1">
+              <a:defRPr sz="1100" b="1">
                 <a:solidFill>
                   <a:srgbClr val="E8F0EC"/>
                 </a:solidFill>
@@ -15420,21 +15420,21 @@
         <p:spPr>
           <a:xfrm>
             <a:off x="8092440" y="4297680"/>
-            <a:ext cx="2926080" cy="274320"/>
-          </a:xfrm>
-          <a:prstGeom prst="rect">
-            <a:avLst/>
-          </a:prstGeom>
-          <a:noFill/>
-        </p:spPr>
-        <p:txBody>
-          <a:bodyPr wrap="square">
-            <a:spAutoFit/>
-          </a:bodyPr>
-          <a:lstStyle/>
-          <a:p>
-            <a:pPr algn="l">
-              <a:defRPr sz="800" b="0">
+            <a:ext cx="2926080" cy="320040"/>
+          </a:xfrm>
+          <a:prstGeom prst="rect">
+            <a:avLst/>
+          </a:prstGeom>
+          <a:noFill/>
+        </p:spPr>
+        <p:txBody>
+          <a:bodyPr wrap="square">
+            <a:spAutoFit/>
+          </a:bodyPr>
+          <a:lstStyle/>
+          <a:p>
+            <a:pPr algn="l">
+              <a:defRPr sz="700" b="0">
                 <a:solidFill>
                   <a:srgbClr val="8FA89C"/>
                 </a:solidFill>
@@ -15455,22 +15455,22 @@
         </p:nvSpPr>
         <p:spPr>
           <a:xfrm>
-            <a:off x="8092440" y="4572000"/>
-            <a:ext cx="2926080" cy="274320"/>
-          </a:xfrm>
-          <a:prstGeom prst="rect">
-            <a:avLst/>
-          </a:prstGeom>
-          <a:noFill/>
-        </p:spPr>
-        <p:txBody>
-          <a:bodyPr wrap="square">
-            <a:spAutoFit/>
-          </a:bodyPr>
-          <a:lstStyle/>
-          <a:p>
-            <a:pPr algn="l">
-              <a:defRPr sz="800" b="0">
+            <a:off x="8092440" y="4590288"/>
+            <a:ext cx="2926080" cy="320040"/>
+          </a:xfrm>
+          <a:prstGeom prst="rect">
+            <a:avLst/>
+          </a:prstGeom>
+          <a:noFill/>
+        </p:spPr>
+        <p:txBody>
+          <a:bodyPr wrap="square">
+            <a:spAutoFit/>
+          </a:bodyPr>
+          <a:lstStyle/>
+          <a:p>
+            <a:pPr algn="l">
+              <a:defRPr sz="700" b="0">
                 <a:solidFill>
                   <a:srgbClr val="8FA89C"/>
                 </a:solidFill>
@@ -15491,22 +15491,22 @@
         </p:nvSpPr>
         <p:spPr>
           <a:xfrm>
-            <a:off x="8092440" y="4846320"/>
-            <a:ext cx="2926080" cy="274320"/>
-          </a:xfrm>
-          <a:prstGeom prst="rect">
-            <a:avLst/>
-          </a:prstGeom>
-          <a:noFill/>
-        </p:spPr>
-        <p:txBody>
-          <a:bodyPr wrap="square">
-            <a:spAutoFit/>
-          </a:bodyPr>
-          <a:lstStyle/>
-          <a:p>
-            <a:pPr algn="l">
-              <a:defRPr sz="800" b="0">
+            <a:off x="8092440" y="4882896"/>
+            <a:ext cx="2926080" cy="320040"/>
+          </a:xfrm>
+          <a:prstGeom prst="rect">
+            <a:avLst/>
+          </a:prstGeom>
+          <a:noFill/>
+        </p:spPr>
+        <p:txBody>
+          <a:bodyPr wrap="square">
+            <a:spAutoFit/>
+          </a:bodyPr>
+          <a:lstStyle/>
+          <a:p>
+            <a:pPr algn="l">
+              <a:defRPr sz="700" b="0">
                 <a:solidFill>
                   <a:srgbClr val="8FA89C"/>
                 </a:solidFill>
@@ -15527,22 +15527,22 @@
         </p:nvSpPr>
         <p:spPr>
           <a:xfrm>
-            <a:off x="8092440" y="5120640"/>
-            <a:ext cx="2926080" cy="274320"/>
-          </a:xfrm>
-          <a:prstGeom prst="rect">
-            <a:avLst/>
-          </a:prstGeom>
-          <a:noFill/>
-        </p:spPr>
-        <p:txBody>
-          <a:bodyPr wrap="square">
-            <a:spAutoFit/>
-          </a:bodyPr>
-          <a:lstStyle/>
-          <a:p>
-            <a:pPr algn="l">
-              <a:defRPr sz="800" b="0">
+            <a:off x="8092440" y="5175504"/>
+            <a:ext cx="2926080" cy="320040"/>
+          </a:xfrm>
+          <a:prstGeom prst="rect">
+            <a:avLst/>
+          </a:prstGeom>
+          <a:noFill/>
+        </p:spPr>
+        <p:txBody>
+          <a:bodyPr wrap="square">
+            <a:spAutoFit/>
+          </a:bodyPr>
+          <a:lstStyle/>
+          <a:p>
+            <a:pPr algn="l">
+              <a:defRPr sz="700" b="0">
                 <a:solidFill>
                   <a:srgbClr val="8FA89C"/>
                 </a:solidFill>
@@ -15563,22 +15563,22 @@
         </p:nvSpPr>
         <p:spPr>
           <a:xfrm>
-            <a:off x="8092440" y="5394960"/>
-            <a:ext cx="2926080" cy="274320"/>
-          </a:xfrm>
-          <a:prstGeom prst="rect">
-            <a:avLst/>
-          </a:prstGeom>
-          <a:noFill/>
-        </p:spPr>
-        <p:txBody>
-          <a:bodyPr wrap="square">
-            <a:spAutoFit/>
-          </a:bodyPr>
-          <a:lstStyle/>
-          <a:p>
-            <a:pPr algn="l">
-              <a:defRPr sz="800" b="0">
+            <a:off x="8092440" y="5468112"/>
+            <a:ext cx="2926080" cy="320040"/>
+          </a:xfrm>
+          <a:prstGeom prst="rect">
+            <a:avLst/>
+          </a:prstGeom>
+          <a:noFill/>
+        </p:spPr>
+        <p:txBody>
+          <a:bodyPr wrap="square">
+            <a:spAutoFit/>
+          </a:bodyPr>
+          <a:lstStyle/>
+          <a:p>
+            <a:pPr algn="l">
+              <a:defRPr sz="700" b="0">
                 <a:solidFill>
                   <a:srgbClr val="8FA89C"/>
                 </a:solidFill>
@@ -15857,7 +15857,7 @@
         <p:spPr>
           <a:xfrm>
             <a:off x="731520" y="1737360"/>
-            <a:ext cx="9144000" cy="2743200"/>
+            <a:ext cx="9144000" cy="493776"/>
           </a:xfrm>
           <a:prstGeom prst="rect">
             <a:avLst/>
@@ -16041,7 +16041,7 @@
           <a:lstStyle/>
           <a:p>
             <a:pPr algn="ctr">
-              <a:defRPr sz="800" b="1">
+              <a:defRPr sz="700" b="1">
                 <a:solidFill>
                   <a:srgbClr val="0A0F0D"/>
                 </a:solidFill>
@@ -16077,7 +16077,7 @@
           <a:lstStyle/>
           <a:p>
             <a:pPr algn="l">
-              <a:defRPr sz="1000" b="1">
+              <a:defRPr sz="900" b="1">
                 <a:solidFill>
                   <a:srgbClr val="E8F0EC"/>
                 </a:solidFill>
@@ -16099,21 +16099,21 @@
         <p:spPr>
           <a:xfrm>
             <a:off x="1828800" y="3410712"/>
-            <a:ext cx="5303520" cy="594360"/>
-          </a:xfrm>
-          <a:prstGeom prst="rect">
-            <a:avLst/>
-          </a:prstGeom>
-          <a:noFill/>
-        </p:spPr>
-        <p:txBody>
-          <a:bodyPr wrap="square">
-            <a:spAutoFit/>
-          </a:bodyPr>
-          <a:lstStyle/>
-          <a:p>
-            <a:pPr algn="l">
-              <a:defRPr sz="800" b="0">
+            <a:ext cx="5303520" cy="685800"/>
+          </a:xfrm>
+          <a:prstGeom prst="rect">
+            <a:avLst/>
+          </a:prstGeom>
+          <a:noFill/>
+        </p:spPr>
+        <p:txBody>
+          <a:bodyPr wrap="square">
+            <a:spAutoFit/>
+          </a:bodyPr>
+          <a:lstStyle/>
+          <a:p>
+            <a:pPr algn="l">
+              <a:defRPr sz="700" b="0">
                 <a:solidFill>
                   <a:srgbClr val="8FA89C"/>
                 </a:solidFill>
@@ -16134,7 +16134,7 @@
         </p:nvSpPr>
         <p:spPr>
           <a:xfrm>
-            <a:off x="914400" y="4069080"/>
+            <a:off x="914400" y="4160520"/>
             <a:ext cx="777240" cy="201168"/>
           </a:xfrm>
           <a:prstGeom prst="roundRect">
@@ -16181,7 +16181,7 @@
         </p:nvSpPr>
         <p:spPr>
           <a:xfrm>
-            <a:off x="960120" y="4078224"/>
+            <a:off x="960120" y="4169664"/>
             <a:ext cx="731520" cy="182880"/>
           </a:xfrm>
           <a:prstGeom prst="rect">
@@ -16196,7 +16196,7 @@
           <a:lstStyle/>
           <a:p>
             <a:pPr algn="ctr">
-              <a:defRPr sz="800" b="1">
+              <a:defRPr sz="700" b="1">
                 <a:solidFill>
                   <a:srgbClr val="0A0F0D"/>
                 </a:solidFill>
@@ -16217,7 +16217,7 @@
         </p:nvSpPr>
         <p:spPr>
           <a:xfrm>
-            <a:off x="1828800" y="4069080"/>
+            <a:off x="1828800" y="4160520"/>
             <a:ext cx="5303520" cy="228600"/>
           </a:xfrm>
           <a:prstGeom prst="rect">
@@ -16232,7 +16232,7 @@
           <a:lstStyle/>
           <a:p>
             <a:pPr algn="l">
-              <a:defRPr sz="1000" b="1">
+              <a:defRPr sz="900" b="1">
                 <a:solidFill>
                   <a:srgbClr val="E8F0EC"/>
                 </a:solidFill>
@@ -16253,22 +16253,22 @@
         </p:nvSpPr>
         <p:spPr>
           <a:xfrm>
-            <a:off x="1828800" y="4325112"/>
-            <a:ext cx="5303520" cy="594360"/>
-          </a:xfrm>
-          <a:prstGeom prst="rect">
-            <a:avLst/>
-          </a:prstGeom>
-          <a:noFill/>
-        </p:spPr>
-        <p:txBody>
-          <a:bodyPr wrap="square">
-            <a:spAutoFit/>
-          </a:bodyPr>
-          <a:lstStyle/>
-          <a:p>
-            <a:pPr algn="l">
-              <a:defRPr sz="800" b="0">
+            <a:off x="1828800" y="4416552"/>
+            <a:ext cx="5303520" cy="685800"/>
+          </a:xfrm>
+          <a:prstGeom prst="rect">
+            <a:avLst/>
+          </a:prstGeom>
+          <a:noFill/>
+        </p:spPr>
+        <p:txBody>
+          <a:bodyPr wrap="square">
+            <a:spAutoFit/>
+          </a:bodyPr>
+          <a:lstStyle/>
+          <a:p>
+            <a:pPr algn="l">
+              <a:defRPr sz="700" b="0">
                 <a:solidFill>
                   <a:srgbClr val="8FA89C"/>
                 </a:solidFill>
@@ -16289,7 +16289,7 @@
         </p:nvSpPr>
         <p:spPr>
           <a:xfrm>
-            <a:off x="914400" y="4983480"/>
+            <a:off x="914400" y="5166360"/>
             <a:ext cx="777240" cy="201168"/>
           </a:xfrm>
           <a:prstGeom prst="roundRect">
@@ -16336,7 +16336,7 @@
         </p:nvSpPr>
         <p:spPr>
           <a:xfrm>
-            <a:off x="960120" y="4992624"/>
+            <a:off x="960120" y="5175504"/>
             <a:ext cx="731520" cy="182880"/>
           </a:xfrm>
           <a:prstGeom prst="rect">
@@ -16351,7 +16351,7 @@
           <a:lstStyle/>
           <a:p>
             <a:pPr algn="ctr">
-              <a:defRPr sz="800" b="1">
+              <a:defRPr sz="700" b="1">
                 <a:solidFill>
                   <a:srgbClr val="0A0F0D"/>
                 </a:solidFill>
@@ -16372,7 +16372,7 @@
         </p:nvSpPr>
         <p:spPr>
           <a:xfrm>
-            <a:off x="1828800" y="4983480"/>
+            <a:off x="1828800" y="5166360"/>
             <a:ext cx="5303520" cy="228600"/>
           </a:xfrm>
           <a:prstGeom prst="rect">
@@ -16387,7 +16387,7 @@
           <a:lstStyle/>
           <a:p>
             <a:pPr algn="l">
-              <a:defRPr sz="1000" b="1">
+              <a:defRPr sz="900" b="1">
                 <a:solidFill>
                   <a:srgbClr val="E8F0EC"/>
                 </a:solidFill>
@@ -16408,22 +16408,22 @@
         </p:nvSpPr>
         <p:spPr>
           <a:xfrm>
-            <a:off x="1828800" y="5239512"/>
-            <a:ext cx="5303520" cy="594360"/>
-          </a:xfrm>
-          <a:prstGeom prst="rect">
-            <a:avLst/>
-          </a:prstGeom>
-          <a:noFill/>
-        </p:spPr>
-        <p:txBody>
-          <a:bodyPr wrap="square">
-            <a:spAutoFit/>
-          </a:bodyPr>
-          <a:lstStyle/>
-          <a:p>
-            <a:pPr algn="l">
-              <a:defRPr sz="800" b="0">
+            <a:off x="1828800" y="5422392"/>
+            <a:ext cx="5303520" cy="685800"/>
+          </a:xfrm>
+          <a:prstGeom prst="rect">
+            <a:avLst/>
+          </a:prstGeom>
+          <a:noFill/>
+        </p:spPr>
+        <p:txBody>
+          <a:bodyPr wrap="square">
+            <a:spAutoFit/>
+          </a:bodyPr>
+          <a:lstStyle/>
+          <a:p>
+            <a:pPr algn="l">
+              <a:defRPr sz="700" b="0">
                 <a:solidFill>
                   <a:srgbClr val="8FA89C"/>
                 </a:solidFill>
@@ -16542,7 +16542,7 @@
           <a:lstStyle/>
           <a:p>
             <a:pPr algn="l">
-              <a:defRPr sz="1300" b="1">
+              <a:defRPr sz="1200" b="1">
                 <a:solidFill>
                   <a:srgbClr val="E8F0EC"/>
                 </a:solidFill>
@@ -16578,7 +16578,7 @@
           <a:lstStyle/>
           <a:p>
             <a:pPr algn="l">
-              <a:defRPr sz="800" b="0">
+              <a:defRPr sz="700" b="0">
                 <a:solidFill>
                   <a:srgbClr val="5A7268"/>
                 </a:solidFill>
@@ -16650,7 +16650,7 @@
           <a:lstStyle/>
           <a:p>
             <a:pPr algn="l">
-              <a:defRPr sz="1300" b="1">
+              <a:defRPr sz="1200" b="1">
                 <a:solidFill>
                   <a:srgbClr val="E8F0EC"/>
                 </a:solidFill>
@@ -16686,7 +16686,7 @@
           <a:lstStyle/>
           <a:p>
             <a:pPr algn="l">
-              <a:defRPr sz="800" b="0">
+              <a:defRPr sz="700" b="0">
                 <a:solidFill>
                   <a:srgbClr val="5A7268"/>
                 </a:solidFill>
@@ -16758,7 +16758,7 @@
           <a:lstStyle/>
           <a:p>
             <a:pPr algn="l">
-              <a:defRPr sz="1300" b="1">
+              <a:defRPr sz="1200" b="1">
                 <a:solidFill>
                   <a:srgbClr val="E8F0EC"/>
                 </a:solidFill>
@@ -16794,7 +16794,7 @@
           <a:lstStyle/>
           <a:p>
             <a:pPr algn="l">
-              <a:defRPr sz="800" b="0">
+              <a:defRPr sz="700" b="0">
                 <a:solidFill>
                   <a:srgbClr val="5A7268"/>
                 </a:solidFill>
@@ -16866,7 +16866,7 @@
           <a:lstStyle/>
           <a:p>
             <a:pPr algn="l">
-              <a:defRPr sz="1300" b="1">
+              <a:defRPr sz="1200" b="1">
                 <a:solidFill>
                   <a:srgbClr val="E8F0EC"/>
                 </a:solidFill>
@@ -16902,7 +16902,7 @@
           <a:lstStyle/>
           <a:p>
             <a:pPr algn="l">
-              <a:defRPr sz="800" b="0">
+              <a:defRPr sz="700" b="0">
                 <a:solidFill>
                   <a:srgbClr val="5A7268"/>
                 </a:solidFill>
@@ -16974,7 +16974,7 @@
           <a:lstStyle/>
           <a:p>
             <a:pPr algn="l">
-              <a:defRPr sz="1300" b="1">
+              <a:defRPr sz="1200" b="1">
                 <a:solidFill>
                   <a:srgbClr val="E8F0EC"/>
                 </a:solidFill>
@@ -17010,7 +17010,7 @@
           <a:lstStyle/>
           <a:p>
             <a:pPr algn="l">
-              <a:defRPr sz="800" b="0">
+              <a:defRPr sz="700" b="0">
                 <a:solidFill>
                   <a:srgbClr val="5A7268"/>
                 </a:solidFill>
@@ -17202,7 +17202,7 @@
         <p:spPr>
           <a:xfrm>
             <a:off x="731520" y="914400"/>
-            <a:ext cx="9144000" cy="1097280"/>
+            <a:ext cx="9144000" cy="594360"/>
           </a:xfrm>
           <a:prstGeom prst="rect">
             <a:avLst/>
@@ -17299,7 +17299,7 @@
           <a:lstStyle/>
           <a:p>
             <a:pPr algn="l">
-              <a:defRPr sz="1100" b="1">
+              <a:defRPr sz="1000" b="1">
                 <a:solidFill>
                   <a:srgbClr val="00C978"/>
                 </a:solidFill>
@@ -17321,21 +17321,21 @@
         <p:spPr>
           <a:xfrm>
             <a:off x="2286000" y="2011680"/>
-            <a:ext cx="8503920" cy="914400"/>
-          </a:xfrm>
-          <a:prstGeom prst="rect">
-            <a:avLst/>
-          </a:prstGeom>
-          <a:noFill/>
-        </p:spPr>
-        <p:txBody>
-          <a:bodyPr wrap="square">
-            <a:spAutoFit/>
-          </a:bodyPr>
-          <a:lstStyle/>
-          <a:p>
-            <a:pPr algn="l">
-              <a:defRPr sz="1100" b="0">
+            <a:ext cx="8503920" cy="1051560"/>
+          </a:xfrm>
+          <a:prstGeom prst="rect">
+            <a:avLst/>
+          </a:prstGeom>
+          <a:noFill/>
+        </p:spPr>
+        <p:txBody>
+          <a:bodyPr wrap="square">
+            <a:spAutoFit/>
+          </a:bodyPr>
+          <a:lstStyle/>
+          <a:p>
+            <a:pPr algn="l">
+              <a:defRPr sz="1000" b="0">
                 <a:solidFill>
                   <a:srgbClr val="8FA89C"/>
                 </a:solidFill>
@@ -17356,7 +17356,7 @@
         </p:nvSpPr>
         <p:spPr>
           <a:xfrm>
-            <a:off x="1005840" y="2926080"/>
+            <a:off x="1005840" y="3017520"/>
             <a:ext cx="9784080" cy="12700"/>
           </a:xfrm>
           <a:prstGeom prst="rect">
@@ -17399,7 +17399,7 @@
         </p:nvSpPr>
         <p:spPr>
           <a:xfrm>
-            <a:off x="1005840" y="3063240"/>
+            <a:off x="1005840" y="3154680"/>
             <a:ext cx="1097280" cy="274320"/>
           </a:xfrm>
           <a:prstGeom prst="rect">
@@ -17414,7 +17414,7 @@
           <a:lstStyle/>
           <a:p>
             <a:pPr algn="l">
-              <a:defRPr sz="1100" b="1">
+              <a:defRPr sz="1000" b="1">
                 <a:solidFill>
                   <a:srgbClr val="00C978"/>
                 </a:solidFill>
@@ -17435,22 +17435,22 @@
         </p:nvSpPr>
         <p:spPr>
           <a:xfrm>
-            <a:off x="2286000" y="3063240"/>
-            <a:ext cx="8503920" cy="914400"/>
-          </a:xfrm>
-          <a:prstGeom prst="rect">
-            <a:avLst/>
-          </a:prstGeom>
-          <a:noFill/>
-        </p:spPr>
-        <p:txBody>
-          <a:bodyPr wrap="square">
-            <a:spAutoFit/>
-          </a:bodyPr>
-          <a:lstStyle/>
-          <a:p>
-            <a:pPr algn="l">
-              <a:defRPr sz="1100" b="0">
+            <a:off x="2286000" y="3154680"/>
+            <a:ext cx="8503920" cy="1051560"/>
+          </a:xfrm>
+          <a:prstGeom prst="rect">
+            <a:avLst/>
+          </a:prstGeom>
+          <a:noFill/>
+        </p:spPr>
+        <p:txBody>
+          <a:bodyPr wrap="square">
+            <a:spAutoFit/>
+          </a:bodyPr>
+          <a:lstStyle/>
+          <a:p>
+            <a:pPr algn="l">
+              <a:defRPr sz="1000" b="0">
                 <a:solidFill>
                   <a:srgbClr val="8FA89C"/>
                 </a:solidFill>
@@ -17471,7 +17471,7 @@
         </p:nvSpPr>
         <p:spPr>
           <a:xfrm>
-            <a:off x="1005840" y="3977640"/>
+            <a:off x="1005840" y="4160520"/>
             <a:ext cx="9784080" cy="12700"/>
           </a:xfrm>
           <a:prstGeom prst="rect">
@@ -17514,7 +17514,7 @@
         </p:nvSpPr>
         <p:spPr>
           <a:xfrm>
-            <a:off x="1005840" y="4114800"/>
+            <a:off x="1005840" y="4297680"/>
             <a:ext cx="1097280" cy="274320"/>
           </a:xfrm>
           <a:prstGeom prst="rect">
@@ -17529,7 +17529,7 @@
           <a:lstStyle/>
           <a:p>
             <a:pPr algn="l">
-              <a:defRPr sz="1100" b="1">
+              <a:defRPr sz="1000" b="1">
                 <a:solidFill>
                   <a:srgbClr val="00C978"/>
                 </a:solidFill>
@@ -17550,22 +17550,22 @@
         </p:nvSpPr>
         <p:spPr>
           <a:xfrm>
-            <a:off x="2286000" y="4114800"/>
-            <a:ext cx="8503920" cy="914400"/>
-          </a:xfrm>
-          <a:prstGeom prst="rect">
-            <a:avLst/>
-          </a:prstGeom>
-          <a:noFill/>
-        </p:spPr>
-        <p:txBody>
-          <a:bodyPr wrap="square">
-            <a:spAutoFit/>
-          </a:bodyPr>
-          <a:lstStyle/>
-          <a:p>
-            <a:pPr algn="l">
-              <a:defRPr sz="1100" b="0">
+            <a:off x="2286000" y="4297680"/>
+            <a:ext cx="8503920" cy="1051560"/>
+          </a:xfrm>
+          <a:prstGeom prst="rect">
+            <a:avLst/>
+          </a:prstGeom>
+          <a:noFill/>
+        </p:spPr>
+        <p:txBody>
+          <a:bodyPr wrap="square">
+            <a:spAutoFit/>
+          </a:bodyPr>
+          <a:lstStyle/>
+          <a:p>
+            <a:pPr algn="l">
+              <a:defRPr sz="1000" b="0">
                 <a:solidFill>
                   <a:srgbClr val="8FA89C"/>
                 </a:solidFill>
@@ -17586,7 +17586,7 @@
         </p:nvSpPr>
         <p:spPr>
           <a:xfrm>
-            <a:off x="1005840" y="5029200"/>
+            <a:off x="1005840" y="5303520"/>
             <a:ext cx="9784080" cy="12700"/>
           </a:xfrm>
           <a:prstGeom prst="rect">
@@ -17629,7 +17629,7 @@
         </p:nvSpPr>
         <p:spPr>
           <a:xfrm>
-            <a:off x="1005840" y="5166360"/>
+            <a:off x="1005840" y="5440680"/>
             <a:ext cx="1097280" cy="274320"/>
           </a:xfrm>
           <a:prstGeom prst="rect">
@@ -17644,7 +17644,7 @@
           <a:lstStyle/>
           <a:p>
             <a:pPr algn="l">
-              <a:defRPr sz="1100" b="1">
+              <a:defRPr sz="1000" b="1">
                 <a:solidFill>
                   <a:srgbClr val="00C978"/>
                 </a:solidFill>
@@ -17665,22 +17665,22 @@
         </p:nvSpPr>
         <p:spPr>
           <a:xfrm>
-            <a:off x="2286000" y="5166360"/>
-            <a:ext cx="8503920" cy="914400"/>
-          </a:xfrm>
-          <a:prstGeom prst="rect">
-            <a:avLst/>
-          </a:prstGeom>
-          <a:noFill/>
-        </p:spPr>
-        <p:txBody>
-          <a:bodyPr wrap="square">
-            <a:spAutoFit/>
-          </a:bodyPr>
-          <a:lstStyle/>
-          <a:p>
-            <a:pPr algn="l">
-              <a:defRPr sz="1100" b="0">
+            <a:off x="2286000" y="5440680"/>
+            <a:ext cx="8503920" cy="1051560"/>
+          </a:xfrm>
+          <a:prstGeom prst="rect">
+            <a:avLst/>
+          </a:prstGeom>
+          <a:noFill/>
+        </p:spPr>
+        <p:txBody>
+          <a:bodyPr wrap="square">
+            <a:spAutoFit/>
+          </a:bodyPr>
+          <a:lstStyle/>
+          <a:p>
+            <a:pPr algn="l">
+              <a:defRPr sz="1000" b="0">
                 <a:solidFill>
                   <a:srgbClr val="8FA89C"/>
                 </a:solidFill>
@@ -17959,7 +17959,7 @@
         <p:spPr>
           <a:xfrm>
             <a:off x="731520" y="1737360"/>
-            <a:ext cx="9144000" cy="2743200"/>
+            <a:ext cx="9144000" cy="493776"/>
           </a:xfrm>
           <a:prstGeom prst="rect">
             <a:avLst/>
@@ -19872,7 +19872,7 @@
         </p:nvSpPr>
         <p:spPr>
           <a:xfrm>
-            <a:off x="7863840" y="4526280"/>
+            <a:off x="7863840" y="4572000"/>
             <a:ext cx="3200400" cy="228600"/>
           </a:xfrm>
           <a:prstGeom prst="rect">
@@ -19887,7 +19887,7 @@
           <a:lstStyle/>
           <a:p>
             <a:pPr algn="l">
-              <a:defRPr sz="1000" b="1">
+              <a:defRPr sz="900" b="1">
                 <a:solidFill>
                   <a:srgbClr val="E8F0EC"/>
                 </a:solidFill>
@@ -19908,7 +19908,7 @@
         </p:nvSpPr>
         <p:spPr>
           <a:xfrm>
-            <a:off x="7863840" y="4800600"/>
+            <a:off x="7863840" y="4828032"/>
             <a:ext cx="3200400" cy="731520"/>
           </a:xfrm>
           <a:prstGeom prst="rect">
@@ -19923,7 +19923,7 @@
           <a:lstStyle/>
           <a:p>
             <a:pPr algn="l">
-              <a:defRPr sz="800" b="0">
+              <a:defRPr sz="700" b="0">
                 <a:solidFill>
                   <a:srgbClr val="8FA89C"/>
                 </a:solidFill>
@@ -19956,7 +19956,7 @@
         </p:nvSpPr>
         <p:spPr>
           <a:xfrm>
-            <a:off x="7863840" y="5577840"/>
+            <a:off x="7863840" y="5715000"/>
             <a:ext cx="914400" cy="228600"/>
           </a:xfrm>
           <a:prstGeom prst="roundRect">
@@ -20003,7 +20003,7 @@
         </p:nvSpPr>
         <p:spPr>
           <a:xfrm>
-            <a:off x="7909560" y="5596128"/>
+            <a:off x="7909560" y="5733288"/>
             <a:ext cx="822960" cy="182880"/>
           </a:xfrm>
           <a:prstGeom prst="rect">
@@ -20018,7 +20018,7 @@
           <a:lstStyle/>
           <a:p>
             <a:pPr algn="ctr">
-              <a:defRPr sz="800" b="1">
+              <a:defRPr sz="700" b="1">
                 <a:solidFill>
                   <a:srgbClr val="0A0F0D"/>
                 </a:solidFill>
@@ -20039,7 +20039,7 @@
         </p:nvSpPr>
         <p:spPr>
           <a:xfrm>
-            <a:off x="8961120" y="5577840"/>
+            <a:off x="8961120" y="5715000"/>
             <a:ext cx="914400" cy="228600"/>
           </a:xfrm>
           <a:prstGeom prst="roundRect">
@@ -20086,7 +20086,7 @@
         </p:nvSpPr>
         <p:spPr>
           <a:xfrm>
-            <a:off x="9006840" y="5596128"/>
+            <a:off x="9006840" y="5733288"/>
             <a:ext cx="822960" cy="182880"/>
           </a:xfrm>
           <a:prstGeom prst="rect">
@@ -20101,7 +20101,7 @@
           <a:lstStyle/>
           <a:p>
             <a:pPr algn="ctr">
-              <a:defRPr sz="800" b="1">
+              <a:defRPr sz="700" b="1">
                 <a:solidFill>
                   <a:srgbClr val="0A0F0D"/>
                 </a:solidFill>
@@ -20380,7 +20380,7 @@
         <p:spPr>
           <a:xfrm>
             <a:off x="731520" y="1737360"/>
-            <a:ext cx="9144000" cy="2743200"/>
+            <a:ext cx="9144000" cy="493776"/>
           </a:xfrm>
           <a:prstGeom prst="rect">
             <a:avLst/>
@@ -21680,7 +21680,7 @@
           <a:lstStyle/>
           <a:p>
             <a:pPr algn="l">
-              <a:defRPr sz="1000" b="1">
+              <a:defRPr sz="900" b="1">
                 <a:solidFill>
                   <a:srgbClr val="E8F0EC"/>
                 </a:solidFill>
@@ -21702,21 +21702,21 @@
         <p:spPr>
           <a:xfrm>
             <a:off x="1005840" y="5321808"/>
-            <a:ext cx="2743200" cy="731520"/>
-          </a:xfrm>
-          <a:prstGeom prst="rect">
-            <a:avLst/>
-          </a:prstGeom>
-          <a:noFill/>
-        </p:spPr>
-        <p:txBody>
-          <a:bodyPr wrap="square">
-            <a:spAutoFit/>
-          </a:bodyPr>
-          <a:lstStyle/>
-          <a:p>
-            <a:pPr algn="l">
-              <a:defRPr sz="800" b="0">
+            <a:ext cx="2743200" cy="777240"/>
+          </a:xfrm>
+          <a:prstGeom prst="rect">
+            <a:avLst/>
+          </a:prstGeom>
+          <a:noFill/>
+        </p:spPr>
+        <p:txBody>
+          <a:bodyPr wrap="square">
+            <a:spAutoFit/>
+          </a:bodyPr>
+          <a:lstStyle/>
+          <a:p>
+            <a:pPr algn="l">
+              <a:defRPr sz="700" b="0">
                 <a:solidFill>
                   <a:srgbClr val="8FA89C"/>
                 </a:solidFill>
@@ -23073,7 +23073,7 @@
         <p:spPr>
           <a:xfrm>
             <a:off x="731520" y="1737360"/>
-            <a:ext cx="9144000" cy="2743200"/>
+            <a:ext cx="9144000" cy="493776"/>
           </a:xfrm>
           <a:prstGeom prst="rect">
             <a:avLst/>
@@ -23113,7 +23113,7 @@
         <p:spPr>
           <a:xfrm>
             <a:off x="548640" y="2651760"/>
-            <a:ext cx="1216152" cy="1371600"/>
+            <a:ext cx="1216152" cy="1280160"/>
           </a:xfrm>
           <a:prstGeom prst="roundRect">
             <a:avLst>
@@ -23159,8 +23159,8 @@
         </p:nvSpPr>
         <p:spPr>
           <a:xfrm>
-            <a:off x="640080" y="2743200"/>
-            <a:ext cx="1033272" cy="201168"/>
+            <a:off x="621792" y="2724912"/>
+            <a:ext cx="1069848" cy="182880"/>
           </a:xfrm>
           <a:prstGeom prst="rect">
             <a:avLst/>
@@ -23174,7 +23174,7 @@
           <a:lstStyle/>
           <a:p>
             <a:pPr algn="ctr">
-              <a:defRPr sz="800" b="1">
+              <a:defRPr sz="700" b="1">
                 <a:solidFill>
                   <a:srgbClr val="00C978"/>
                 </a:solidFill>
@@ -23195,8 +23195,8 @@
         </p:nvSpPr>
         <p:spPr>
           <a:xfrm>
-            <a:off x="640080" y="2999232"/>
-            <a:ext cx="1033272" cy="822960"/>
+            <a:off x="621792" y="2944368"/>
+            <a:ext cx="1069848" cy="822960"/>
           </a:xfrm>
           <a:prstGeom prst="rect">
             <a:avLst/>
@@ -23210,7 +23210,7 @@
           <a:lstStyle/>
           <a:p>
             <a:pPr algn="ctr">
-              <a:defRPr sz="700" b="0">
+              <a:defRPr sz="600" b="0">
                 <a:solidFill>
                   <a:srgbClr val="8FA89C"/>
                 </a:solidFill>
@@ -23235,7 +23235,7 @@
         </p:nvSpPr>
         <p:spPr>
           <a:xfrm>
-            <a:off x="1764792" y="3063240"/>
+            <a:off x="1764792" y="3017520"/>
             <a:ext cx="91440" cy="182880"/>
           </a:xfrm>
           <a:prstGeom prst="rect">
@@ -23250,7 +23250,7 @@
           <a:lstStyle/>
           <a:p>
             <a:pPr algn="ctr">
-              <a:defRPr sz="1000" b="0">
+              <a:defRPr sz="800" b="0">
                 <a:solidFill>
                   <a:srgbClr val="5A7268"/>
                 </a:solidFill>
@@ -23272,7 +23272,7 @@
         <p:spPr>
           <a:xfrm>
             <a:off x="1810512" y="2651760"/>
-            <a:ext cx="1216152" cy="1371600"/>
+            <a:ext cx="1216152" cy="1280160"/>
           </a:xfrm>
           <a:prstGeom prst="roundRect">
             <a:avLst>
@@ -23318,8 +23318,8 @@
         </p:nvSpPr>
         <p:spPr>
           <a:xfrm>
-            <a:off x="1901952" y="2743200"/>
-            <a:ext cx="1033272" cy="201168"/>
+            <a:off x="1883664" y="2724912"/>
+            <a:ext cx="1069848" cy="182880"/>
           </a:xfrm>
           <a:prstGeom prst="rect">
             <a:avLst/>
@@ -23333,7 +23333,7 @@
           <a:lstStyle/>
           <a:p>
             <a:pPr algn="ctr">
-              <a:defRPr sz="800" b="1">
+              <a:defRPr sz="700" b="1">
                 <a:solidFill>
                   <a:srgbClr val="00C978"/>
                 </a:solidFill>
@@ -23354,8 +23354,8 @@
         </p:nvSpPr>
         <p:spPr>
           <a:xfrm>
-            <a:off x="1901952" y="2999232"/>
-            <a:ext cx="1033272" cy="822960"/>
+            <a:off x="1883664" y="2944368"/>
+            <a:ext cx="1069848" cy="822960"/>
           </a:xfrm>
           <a:prstGeom prst="rect">
             <a:avLst/>
@@ -23369,7 +23369,7 @@
           <a:lstStyle/>
           <a:p>
             <a:pPr algn="ctr">
-              <a:defRPr sz="700" b="0">
+              <a:defRPr sz="600" b="0">
                 <a:solidFill>
                   <a:srgbClr val="8FA89C"/>
                 </a:solidFill>
@@ -23394,7 +23394,7 @@
         </p:nvSpPr>
         <p:spPr>
           <a:xfrm>
-            <a:off x="3026664" y="3063240"/>
+            <a:off x="3026664" y="3017520"/>
             <a:ext cx="91440" cy="182880"/>
           </a:xfrm>
           <a:prstGeom prst="rect">
@@ -23409,7 +23409,7 @@
           <a:lstStyle/>
           <a:p>
             <a:pPr algn="ctr">
-              <a:defRPr sz="1000" b="0">
+              <a:defRPr sz="800" b="0">
                 <a:solidFill>
                   <a:srgbClr val="5A7268"/>
                 </a:solidFill>
@@ -23431,7 +23431,7 @@
         <p:spPr>
           <a:xfrm>
             <a:off x="3072384" y="2651760"/>
-            <a:ext cx="1216152" cy="1371600"/>
+            <a:ext cx="1216152" cy="1280160"/>
           </a:xfrm>
           <a:prstGeom prst="roundRect">
             <a:avLst>
@@ -23477,8 +23477,8 @@
         </p:nvSpPr>
         <p:spPr>
           <a:xfrm>
-            <a:off x="3163824" y="2743200"/>
-            <a:ext cx="1033272" cy="201168"/>
+            <a:off x="3145536" y="2724912"/>
+            <a:ext cx="1069848" cy="182880"/>
           </a:xfrm>
           <a:prstGeom prst="rect">
             <a:avLst/>
@@ -23492,7 +23492,7 @@
           <a:lstStyle/>
           <a:p>
             <a:pPr algn="ctr">
-              <a:defRPr sz="800" b="1">
+              <a:defRPr sz="700" b="1">
                 <a:solidFill>
                   <a:srgbClr val="54A0FF"/>
                 </a:solidFill>
@@ -23513,8 +23513,8 @@
         </p:nvSpPr>
         <p:spPr>
           <a:xfrm>
-            <a:off x="3163824" y="2999232"/>
-            <a:ext cx="1033272" cy="822960"/>
+            <a:off x="3145536" y="2944368"/>
+            <a:ext cx="1069848" cy="822960"/>
           </a:xfrm>
           <a:prstGeom prst="rect">
             <a:avLst/>
@@ -23528,7 +23528,7 @@
           <a:lstStyle/>
           <a:p>
             <a:pPr algn="ctr">
-              <a:defRPr sz="700" b="0">
+              <a:defRPr sz="600" b="0">
                 <a:solidFill>
                   <a:srgbClr val="8FA89C"/>
                 </a:solidFill>
@@ -23553,7 +23553,7 @@
         </p:nvSpPr>
         <p:spPr>
           <a:xfrm>
-            <a:off x="4288536" y="3063240"/>
+            <a:off x="4288536" y="3017520"/>
             <a:ext cx="91440" cy="182880"/>
           </a:xfrm>
           <a:prstGeom prst="rect">
@@ -23568,7 +23568,7 @@
           <a:lstStyle/>
           <a:p>
             <a:pPr algn="ctr">
-              <a:defRPr sz="1000" b="0">
+              <a:defRPr sz="800" b="0">
                 <a:solidFill>
                   <a:srgbClr val="5A7268"/>
                 </a:solidFill>
@@ -23590,7 +23590,7 @@
         <p:spPr>
           <a:xfrm>
             <a:off x="4334256" y="2651760"/>
-            <a:ext cx="1216152" cy="1371600"/>
+            <a:ext cx="1216152" cy="1280160"/>
           </a:xfrm>
           <a:prstGeom prst="roundRect">
             <a:avLst>
@@ -23636,8 +23636,8 @@
         </p:nvSpPr>
         <p:spPr>
           <a:xfrm>
-            <a:off x="4425696" y="2743200"/>
-            <a:ext cx="1033272" cy="201168"/>
+            <a:off x="4407408" y="2724912"/>
+            <a:ext cx="1069848" cy="182880"/>
           </a:xfrm>
           <a:prstGeom prst="rect">
             <a:avLst/>
@@ -23651,7 +23651,7 @@
           <a:lstStyle/>
           <a:p>
             <a:pPr algn="ctr">
-              <a:defRPr sz="800" b="1">
+              <a:defRPr sz="700" b="1">
                 <a:solidFill>
                   <a:srgbClr val="54A0FF"/>
                 </a:solidFill>
@@ -23672,8 +23672,8 @@
         </p:nvSpPr>
         <p:spPr>
           <a:xfrm>
-            <a:off x="4425696" y="2999232"/>
-            <a:ext cx="1033272" cy="822960"/>
+            <a:off x="4407408" y="2944368"/>
+            <a:ext cx="1069848" cy="822960"/>
           </a:xfrm>
           <a:prstGeom prst="rect">
             <a:avLst/>
@@ -23687,7 +23687,7 @@
           <a:lstStyle/>
           <a:p>
             <a:pPr algn="ctr">
-              <a:defRPr sz="700" b="0">
+              <a:defRPr sz="600" b="0">
                 <a:solidFill>
                   <a:srgbClr val="8FA89C"/>
                 </a:solidFill>
@@ -23712,7 +23712,7 @@
         </p:nvSpPr>
         <p:spPr>
           <a:xfrm>
-            <a:off x="5550408" y="3063240"/>
+            <a:off x="5550408" y="3017520"/>
             <a:ext cx="91440" cy="182880"/>
           </a:xfrm>
           <a:prstGeom prst="rect">
@@ -23727,7 +23727,7 @@
           <a:lstStyle/>
           <a:p>
             <a:pPr algn="ctr">
-              <a:defRPr sz="1000" b="0">
+              <a:defRPr sz="800" b="0">
                 <a:solidFill>
                   <a:srgbClr val="5A7268"/>
                 </a:solidFill>
@@ -23749,7 +23749,7 @@
         <p:spPr>
           <a:xfrm>
             <a:off x="5596128" y="2651760"/>
-            <a:ext cx="1216152" cy="1371600"/>
+            <a:ext cx="1216152" cy="1280160"/>
           </a:xfrm>
           <a:prstGeom prst="roundRect">
             <a:avLst>
@@ -23795,8 +23795,8 @@
         </p:nvSpPr>
         <p:spPr>
           <a:xfrm>
-            <a:off x="5687568" y="2743200"/>
-            <a:ext cx="1033272" cy="201168"/>
+            <a:off x="5669280" y="2724912"/>
+            <a:ext cx="1069848" cy="182880"/>
           </a:xfrm>
           <a:prstGeom prst="rect">
             <a:avLst/>
@@ -23810,7 +23810,7 @@
           <a:lstStyle/>
           <a:p>
             <a:pPr algn="ctr">
-              <a:defRPr sz="800" b="1">
+              <a:defRPr sz="700" b="1">
                 <a:solidFill>
                   <a:srgbClr val="FF9F43"/>
                 </a:solidFill>
@@ -23831,8 +23831,8 @@
         </p:nvSpPr>
         <p:spPr>
           <a:xfrm>
-            <a:off x="5687568" y="2999232"/>
-            <a:ext cx="1033272" cy="822960"/>
+            <a:off x="5669280" y="2944368"/>
+            <a:ext cx="1069848" cy="822960"/>
           </a:xfrm>
           <a:prstGeom prst="rect">
             <a:avLst/>
@@ -23846,7 +23846,7 @@
           <a:lstStyle/>
           <a:p>
             <a:pPr algn="ctr">
-              <a:defRPr sz="700" b="0">
+              <a:defRPr sz="600" b="0">
                 <a:solidFill>
                   <a:srgbClr val="8FA89C"/>
                 </a:solidFill>
@@ -23871,7 +23871,7 @@
         </p:nvSpPr>
         <p:spPr>
           <a:xfrm>
-            <a:off x="6812280" y="3063240"/>
+            <a:off x="6812280" y="3017520"/>
             <a:ext cx="91440" cy="182880"/>
           </a:xfrm>
           <a:prstGeom prst="rect">
@@ -23886,7 +23886,7 @@
           <a:lstStyle/>
           <a:p>
             <a:pPr algn="ctr">
-              <a:defRPr sz="1000" b="0">
+              <a:defRPr sz="800" b="0">
                 <a:solidFill>
                   <a:srgbClr val="5A7268"/>
                 </a:solidFill>
@@ -23908,7 +23908,7 @@
         <p:spPr>
           <a:xfrm>
             <a:off x="6858000" y="2651760"/>
-            <a:ext cx="1216152" cy="1371600"/>
+            <a:ext cx="1216152" cy="1280160"/>
           </a:xfrm>
           <a:prstGeom prst="roundRect">
             <a:avLst>
@@ -23954,8 +23954,8 @@
         </p:nvSpPr>
         <p:spPr>
           <a:xfrm>
-            <a:off x="6949440" y="2743200"/>
-            <a:ext cx="1033272" cy="201168"/>
+            <a:off x="6931152" y="2724912"/>
+            <a:ext cx="1069848" cy="182880"/>
           </a:xfrm>
           <a:prstGeom prst="rect">
             <a:avLst/>
@@ -23969,7 +23969,7 @@
           <a:lstStyle/>
           <a:p>
             <a:pPr algn="ctr">
-              <a:defRPr sz="800" b="1">
+              <a:defRPr sz="700" b="1">
                 <a:solidFill>
                   <a:srgbClr val="FF9F43"/>
                 </a:solidFill>
@@ -23990,8 +23990,8 @@
         </p:nvSpPr>
         <p:spPr>
           <a:xfrm>
-            <a:off x="6949440" y="2999232"/>
-            <a:ext cx="1033272" cy="822960"/>
+            <a:off x="6931152" y="2944368"/>
+            <a:ext cx="1069848" cy="822960"/>
           </a:xfrm>
           <a:prstGeom prst="rect">
             <a:avLst/>
@@ -24005,7 +24005,7 @@
           <a:lstStyle/>
           <a:p>
             <a:pPr algn="ctr">
-              <a:defRPr sz="700" b="0">
+              <a:defRPr sz="600" b="0">
                 <a:solidFill>
                   <a:srgbClr val="8FA89C"/>
                 </a:solidFill>
@@ -24030,7 +24030,7 @@
         </p:nvSpPr>
         <p:spPr>
           <a:xfrm>
-            <a:off x="8074152" y="3063240"/>
+            <a:off x="8074152" y="3017520"/>
             <a:ext cx="91440" cy="182880"/>
           </a:xfrm>
           <a:prstGeom prst="rect">
@@ -24045,7 +24045,7 @@
           <a:lstStyle/>
           <a:p>
             <a:pPr algn="ctr">
-              <a:defRPr sz="1000" b="0">
+              <a:defRPr sz="800" b="0">
                 <a:solidFill>
                   <a:srgbClr val="5A7268"/>
                 </a:solidFill>
@@ -24067,7 +24067,7 @@
         <p:spPr>
           <a:xfrm>
             <a:off x="8119872" y="2651760"/>
-            <a:ext cx="1216152" cy="1371600"/>
+            <a:ext cx="1216152" cy="1280160"/>
           </a:xfrm>
           <a:prstGeom prst="roundRect">
             <a:avLst>
@@ -24113,8 +24113,8 @@
         </p:nvSpPr>
         <p:spPr>
           <a:xfrm>
-            <a:off x="8211312" y="2743200"/>
-            <a:ext cx="1033272" cy="201168"/>
+            <a:off x="8193024" y="2724912"/>
+            <a:ext cx="1069848" cy="182880"/>
           </a:xfrm>
           <a:prstGeom prst="rect">
             <a:avLst/>
@@ -24128,7 +24128,7 @@
           <a:lstStyle/>
           <a:p>
             <a:pPr algn="ctr">
-              <a:defRPr sz="800" b="1">
+              <a:defRPr sz="700" b="1">
                 <a:solidFill>
                   <a:srgbClr val="FF6B6B"/>
                 </a:solidFill>
@@ -24149,8 +24149,8 @@
         </p:nvSpPr>
         <p:spPr>
           <a:xfrm>
-            <a:off x="8211312" y="2999232"/>
-            <a:ext cx="1033272" cy="822960"/>
+            <a:off x="8193024" y="2944368"/>
+            <a:ext cx="1069848" cy="822960"/>
           </a:xfrm>
           <a:prstGeom prst="rect">
             <a:avLst/>
@@ -24164,7 +24164,7 @@
           <a:lstStyle/>
           <a:p>
             <a:pPr algn="ctr">
-              <a:defRPr sz="700" b="0">
+              <a:defRPr sz="600" b="0">
                 <a:solidFill>
                   <a:srgbClr val="8FA89C"/>
                 </a:solidFill>
@@ -24189,7 +24189,7 @@
         </p:nvSpPr>
         <p:spPr>
           <a:xfrm>
-            <a:off x="9336024" y="3063240"/>
+            <a:off x="9336024" y="3017520"/>
             <a:ext cx="91440" cy="182880"/>
           </a:xfrm>
           <a:prstGeom prst="rect">
@@ -24204,7 +24204,7 @@
           <a:lstStyle/>
           <a:p>
             <a:pPr algn="ctr">
-              <a:defRPr sz="1000" b="0">
+              <a:defRPr sz="800" b="0">
                 <a:solidFill>
                   <a:srgbClr val="5A7268"/>
                 </a:solidFill>
@@ -24226,7 +24226,7 @@
         <p:spPr>
           <a:xfrm>
             <a:off x="9381744" y="2651760"/>
-            <a:ext cx="1216152" cy="1371600"/>
+            <a:ext cx="1216152" cy="1280160"/>
           </a:xfrm>
           <a:prstGeom prst="roundRect">
             <a:avLst>
@@ -24272,8 +24272,8 @@
         </p:nvSpPr>
         <p:spPr>
           <a:xfrm>
-            <a:off x="9473184" y="2743200"/>
-            <a:ext cx="1033272" cy="201168"/>
+            <a:off x="9454896" y="2724912"/>
+            <a:ext cx="1069848" cy="182880"/>
           </a:xfrm>
           <a:prstGeom prst="rect">
             <a:avLst/>
@@ -24287,7 +24287,7 @@
           <a:lstStyle/>
           <a:p>
             <a:pPr algn="ctr">
-              <a:defRPr sz="800" b="1">
+              <a:defRPr sz="700" b="1">
                 <a:solidFill>
                   <a:srgbClr val="FF6B6B"/>
                 </a:solidFill>
@@ -24308,8 +24308,8 @@
         </p:nvSpPr>
         <p:spPr>
           <a:xfrm>
-            <a:off x="9473184" y="2999232"/>
-            <a:ext cx="1033272" cy="822960"/>
+            <a:off x="9454896" y="2944368"/>
+            <a:ext cx="1069848" cy="822960"/>
           </a:xfrm>
           <a:prstGeom prst="rect">
             <a:avLst/>
@@ -24323,7 +24323,7 @@
           <a:lstStyle/>
           <a:p>
             <a:pPr algn="ctr">
-              <a:defRPr sz="700" b="0">
+              <a:defRPr sz="600" b="0">
                 <a:solidFill>
                   <a:srgbClr val="8FA89C"/>
                 </a:solidFill>
@@ -24348,7 +24348,7 @@
         </p:nvSpPr>
         <p:spPr>
           <a:xfrm>
-            <a:off x="10597896" y="3063240"/>
+            <a:off x="10597896" y="3017520"/>
             <a:ext cx="91440" cy="182880"/>
           </a:xfrm>
           <a:prstGeom prst="rect">
@@ -24363,7 +24363,7 @@
           <a:lstStyle/>
           <a:p>
             <a:pPr algn="ctr">
-              <a:defRPr sz="1000" b="0">
+              <a:defRPr sz="800" b="0">
                 <a:solidFill>
                   <a:srgbClr val="5A7268"/>
                 </a:solidFill>
@@ -24385,7 +24385,7 @@
         <p:spPr>
           <a:xfrm>
             <a:off x="10643616" y="2651760"/>
-            <a:ext cx="1216152" cy="1371600"/>
+            <a:ext cx="1216152" cy="1280160"/>
           </a:xfrm>
           <a:prstGeom prst="roundRect">
             <a:avLst>
@@ -24431,8 +24431,8 @@
         </p:nvSpPr>
         <p:spPr>
           <a:xfrm>
-            <a:off x="10735056" y="2743200"/>
-            <a:ext cx="1033272" cy="201168"/>
+            <a:off x="10716768" y="2724912"/>
+            <a:ext cx="1069848" cy="182880"/>
           </a:xfrm>
           <a:prstGeom prst="rect">
             <a:avLst/>
@@ -24446,7 +24446,7 @@
           <a:lstStyle/>
           <a:p>
             <a:pPr algn="ctr">
-              <a:defRPr sz="800" b="1">
+              <a:defRPr sz="700" b="1">
                 <a:solidFill>
                   <a:srgbClr val="5A7268"/>
                 </a:solidFill>
@@ -24467,8 +24467,8 @@
         </p:nvSpPr>
         <p:spPr>
           <a:xfrm>
-            <a:off x="10735056" y="2999232"/>
-            <a:ext cx="1033272" cy="822960"/>
+            <a:off x="10716768" y="2944368"/>
+            <a:ext cx="1069848" cy="822960"/>
           </a:xfrm>
           <a:prstGeom prst="rect">
             <a:avLst/>
@@ -24482,7 +24482,7 @@
           <a:lstStyle/>
           <a:p>
             <a:pPr algn="ctr">
-              <a:defRPr sz="700" b="0">
+              <a:defRPr sz="600" b="0">
                 <a:solidFill>
                   <a:srgbClr val="8FA89C"/>
                 </a:solidFill>
@@ -24507,8 +24507,8 @@
         </p:nvSpPr>
         <p:spPr>
           <a:xfrm>
-            <a:off x="731520" y="4389120"/>
-            <a:ext cx="5029200" cy="1920240"/>
+            <a:off x="731520" y="4297680"/>
+            <a:ext cx="5029200" cy="2011680"/>
           </a:xfrm>
           <a:prstGeom prst="roundRect">
             <a:avLst>
@@ -24554,7 +24554,7 @@
         </p:nvSpPr>
         <p:spPr>
           <a:xfrm>
-            <a:off x="1005840" y="4526280"/>
+            <a:off x="1005840" y="4407408"/>
             <a:ext cx="4572000" cy="228600"/>
           </a:xfrm>
           <a:prstGeom prst="rect">
@@ -24590,22 +24590,22 @@
         </p:nvSpPr>
         <p:spPr>
           <a:xfrm>
-            <a:off x="1005840" y="4800600"/>
-            <a:ext cx="4572000" cy="1371600"/>
-          </a:xfrm>
-          <a:prstGeom prst="rect">
-            <a:avLst/>
-          </a:prstGeom>
-          <a:noFill/>
-        </p:spPr>
-        <p:txBody>
-          <a:bodyPr wrap="square">
-            <a:spAutoFit/>
-          </a:bodyPr>
-          <a:lstStyle/>
-          <a:p>
-            <a:pPr algn="l">
-              <a:defRPr sz="900" b="0">
+            <a:off x="1005840" y="4663440"/>
+            <a:ext cx="4572000" cy="1554480"/>
+          </a:xfrm>
+          <a:prstGeom prst="rect">
+            <a:avLst/>
+          </a:prstGeom>
+          <a:noFill/>
+        </p:spPr>
+        <p:txBody>
+          <a:bodyPr wrap="square">
+            <a:spAutoFit/>
+          </a:bodyPr>
+          <a:lstStyle/>
+          <a:p>
+            <a:pPr algn="l">
+              <a:defRPr sz="800" b="0">
                 <a:solidFill>
                   <a:srgbClr val="8FA89C"/>
                 </a:solidFill>
@@ -24647,8 +24647,8 @@
         </p:nvSpPr>
         <p:spPr>
           <a:xfrm>
-            <a:off x="5943600" y="4389120"/>
-            <a:ext cx="5303520" cy="1920240"/>
+            <a:off x="5943600" y="4297680"/>
+            <a:ext cx="5303520" cy="2011680"/>
           </a:xfrm>
           <a:prstGeom prst="roundRect">
             <a:avLst>
@@ -24694,7 +24694,7 @@
         </p:nvSpPr>
         <p:spPr>
           <a:xfrm>
-            <a:off x="6217920" y="4526280"/>
+            <a:off x="6217920" y="4407408"/>
             <a:ext cx="4754880" cy="228600"/>
           </a:xfrm>
           <a:prstGeom prst="rect">
@@ -24730,7 +24730,7 @@
         </p:nvSpPr>
         <p:spPr>
           <a:xfrm>
-            <a:off x="6217920" y="4846320"/>
+            <a:off x="6217920" y="4709160"/>
             <a:ext cx="1097280" cy="201168"/>
           </a:xfrm>
           <a:prstGeom prst="rect">
@@ -24745,7 +24745,7 @@
           <a:lstStyle/>
           <a:p>
             <a:pPr algn="l">
-              <a:defRPr sz="1000" b="1">
+              <a:defRPr sz="900" b="1">
                 <a:solidFill>
                   <a:srgbClr val="5A7268"/>
                 </a:solidFill>
@@ -24766,22 +24766,22 @@
         </p:nvSpPr>
         <p:spPr>
           <a:xfrm>
-            <a:off x="7406640" y="4846320"/>
-            <a:ext cx="3657600" cy="411480"/>
-          </a:xfrm>
-          <a:prstGeom prst="rect">
-            <a:avLst/>
-          </a:prstGeom>
-          <a:noFill/>
-        </p:spPr>
-        <p:txBody>
-          <a:bodyPr wrap="square">
-            <a:spAutoFit/>
-          </a:bodyPr>
-          <a:lstStyle/>
-          <a:p>
-            <a:pPr algn="l">
-              <a:defRPr sz="900" b="0">
+            <a:off x="7315200" y="4709160"/>
+            <a:ext cx="3657600" cy="457200"/>
+          </a:xfrm>
+          <a:prstGeom prst="rect">
+            <a:avLst/>
+          </a:prstGeom>
+          <a:noFill/>
+        </p:spPr>
+        <p:txBody>
+          <a:bodyPr wrap="square">
+            <a:spAutoFit/>
+          </a:bodyPr>
+          <a:lstStyle/>
+          <a:p>
+            <a:pPr algn="l">
+              <a:defRPr sz="800" b="0">
                 <a:solidFill>
                   <a:srgbClr val="8FA89C"/>
                 </a:solidFill>
@@ -24802,7 +24802,7 @@
         </p:nvSpPr>
         <p:spPr>
           <a:xfrm>
-            <a:off x="6217920" y="5230368"/>
+            <a:off x="6217920" y="5120640"/>
             <a:ext cx="1097280" cy="201168"/>
           </a:xfrm>
           <a:prstGeom prst="rect">
@@ -24817,7 +24817,7 @@
           <a:lstStyle/>
           <a:p>
             <a:pPr algn="l">
-              <a:defRPr sz="1000" b="1">
+              <a:defRPr sz="900" b="1">
                 <a:solidFill>
                   <a:srgbClr val="5A7268"/>
                 </a:solidFill>
@@ -24838,22 +24838,22 @@
         </p:nvSpPr>
         <p:spPr>
           <a:xfrm>
-            <a:off x="7406640" y="5230368"/>
-            <a:ext cx="3657600" cy="411480"/>
-          </a:xfrm>
-          <a:prstGeom prst="rect">
-            <a:avLst/>
-          </a:prstGeom>
-          <a:noFill/>
-        </p:spPr>
-        <p:txBody>
-          <a:bodyPr wrap="square">
-            <a:spAutoFit/>
-          </a:bodyPr>
-          <a:lstStyle/>
-          <a:p>
-            <a:pPr algn="l">
-              <a:defRPr sz="900" b="0">
+            <a:off x="7315200" y="5120640"/>
+            <a:ext cx="3657600" cy="457200"/>
+          </a:xfrm>
+          <a:prstGeom prst="rect">
+            <a:avLst/>
+          </a:prstGeom>
+          <a:noFill/>
+        </p:spPr>
+        <p:txBody>
+          <a:bodyPr wrap="square">
+            <a:spAutoFit/>
+          </a:bodyPr>
+          <a:lstStyle/>
+          <a:p>
+            <a:pPr algn="l">
+              <a:defRPr sz="800" b="0">
                 <a:solidFill>
                   <a:srgbClr val="8FA89C"/>
                 </a:solidFill>
@@ -24874,7 +24874,7 @@
         </p:nvSpPr>
         <p:spPr>
           <a:xfrm>
-            <a:off x="6217920" y="5614416"/>
+            <a:off x="6217920" y="5532120"/>
             <a:ext cx="1097280" cy="201168"/>
           </a:xfrm>
           <a:prstGeom prst="rect">
@@ -24889,7 +24889,7 @@
           <a:lstStyle/>
           <a:p>
             <a:pPr algn="l">
-              <a:defRPr sz="1000" b="1">
+              <a:defRPr sz="900" b="1">
                 <a:solidFill>
                   <a:srgbClr val="5A7268"/>
                 </a:solidFill>
@@ -24910,22 +24910,22 @@
         </p:nvSpPr>
         <p:spPr>
           <a:xfrm>
-            <a:off x="7406640" y="5614416"/>
-            <a:ext cx="3657600" cy="411480"/>
-          </a:xfrm>
-          <a:prstGeom prst="rect">
-            <a:avLst/>
-          </a:prstGeom>
-          <a:noFill/>
-        </p:spPr>
-        <p:txBody>
-          <a:bodyPr wrap="square">
-            <a:spAutoFit/>
-          </a:bodyPr>
-          <a:lstStyle/>
-          <a:p>
-            <a:pPr algn="l">
-              <a:defRPr sz="900" b="0">
+            <a:off x="7315200" y="5532120"/>
+            <a:ext cx="3657600" cy="457200"/>
+          </a:xfrm>
+          <a:prstGeom prst="rect">
+            <a:avLst/>
+          </a:prstGeom>
+          <a:noFill/>
+        </p:spPr>
+        <p:txBody>
+          <a:bodyPr wrap="square">
+            <a:spAutoFit/>
+          </a:bodyPr>
+          <a:lstStyle/>
+          <a:p>
+            <a:pPr algn="l">
+              <a:defRPr sz="800" b="0">
                 <a:solidFill>
                   <a:srgbClr val="8FA89C"/>
                 </a:solidFill>
@@ -24946,8 +24946,8 @@
         </p:nvSpPr>
         <p:spPr>
           <a:xfrm>
-            <a:off x="6126480" y="5952744"/>
-            <a:ext cx="4937760" cy="594360"/>
+            <a:off x="6126480" y="5897880"/>
+            <a:ext cx="4937760" cy="640080"/>
           </a:xfrm>
           <a:prstGeom prst="roundRect">
             <a:avLst>
@@ -24993,7 +24993,7 @@
         </p:nvSpPr>
         <p:spPr>
           <a:xfrm>
-            <a:off x="6217920" y="5998464"/>
+            <a:off x="6217920" y="5943600"/>
             <a:ext cx="1097280" cy="201168"/>
           </a:xfrm>
           <a:prstGeom prst="rect">
@@ -25008,7 +25008,7 @@
           <a:lstStyle/>
           <a:p>
             <a:pPr algn="l">
-              <a:defRPr sz="1000" b="1">
+              <a:defRPr sz="900" b="1">
                 <a:solidFill>
                   <a:srgbClr val="00C978"/>
                 </a:solidFill>
@@ -25029,22 +25029,22 @@
         </p:nvSpPr>
         <p:spPr>
           <a:xfrm>
-            <a:off x="7406640" y="5998464"/>
-            <a:ext cx="3657600" cy="411480"/>
-          </a:xfrm>
-          <a:prstGeom prst="rect">
-            <a:avLst/>
-          </a:prstGeom>
-          <a:noFill/>
-        </p:spPr>
-        <p:txBody>
-          <a:bodyPr wrap="square">
-            <a:spAutoFit/>
-          </a:bodyPr>
-          <a:lstStyle/>
-          <a:p>
-            <a:pPr algn="l">
-              <a:defRPr sz="900" b="0">
+            <a:off x="7315200" y="5943600"/>
+            <a:ext cx="3657600" cy="457200"/>
+          </a:xfrm>
+          <a:prstGeom prst="rect">
+            <a:avLst/>
+          </a:prstGeom>
+          <a:noFill/>
+        </p:spPr>
+        <p:txBody>
+          <a:bodyPr wrap="square">
+            <a:spAutoFit/>
+          </a:bodyPr>
+          <a:lstStyle/>
+          <a:p>
+            <a:pPr algn="l">
+              <a:defRPr sz="800" b="0">
                 <a:solidFill>
                   <a:srgbClr val="E8F0EC"/>
                 </a:solidFill>
@@ -25327,7 +25327,7 @@
         <p:spPr>
           <a:xfrm>
             <a:off x="731520" y="2194560"/>
-            <a:ext cx="3383280" cy="4206240"/>
+            <a:ext cx="3383280" cy="4297680"/>
           </a:xfrm>
           <a:prstGeom prst="roundRect">
             <a:avLst>
@@ -25374,21 +25374,21 @@
         <p:spPr>
           <a:xfrm>
             <a:off x="960120" y="2331720"/>
-            <a:ext cx="457200" cy="365760"/>
-          </a:xfrm>
-          <a:prstGeom prst="rect">
-            <a:avLst/>
-          </a:prstGeom>
-          <a:noFill/>
-        </p:spPr>
-        <p:txBody>
-          <a:bodyPr wrap="square">
-            <a:spAutoFit/>
-          </a:bodyPr>
-          <a:lstStyle/>
-          <a:p>
-            <a:pPr algn="l">
-              <a:defRPr sz="2800" b="1">
+            <a:ext cx="457200" cy="320040"/>
+          </a:xfrm>
+          <a:prstGeom prst="rect">
+            <a:avLst/>
+          </a:prstGeom>
+          <a:noFill/>
+        </p:spPr>
+        <p:txBody>
+          <a:bodyPr wrap="square">
+            <a:spAutoFit/>
+          </a:bodyPr>
+          <a:lstStyle/>
+          <a:p>
+            <a:pPr algn="l">
+              <a:defRPr sz="2400" b="1">
                 <a:solidFill>
                   <a:srgbClr val="00C978"/>
                 </a:solidFill>
@@ -25409,7 +25409,47 @@
         </p:nvSpPr>
         <p:spPr>
           <a:xfrm>
-            <a:off x="960120" y="2743200"/>
+            <a:off x="960120" y="2697480"/>
+            <a:ext cx="2926080" cy="548640"/>
+          </a:xfrm>
+          <a:prstGeom prst="rect">
+            <a:avLst/>
+          </a:prstGeom>
+          <a:noFill/>
+        </p:spPr>
+        <p:txBody>
+          <a:bodyPr wrap="square">
+            <a:spAutoFit/>
+          </a:bodyPr>
+          <a:lstStyle/>
+          <a:p>
+            <a:pPr algn="l">
+              <a:defRPr sz="1400" b="1">
+                <a:solidFill>
+                  <a:srgbClr val="E8F0EC"/>
+                </a:solidFill>
+                <a:latin typeface="Segoe UI"/>
+              </a:defRPr>
+            </a:pPr>
+            <a:r>
+              <a:t>CONVERSATIONAL</a:t>
+            </a:r>
+            <a:br/>
+            <a:r>
+              <a:t>OVER FORMS</a:t>
+            </a:r>
+          </a:p>
+        </p:txBody>
+      </p:sp>
+      <p:sp>
+        <p:nvSpPr>
+          <p:cNvPr id="9" name="TextBox 8"/>
+          <p:cNvSpPr txBox="1"/>
+          <p:nvPr/>
+        </p:nvSpPr>
+        <p:spPr>
+          <a:xfrm>
+            <a:off x="960120" y="3291840"/>
             <a:ext cx="2926080" cy="594360"/>
           </a:xfrm>
           <a:prstGeom prst="rect">
@@ -25424,47 +25464,7 @@
           <a:lstStyle/>
           <a:p>
             <a:pPr algn="l">
-              <a:defRPr sz="1600" b="1">
-                <a:solidFill>
-                  <a:srgbClr val="E8F0EC"/>
-                </a:solidFill>
-                <a:latin typeface="Segoe UI"/>
-              </a:defRPr>
-            </a:pPr>
-            <a:r>
-              <a:t>CONVERSATIONAL</a:t>
-            </a:r>
-            <a:br/>
-            <a:r>
-              <a:t>OVER FORMS</a:t>
-            </a:r>
-          </a:p>
-        </p:txBody>
-      </p:sp>
-      <p:sp>
-        <p:nvSpPr>
-          <p:cNvPr id="9" name="TextBox 8"/>
-          <p:cNvSpPr txBox="1"/>
-          <p:nvPr/>
-        </p:nvSpPr>
-        <p:spPr>
-          <a:xfrm>
-            <a:off x="960120" y="3383280"/>
-            <a:ext cx="2926080" cy="594360"/>
-          </a:xfrm>
-          <a:prstGeom prst="rect">
-            <a:avLst/>
-          </a:prstGeom>
-          <a:noFill/>
-        </p:spPr>
-        <p:txBody>
-          <a:bodyPr wrap="square">
-            <a:spAutoFit/>
-          </a:bodyPr>
-          <a:lstStyle/>
-          <a:p>
-            <a:pPr algn="l">
-              <a:defRPr sz="1000" b="0">
+              <a:defRPr sz="900" b="0">
                 <a:solidFill>
                   <a:srgbClr val="00C978"/>
                 </a:solidFill>
@@ -25489,7 +25489,7 @@
         </p:nvSpPr>
         <p:spPr>
           <a:xfrm>
-            <a:off x="960120" y="4023360"/>
+            <a:off x="960120" y="3931920"/>
             <a:ext cx="2926080" cy="12700"/>
           </a:xfrm>
           <a:prstGeom prst="rect">
@@ -25532,22 +25532,22 @@
         </p:nvSpPr>
         <p:spPr>
           <a:xfrm>
-            <a:off x="960120" y="4160520"/>
-            <a:ext cx="2926080" cy="2103120"/>
-          </a:xfrm>
-          <a:prstGeom prst="rect">
-            <a:avLst/>
-          </a:prstGeom>
-          <a:noFill/>
-        </p:spPr>
-        <p:txBody>
-          <a:bodyPr wrap="square">
-            <a:spAutoFit/>
-          </a:bodyPr>
-          <a:lstStyle/>
-          <a:p>
-            <a:pPr algn="l">
-              <a:defRPr sz="900" b="0">
+            <a:off x="960120" y="4069080"/>
+            <a:ext cx="2926080" cy="2286000"/>
+          </a:xfrm>
+          <a:prstGeom prst="rect">
+            <a:avLst/>
+          </a:prstGeom>
+          <a:noFill/>
+        </p:spPr>
+        <p:txBody>
+          <a:bodyPr wrap="square">
+            <a:spAutoFit/>
+          </a:bodyPr>
+          <a:lstStyle/>
+          <a:p>
+            <a:pPr algn="l">
+              <a:defRPr sz="800" b="0">
                 <a:solidFill>
                   <a:srgbClr val="8FA89C"/>
                 </a:solidFill>
@@ -25586,7 +25586,7 @@
         <p:spPr>
           <a:xfrm>
             <a:off x="4297680" y="2194560"/>
-            <a:ext cx="3383280" cy="4206240"/>
+            <a:ext cx="3383280" cy="4297680"/>
           </a:xfrm>
           <a:prstGeom prst="roundRect">
             <a:avLst>
@@ -25633,21 +25633,21 @@
         <p:spPr>
           <a:xfrm>
             <a:off x="4526280" y="2331720"/>
-            <a:ext cx="457200" cy="365760"/>
-          </a:xfrm>
-          <a:prstGeom prst="rect">
-            <a:avLst/>
-          </a:prstGeom>
-          <a:noFill/>
-        </p:spPr>
-        <p:txBody>
-          <a:bodyPr wrap="square">
-            <a:spAutoFit/>
-          </a:bodyPr>
-          <a:lstStyle/>
-          <a:p>
-            <a:pPr algn="l">
-              <a:defRPr sz="2800" b="1">
+            <a:ext cx="457200" cy="320040"/>
+          </a:xfrm>
+          <a:prstGeom prst="rect">
+            <a:avLst/>
+          </a:prstGeom>
+          <a:noFill/>
+        </p:spPr>
+        <p:txBody>
+          <a:bodyPr wrap="square">
+            <a:spAutoFit/>
+          </a:bodyPr>
+          <a:lstStyle/>
+          <a:p>
+            <a:pPr algn="l">
+              <a:defRPr sz="2400" b="1">
                 <a:solidFill>
                   <a:srgbClr val="54A0FF"/>
                 </a:solidFill>
@@ -25668,7 +25668,47 @@
         </p:nvSpPr>
         <p:spPr>
           <a:xfrm>
-            <a:off x="4526280" y="2743200"/>
+            <a:off x="4526280" y="2697480"/>
+            <a:ext cx="2926080" cy="548640"/>
+          </a:xfrm>
+          <a:prstGeom prst="rect">
+            <a:avLst/>
+          </a:prstGeom>
+          <a:noFill/>
+        </p:spPr>
+        <p:txBody>
+          <a:bodyPr wrap="square">
+            <a:spAutoFit/>
+          </a:bodyPr>
+          <a:lstStyle/>
+          <a:p>
+            <a:pPr algn="l">
+              <a:defRPr sz="1400" b="1">
+                <a:solidFill>
+                  <a:srgbClr val="E8F0EC"/>
+                </a:solidFill>
+                <a:latin typeface="Segoe UI"/>
+              </a:defRPr>
+            </a:pPr>
+            <a:r>
+              <a:t>RISK-AWARE</a:t>
+            </a:r>
+            <a:br/>
+            <a:r>
+              <a:t>BY DEFAULT</a:t>
+            </a:r>
+          </a:p>
+        </p:txBody>
+      </p:sp>
+      <p:sp>
+        <p:nvSpPr>
+          <p:cNvPr id="15" name="TextBox 14"/>
+          <p:cNvSpPr txBox="1"/>
+          <p:nvPr/>
+        </p:nvSpPr>
+        <p:spPr>
+          <a:xfrm>
+            <a:off x="4526280" y="3291840"/>
             <a:ext cx="2926080" cy="594360"/>
           </a:xfrm>
           <a:prstGeom prst="rect">
@@ -25683,47 +25723,7 @@
           <a:lstStyle/>
           <a:p>
             <a:pPr algn="l">
-              <a:defRPr sz="1600" b="1">
-                <a:solidFill>
-                  <a:srgbClr val="E8F0EC"/>
-                </a:solidFill>
-                <a:latin typeface="Segoe UI"/>
-              </a:defRPr>
-            </a:pPr>
-            <a:r>
-              <a:t>RISK-AWARE</a:t>
-            </a:r>
-            <a:br/>
-            <a:r>
-              <a:t>BY DEFAULT</a:t>
-            </a:r>
-          </a:p>
-        </p:txBody>
-      </p:sp>
-      <p:sp>
-        <p:nvSpPr>
-          <p:cNvPr id="15" name="TextBox 14"/>
-          <p:cNvSpPr txBox="1"/>
-          <p:nvPr/>
-        </p:nvSpPr>
-        <p:spPr>
-          <a:xfrm>
-            <a:off x="4526280" y="3383280"/>
-            <a:ext cx="2926080" cy="594360"/>
-          </a:xfrm>
-          <a:prstGeom prst="rect">
-            <a:avLst/>
-          </a:prstGeom>
-          <a:noFill/>
-        </p:spPr>
-        <p:txBody>
-          <a:bodyPr wrap="square">
-            <a:spAutoFit/>
-          </a:bodyPr>
-          <a:lstStyle/>
-          <a:p>
-            <a:pPr algn="l">
-              <a:defRPr sz="1000" b="0">
+              <a:defRPr sz="900" b="0">
                 <a:solidFill>
                   <a:srgbClr val="54A0FF"/>
                 </a:solidFill>
@@ -25748,7 +25748,7 @@
         </p:nvSpPr>
         <p:spPr>
           <a:xfrm>
-            <a:off x="4526280" y="4023360"/>
+            <a:off x="4526280" y="3931920"/>
             <a:ext cx="2926080" cy="12700"/>
           </a:xfrm>
           <a:prstGeom prst="rect">
@@ -25791,22 +25791,22 @@
         </p:nvSpPr>
         <p:spPr>
           <a:xfrm>
-            <a:off x="4526280" y="4160520"/>
-            <a:ext cx="2926080" cy="2103120"/>
-          </a:xfrm>
-          <a:prstGeom prst="rect">
-            <a:avLst/>
-          </a:prstGeom>
-          <a:noFill/>
-        </p:spPr>
-        <p:txBody>
-          <a:bodyPr wrap="square">
-            <a:spAutoFit/>
-          </a:bodyPr>
-          <a:lstStyle/>
-          <a:p>
-            <a:pPr algn="l">
-              <a:defRPr sz="900" b="0">
+            <a:off x="4526280" y="4069080"/>
+            <a:ext cx="2926080" cy="2286000"/>
+          </a:xfrm>
+          <a:prstGeom prst="rect">
+            <a:avLst/>
+          </a:prstGeom>
+          <a:noFill/>
+        </p:spPr>
+        <p:txBody>
+          <a:bodyPr wrap="square">
+            <a:spAutoFit/>
+          </a:bodyPr>
+          <a:lstStyle/>
+          <a:p>
+            <a:pPr algn="l">
+              <a:defRPr sz="800" b="0">
                 <a:solidFill>
                   <a:srgbClr val="8FA89C"/>
                 </a:solidFill>
@@ -25849,7 +25849,7 @@
         <p:spPr>
           <a:xfrm>
             <a:off x="7863840" y="2194560"/>
-            <a:ext cx="3383280" cy="4206240"/>
+            <a:ext cx="3383280" cy="4297680"/>
           </a:xfrm>
           <a:prstGeom prst="roundRect">
             <a:avLst>
@@ -25896,21 +25896,21 @@
         <p:spPr>
           <a:xfrm>
             <a:off x="8092440" y="2331720"/>
-            <a:ext cx="457200" cy="365760"/>
-          </a:xfrm>
-          <a:prstGeom prst="rect">
-            <a:avLst/>
-          </a:prstGeom>
-          <a:noFill/>
-        </p:spPr>
-        <p:txBody>
-          <a:bodyPr wrap="square">
-            <a:spAutoFit/>
-          </a:bodyPr>
-          <a:lstStyle/>
-          <a:p>
-            <a:pPr algn="l">
-              <a:defRPr sz="2800" b="1">
+            <a:ext cx="457200" cy="320040"/>
+          </a:xfrm>
+          <a:prstGeom prst="rect">
+            <a:avLst/>
+          </a:prstGeom>
+          <a:noFill/>
+        </p:spPr>
+        <p:txBody>
+          <a:bodyPr wrap="square">
+            <a:spAutoFit/>
+          </a:bodyPr>
+          <a:lstStyle/>
+          <a:p>
+            <a:pPr algn="l">
+              <a:defRPr sz="2400" b="1">
                 <a:solidFill>
                   <a:srgbClr val="FF9F43"/>
                 </a:solidFill>
@@ -25931,7 +25931,47 @@
         </p:nvSpPr>
         <p:spPr>
           <a:xfrm>
-            <a:off x="8092440" y="2743200"/>
+            <a:off x="8092440" y="2697480"/>
+            <a:ext cx="2926080" cy="548640"/>
+          </a:xfrm>
+          <a:prstGeom prst="rect">
+            <a:avLst/>
+          </a:prstGeom>
+          <a:noFill/>
+        </p:spPr>
+        <p:txBody>
+          <a:bodyPr wrap="square">
+            <a:spAutoFit/>
+          </a:bodyPr>
+          <a:lstStyle/>
+          <a:p>
+            <a:pPr algn="l">
+              <a:defRPr sz="1400" b="1">
+                <a:solidFill>
+                  <a:srgbClr val="E8F0EC"/>
+                </a:solidFill>
+                <a:latin typeface="Segoe UI"/>
+              </a:defRPr>
+            </a:pPr>
+            <a:r>
+              <a:t>TRADE-OFF</a:t>
+            </a:r>
+            <a:br/>
+            <a:r>
+              <a:t>TRANSPARENCY</a:t>
+            </a:r>
+          </a:p>
+        </p:txBody>
+      </p:sp>
+      <p:sp>
+        <p:nvSpPr>
+          <p:cNvPr id="21" name="TextBox 20"/>
+          <p:cNvSpPr txBox="1"/>
+          <p:nvPr/>
+        </p:nvSpPr>
+        <p:spPr>
+          <a:xfrm>
+            <a:off x="8092440" y="3291840"/>
             <a:ext cx="2926080" cy="594360"/>
           </a:xfrm>
           <a:prstGeom prst="rect">
@@ -25946,47 +25986,7 @@
           <a:lstStyle/>
           <a:p>
             <a:pPr algn="l">
-              <a:defRPr sz="1600" b="1">
-                <a:solidFill>
-                  <a:srgbClr val="E8F0EC"/>
-                </a:solidFill>
-                <a:latin typeface="Segoe UI"/>
-              </a:defRPr>
-            </a:pPr>
-            <a:r>
-              <a:t>TRADE-OFF</a:t>
-            </a:r>
-            <a:br/>
-            <a:r>
-              <a:t>TRANSPARENCY</a:t>
-            </a:r>
-          </a:p>
-        </p:txBody>
-      </p:sp>
-      <p:sp>
-        <p:nvSpPr>
-          <p:cNvPr id="21" name="TextBox 20"/>
-          <p:cNvSpPr txBox="1"/>
-          <p:nvPr/>
-        </p:nvSpPr>
-        <p:spPr>
-          <a:xfrm>
-            <a:off x="8092440" y="3383280"/>
-            <a:ext cx="2926080" cy="594360"/>
-          </a:xfrm>
-          <a:prstGeom prst="rect">
-            <a:avLst/>
-          </a:prstGeom>
-          <a:noFill/>
-        </p:spPr>
-        <p:txBody>
-          <a:bodyPr wrap="square">
-            <a:spAutoFit/>
-          </a:bodyPr>
-          <a:lstStyle/>
-          <a:p>
-            <a:pPr algn="l">
-              <a:defRPr sz="1000" b="0">
+              <a:defRPr sz="900" b="0">
                 <a:solidFill>
                   <a:srgbClr val="FF9F43"/>
                 </a:solidFill>
@@ -26011,7 +26011,7 @@
         </p:nvSpPr>
         <p:spPr>
           <a:xfrm>
-            <a:off x="8092440" y="4023360"/>
+            <a:off x="8092440" y="3931920"/>
             <a:ext cx="2926080" cy="12700"/>
           </a:xfrm>
           <a:prstGeom prst="rect">
@@ -26054,22 +26054,22 @@
         </p:nvSpPr>
         <p:spPr>
           <a:xfrm>
-            <a:off x="8092440" y="4160520"/>
-            <a:ext cx="2926080" cy="2103120"/>
-          </a:xfrm>
-          <a:prstGeom prst="rect">
-            <a:avLst/>
-          </a:prstGeom>
-          <a:noFill/>
-        </p:spPr>
-        <p:txBody>
-          <a:bodyPr wrap="square">
-            <a:spAutoFit/>
-          </a:bodyPr>
-          <a:lstStyle/>
-          <a:p>
-            <a:pPr algn="l">
-              <a:defRPr sz="900" b="0">
+            <a:off x="8092440" y="4069080"/>
+            <a:ext cx="2926080" cy="2286000"/>
+          </a:xfrm>
+          <a:prstGeom prst="rect">
+            <a:avLst/>
+          </a:prstGeom>
+          <a:noFill/>
+        </p:spPr>
+        <p:txBody>
+          <a:bodyPr wrap="square">
+            <a:spAutoFit/>
+          </a:bodyPr>
+          <a:lstStyle/>
+          <a:p>
+            <a:pPr algn="l">
+              <a:defRPr sz="800" b="0">
                 <a:solidFill>
                   <a:srgbClr val="8FA89C"/>
                 </a:solidFill>
@@ -26329,7 +26329,7 @@
         <p:spPr>
           <a:xfrm>
             <a:off x="731520" y="914400"/>
-            <a:ext cx="9144000" cy="1097280"/>
+            <a:ext cx="9144000" cy="594360"/>
           </a:xfrm>
           <a:prstGeom prst="rect">
             <a:avLst/>
@@ -26462,7 +26462,7 @@
           <a:lstStyle/>
           <a:p>
             <a:pPr algn="l">
-              <a:defRPr sz="1300" b="1">
+              <a:defRPr sz="1200" b="1">
                 <a:solidFill>
                   <a:srgbClr val="00C978"/>
                 </a:solidFill>
@@ -26498,7 +26498,7 @@
           <a:lstStyle/>
           <a:p>
             <a:pPr algn="l">
-              <a:defRPr sz="900" b="0">
+              <a:defRPr sz="800" b="0">
                 <a:solidFill>
                   <a:srgbClr val="8FA89C"/>
                 </a:solidFill>
@@ -26630,7 +26630,7 @@
           <a:lstStyle/>
           <a:p>
             <a:pPr algn="l">
-              <a:defRPr sz="1300" b="1">
+              <a:defRPr sz="1200" b="1">
                 <a:solidFill>
                   <a:srgbClr val="54A0FF"/>
                 </a:solidFill>
@@ -26666,7 +26666,7 @@
           <a:lstStyle/>
           <a:p>
             <a:pPr algn="l">
-              <a:defRPr sz="900" b="0">
+              <a:defRPr sz="800" b="0">
                 <a:solidFill>
                   <a:srgbClr val="8FA89C"/>
                 </a:solidFill>
@@ -26801,7 +26801,7 @@
           <a:lstStyle/>
           <a:p>
             <a:pPr algn="l">
-              <a:defRPr sz="1300" b="1">
+              <a:defRPr sz="1200" b="1">
                 <a:solidFill>
                   <a:srgbClr val="FF9F43"/>
                 </a:solidFill>
@@ -26837,7 +26837,7 @@
           <a:lstStyle/>
           <a:p>
             <a:pPr algn="l">
-              <a:defRPr sz="900" b="0">
+              <a:defRPr sz="800" b="0">
                 <a:solidFill>
                   <a:srgbClr val="8FA89C"/>
                 </a:solidFill>
@@ -26972,7 +26972,7 @@
           <a:lstStyle/>
           <a:p>
             <a:pPr algn="l">
-              <a:defRPr sz="1300" b="1">
+              <a:defRPr sz="1200" b="1">
                 <a:solidFill>
                   <a:srgbClr val="FF6B6B"/>
                 </a:solidFill>
@@ -27008,7 +27008,7 @@
           <a:lstStyle/>
           <a:p>
             <a:pPr algn="l">
-              <a:defRPr sz="900" b="0">
+              <a:defRPr sz="800" b="0">
                 <a:solidFill>
                   <a:srgbClr val="8FA89C"/>
                 </a:solidFill>
@@ -27143,7 +27143,7 @@
           <a:lstStyle/>
           <a:p>
             <a:pPr algn="l">
-              <a:defRPr sz="1300" b="1">
+              <a:defRPr sz="1200" b="1">
                 <a:solidFill>
                   <a:srgbClr val="00C978"/>
                 </a:solidFill>
@@ -27179,7 +27179,7 @@
           <a:lstStyle/>
           <a:p>
             <a:pPr algn="l">
-              <a:defRPr sz="900" b="0">
+              <a:defRPr sz="800" b="0">
                 <a:solidFill>
                   <a:srgbClr val="8FA89C"/>
                 </a:solidFill>
@@ -27314,7 +27314,7 @@
           <a:lstStyle/>
           <a:p>
             <a:pPr algn="l">
-              <a:defRPr sz="1300" b="1">
+              <a:defRPr sz="1200" b="1">
                 <a:solidFill>
                   <a:srgbClr val="54A0FF"/>
                 </a:solidFill>
@@ -27350,7 +27350,7 @@
           <a:lstStyle/>
           <a:p>
             <a:pPr algn="l">
-              <a:defRPr sz="900" b="0">
+              <a:defRPr sz="800" b="0">
                 <a:solidFill>
                   <a:srgbClr val="8FA89C"/>
                 </a:solidFill>
@@ -27868,7 +27868,7 @@
         <p:spPr>
           <a:xfrm>
             <a:off x="731520" y="914400"/>
-            <a:ext cx="9144000" cy="1097280"/>
+            <a:ext cx="9144000" cy="594360"/>
           </a:xfrm>
           <a:prstGeom prst="rect">
             <a:avLst/>
@@ -29029,7 +29029,7 @@
         <p:spPr>
           <a:xfrm>
             <a:off x="731520" y="914400"/>
-            <a:ext cx="9144000" cy="1097280"/>
+            <a:ext cx="9144000" cy="594360"/>
           </a:xfrm>
           <a:prstGeom prst="rect">
             <a:avLst/>
@@ -29148,21 +29148,21 @@
         <p:spPr>
           <a:xfrm>
             <a:off x="914400" y="2468880"/>
-            <a:ext cx="3108960" cy="201168"/>
-          </a:xfrm>
-          <a:prstGeom prst="rect">
-            <a:avLst/>
-          </a:prstGeom>
-          <a:noFill/>
-        </p:spPr>
-        <p:txBody>
-          <a:bodyPr wrap="square">
-            <a:spAutoFit/>
-          </a:bodyPr>
-          <a:lstStyle/>
-          <a:p>
-            <a:pPr algn="l">
-              <a:defRPr sz="1000" b="1">
+            <a:ext cx="3108960" cy="228600"/>
+          </a:xfrm>
+          <a:prstGeom prst="rect">
+            <a:avLst/>
+          </a:prstGeom>
+          <a:noFill/>
+        </p:spPr>
+        <p:txBody>
+          <a:bodyPr wrap="square">
+            <a:spAutoFit/>
+          </a:bodyPr>
+          <a:lstStyle/>
+          <a:p>
+            <a:pPr algn="l">
+              <a:defRPr sz="900" b="1">
                 <a:solidFill>
                   <a:srgbClr val="E8F0EC"/>
                 </a:solidFill>
@@ -29183,7 +29183,7 @@
         </p:nvSpPr>
         <p:spPr>
           <a:xfrm>
-            <a:off x="914400" y="2697480"/>
+            <a:off x="914400" y="2724912"/>
             <a:ext cx="3108960" cy="228600"/>
           </a:xfrm>
           <a:prstGeom prst="rect">
@@ -29198,7 +29198,7 @@
           <a:lstStyle/>
           <a:p>
             <a:pPr algn="l">
-              <a:defRPr sz="900" b="0">
+              <a:defRPr sz="800" b="0">
                 <a:solidFill>
                   <a:srgbClr val="00C978"/>
                 </a:solidFill>
@@ -29219,7 +29219,43 @@
         </p:nvSpPr>
         <p:spPr>
           <a:xfrm>
-            <a:off x="914400" y="2926080"/>
+            <a:off x="914400" y="2971800"/>
+            <a:ext cx="3108960" cy="274320"/>
+          </a:xfrm>
+          <a:prstGeom prst="rect">
+            <a:avLst/>
+          </a:prstGeom>
+          <a:noFill/>
+        </p:spPr>
+        <p:txBody>
+          <a:bodyPr wrap="square">
+            <a:spAutoFit/>
+          </a:bodyPr>
+          <a:lstStyle/>
+          <a:p>
+            <a:pPr algn="l">
+              <a:defRPr sz="700" b="0">
+                <a:solidFill>
+                  <a:srgbClr val="5A7268"/>
+                </a:solidFill>
+                <a:latin typeface="Consolas"/>
+              </a:defRPr>
+            </a:pPr>
+            <a:r>
+              <a:t>Benchmark: Bestmix avg setup = 4-6 hours</a:t>
+            </a:r>
+          </a:p>
+        </p:txBody>
+      </p:sp>
+      <p:sp>
+        <p:nvSpPr>
+          <p:cNvPr id="11" name="TextBox 10"/>
+          <p:cNvSpPr txBox="1"/>
+          <p:nvPr/>
+        </p:nvSpPr>
+        <p:spPr>
+          <a:xfrm>
+            <a:off x="914400" y="3337560"/>
             <a:ext cx="3108960" cy="228600"/>
           </a:xfrm>
           <a:prstGeom prst="rect">
@@ -29234,43 +29270,115 @@
           <a:lstStyle/>
           <a:p>
             <a:pPr algn="l">
+              <a:defRPr sz="900" b="1">
+                <a:solidFill>
+                  <a:srgbClr val="E8F0EC"/>
+                </a:solidFill>
+                <a:latin typeface="Segoe UI"/>
+              </a:defRPr>
+            </a:pPr>
+            <a:r>
+              <a:t>Weekly active users</a:t>
+            </a:r>
+          </a:p>
+        </p:txBody>
+      </p:sp>
+      <p:sp>
+        <p:nvSpPr>
+          <p:cNvPr id="12" name="TextBox 11"/>
+          <p:cNvSpPr txBox="1"/>
+          <p:nvPr/>
+        </p:nvSpPr>
+        <p:spPr>
+          <a:xfrm>
+            <a:off x="914400" y="3593592"/>
+            <a:ext cx="3108960" cy="228600"/>
+          </a:xfrm>
+          <a:prstGeom prst="rect">
+            <a:avLst/>
+          </a:prstGeom>
+          <a:noFill/>
+        </p:spPr>
+        <p:txBody>
+          <a:bodyPr wrap="square">
+            <a:spAutoFit/>
+          </a:bodyPr>
+          <a:lstStyle/>
+          <a:p>
+            <a:pPr algn="l">
               <a:defRPr sz="800" b="0">
                 <a:solidFill>
+                  <a:srgbClr val="00C978"/>
+                </a:solidFill>
+                <a:latin typeface="Consolas"/>
+              </a:defRPr>
+            </a:pPr>
+            <a:r>
+              <a:t>Target: 60% of nutritionists</a:t>
+            </a:r>
+          </a:p>
+        </p:txBody>
+      </p:sp>
+      <p:sp>
+        <p:nvSpPr>
+          <p:cNvPr id="13" name="TextBox 12"/>
+          <p:cNvSpPr txBox="1"/>
+          <p:nvPr/>
+        </p:nvSpPr>
+        <p:spPr>
+          <a:xfrm>
+            <a:off x="914400" y="3840480"/>
+            <a:ext cx="3108960" cy="274320"/>
+          </a:xfrm>
+          <a:prstGeom prst="rect">
+            <a:avLst/>
+          </a:prstGeom>
+          <a:noFill/>
+        </p:spPr>
+        <p:txBody>
+          <a:bodyPr wrap="square">
+            <a:spAutoFit/>
+          </a:bodyPr>
+          <a:lstStyle/>
+          <a:p>
+            <a:pPr algn="l">
+              <a:defRPr sz="700" b="0">
+                <a:solidFill>
                   <a:srgbClr val="5A7268"/>
                 </a:solidFill>
                 <a:latin typeface="Consolas"/>
               </a:defRPr>
             </a:pPr>
             <a:r>
-              <a:t>Benchmark: Bestmix avg setup = 4-6 hours</a:t>
-            </a:r>
-          </a:p>
-        </p:txBody>
-      </p:sp>
-      <p:sp>
-        <p:nvSpPr>
-          <p:cNvPr id="11" name="TextBox 10"/>
-          <p:cNvSpPr txBox="1"/>
-          <p:nvPr/>
-        </p:nvSpPr>
-        <p:spPr>
-          <a:xfrm>
-            <a:off x="914400" y="3246120"/>
-            <a:ext cx="3108960" cy="201168"/>
-          </a:xfrm>
-          <a:prstGeom prst="rect">
-            <a:avLst/>
-          </a:prstGeom>
-          <a:noFill/>
-        </p:spPr>
-        <p:txBody>
-          <a:bodyPr wrap="square">
-            <a:spAutoFit/>
-          </a:bodyPr>
-          <a:lstStyle/>
-          <a:p>
-            <a:pPr algn="l">
-              <a:defRPr sz="1000" b="1">
+              <a:t>Benchmark: 30% for legacy tools</a:t>
+            </a:r>
+          </a:p>
+        </p:txBody>
+      </p:sp>
+      <p:sp>
+        <p:nvSpPr>
+          <p:cNvPr id="14" name="TextBox 13"/>
+          <p:cNvSpPr txBox="1"/>
+          <p:nvPr/>
+        </p:nvSpPr>
+        <p:spPr>
+          <a:xfrm>
+            <a:off x="914400" y="4206240"/>
+            <a:ext cx="3108960" cy="228600"/>
+          </a:xfrm>
+          <a:prstGeom prst="rect">
+            <a:avLst/>
+          </a:prstGeom>
+          <a:noFill/>
+        </p:spPr>
+        <p:txBody>
+          <a:bodyPr wrap="square">
+            <a:spAutoFit/>
+          </a:bodyPr>
+          <a:lstStyle/>
+          <a:p>
+            <a:pPr algn="l">
+              <a:defRPr sz="900" b="1">
                 <a:solidFill>
                   <a:srgbClr val="E8F0EC"/>
                 </a:solidFill>
@@ -29278,20 +29386,20 @@
               </a:defRPr>
             </a:pPr>
             <a:r>
-              <a:t>Weekly active users</a:t>
-            </a:r>
-          </a:p>
-        </p:txBody>
-      </p:sp>
-      <p:sp>
-        <p:nvSpPr>
-          <p:cNvPr id="12" name="TextBox 11"/>
-          <p:cNvSpPr txBox="1"/>
-          <p:nvPr/>
-        </p:nvSpPr>
-        <p:spPr>
-          <a:xfrm>
-            <a:off x="914400" y="3474720"/>
+              <a:t>Prompt-to-formulation rate</a:t>
+            </a:r>
+          </a:p>
+        </p:txBody>
+      </p:sp>
+      <p:sp>
+        <p:nvSpPr>
+          <p:cNvPr id="15" name="TextBox 14"/>
+          <p:cNvSpPr txBox="1"/>
+          <p:nvPr/>
+        </p:nvSpPr>
+        <p:spPr>
+          <a:xfrm>
+            <a:off x="914400" y="4462272"/>
             <a:ext cx="3108960" cy="228600"/>
           </a:xfrm>
           <a:prstGeom prst="rect">
@@ -29306,7 +29414,7 @@
           <a:lstStyle/>
           <a:p>
             <a:pPr algn="l">
-              <a:defRPr sz="900" b="0">
+              <a:defRPr sz="800" b="0">
                 <a:solidFill>
                   <a:srgbClr val="00C978"/>
                 </a:solidFill>
@@ -29314,114 +29422,6 @@
               </a:defRPr>
             </a:pPr>
             <a:r>
-              <a:t>Target: 60% of nutritionists</a:t>
-            </a:r>
-          </a:p>
-        </p:txBody>
-      </p:sp>
-      <p:sp>
-        <p:nvSpPr>
-          <p:cNvPr id="13" name="TextBox 12"/>
-          <p:cNvSpPr txBox="1"/>
-          <p:nvPr/>
-        </p:nvSpPr>
-        <p:spPr>
-          <a:xfrm>
-            <a:off x="914400" y="3703320"/>
-            <a:ext cx="3108960" cy="228600"/>
-          </a:xfrm>
-          <a:prstGeom prst="rect">
-            <a:avLst/>
-          </a:prstGeom>
-          <a:noFill/>
-        </p:spPr>
-        <p:txBody>
-          <a:bodyPr wrap="square">
-            <a:spAutoFit/>
-          </a:bodyPr>
-          <a:lstStyle/>
-          <a:p>
-            <a:pPr algn="l">
-              <a:defRPr sz="800" b="0">
-                <a:solidFill>
-                  <a:srgbClr val="5A7268"/>
-                </a:solidFill>
-                <a:latin typeface="Consolas"/>
-              </a:defRPr>
-            </a:pPr>
-            <a:r>
-              <a:t>Benchmark: 30% for legacy tools</a:t>
-            </a:r>
-          </a:p>
-        </p:txBody>
-      </p:sp>
-      <p:sp>
-        <p:nvSpPr>
-          <p:cNvPr id="14" name="TextBox 13"/>
-          <p:cNvSpPr txBox="1"/>
-          <p:nvPr/>
-        </p:nvSpPr>
-        <p:spPr>
-          <a:xfrm>
-            <a:off x="914400" y="4023360"/>
-            <a:ext cx="3108960" cy="201168"/>
-          </a:xfrm>
-          <a:prstGeom prst="rect">
-            <a:avLst/>
-          </a:prstGeom>
-          <a:noFill/>
-        </p:spPr>
-        <p:txBody>
-          <a:bodyPr wrap="square">
-            <a:spAutoFit/>
-          </a:bodyPr>
-          <a:lstStyle/>
-          <a:p>
-            <a:pPr algn="l">
-              <a:defRPr sz="1000" b="1">
-                <a:solidFill>
-                  <a:srgbClr val="E8F0EC"/>
-                </a:solidFill>
-                <a:latin typeface="Segoe UI"/>
-              </a:defRPr>
-            </a:pPr>
-            <a:r>
-              <a:t>Prompt-to-formulation rate</a:t>
-            </a:r>
-          </a:p>
-        </p:txBody>
-      </p:sp>
-      <p:sp>
-        <p:nvSpPr>
-          <p:cNvPr id="15" name="TextBox 14"/>
-          <p:cNvSpPr txBox="1"/>
-          <p:nvPr/>
-        </p:nvSpPr>
-        <p:spPr>
-          <a:xfrm>
-            <a:off x="914400" y="4251960"/>
-            <a:ext cx="3108960" cy="228600"/>
-          </a:xfrm>
-          <a:prstGeom prst="rect">
-            <a:avLst/>
-          </a:prstGeom>
-          <a:noFill/>
-        </p:spPr>
-        <p:txBody>
-          <a:bodyPr wrap="square">
-            <a:spAutoFit/>
-          </a:bodyPr>
-          <a:lstStyle/>
-          <a:p>
-            <a:pPr algn="l">
-              <a:defRPr sz="900" b="0">
-                <a:solidFill>
-                  <a:srgbClr val="00C978"/>
-                </a:solidFill>
-                <a:latin typeface="Consolas"/>
-              </a:defRPr>
-            </a:pPr>
-            <a:r>
               <a:t>Target: 85%+ completion</a:t>
             </a:r>
           </a:p>
@@ -29435,22 +29435,22 @@
         </p:nvSpPr>
         <p:spPr>
           <a:xfrm>
-            <a:off x="914400" y="4480560"/>
-            <a:ext cx="3108960" cy="228600"/>
-          </a:xfrm>
-          <a:prstGeom prst="rect">
-            <a:avLst/>
-          </a:prstGeom>
-          <a:noFill/>
-        </p:spPr>
-        <p:txBody>
-          <a:bodyPr wrap="square">
-            <a:spAutoFit/>
-          </a:bodyPr>
-          <a:lstStyle/>
-          <a:p>
-            <a:pPr algn="l">
-              <a:defRPr sz="800" b="0">
+            <a:off x="914400" y="4709160"/>
+            <a:ext cx="3108960" cy="274320"/>
+          </a:xfrm>
+          <a:prstGeom prst="rect">
+            <a:avLst/>
+          </a:prstGeom>
+          <a:noFill/>
+        </p:spPr>
+        <p:txBody>
+          <a:bodyPr wrap="square">
+            <a:spAutoFit/>
+          </a:bodyPr>
+          <a:lstStyle/>
+          <a:p>
+            <a:pPr algn="l">
+              <a:defRPr sz="700" b="0">
                 <a:solidFill>
                   <a:srgbClr val="5A7268"/>
                 </a:solidFill>
@@ -29508,21 +29508,21 @@
         <p:spPr>
           <a:xfrm>
             <a:off x="4389120" y="2468880"/>
-            <a:ext cx="3108960" cy="201168"/>
-          </a:xfrm>
-          <a:prstGeom prst="rect">
-            <a:avLst/>
-          </a:prstGeom>
-          <a:noFill/>
-        </p:spPr>
-        <p:txBody>
-          <a:bodyPr wrap="square">
-            <a:spAutoFit/>
-          </a:bodyPr>
-          <a:lstStyle/>
-          <a:p>
-            <a:pPr algn="l">
-              <a:defRPr sz="1000" b="1">
+            <a:ext cx="3108960" cy="228600"/>
+          </a:xfrm>
+          <a:prstGeom prst="rect">
+            <a:avLst/>
+          </a:prstGeom>
+          <a:noFill/>
+        </p:spPr>
+        <p:txBody>
+          <a:bodyPr wrap="square">
+            <a:spAutoFit/>
+          </a:bodyPr>
+          <a:lstStyle/>
+          <a:p>
+            <a:pPr algn="l">
+              <a:defRPr sz="900" b="1">
                 <a:solidFill>
                   <a:srgbClr val="E8F0EC"/>
                 </a:solidFill>
@@ -29543,7 +29543,7 @@
         </p:nvSpPr>
         <p:spPr>
           <a:xfrm>
-            <a:off x="4389120" y="2697480"/>
+            <a:off x="4389120" y="2724912"/>
             <a:ext cx="3108960" cy="228600"/>
           </a:xfrm>
           <a:prstGeom prst="rect">
@@ -29558,7 +29558,7 @@
           <a:lstStyle/>
           <a:p>
             <a:pPr algn="l">
-              <a:defRPr sz="900" b="0">
+              <a:defRPr sz="800" b="0">
                 <a:solidFill>
                   <a:srgbClr val="54A0FF"/>
                 </a:solidFill>
@@ -29579,7 +29579,43 @@
         </p:nvSpPr>
         <p:spPr>
           <a:xfrm>
-            <a:off x="4389120" y="2926080"/>
+            <a:off x="4389120" y="2971800"/>
+            <a:ext cx="3108960" cy="274320"/>
+          </a:xfrm>
+          <a:prstGeom prst="rect">
+            <a:avLst/>
+          </a:prstGeom>
+          <a:noFill/>
+        </p:spPr>
+        <p:txBody>
+          <a:bodyPr wrap="square">
+            <a:spAutoFit/>
+          </a:bodyPr>
+          <a:lstStyle/>
+          <a:p>
+            <a:pPr algn="l">
+              <a:defRPr sz="700" b="0">
+                <a:solidFill>
+                  <a:srgbClr val="5A7268"/>
+                </a:solidFill>
+                <a:latin typeface="Consolas"/>
+              </a:defRPr>
+            </a:pPr>
+            <a:r>
+              <a:t>Benchmark: expert nutritionist = 92%</a:t>
+            </a:r>
+          </a:p>
+        </p:txBody>
+      </p:sp>
+      <p:sp>
+        <p:nvSpPr>
+          <p:cNvPr id="21" name="TextBox 20"/>
+          <p:cNvSpPr txBox="1"/>
+          <p:nvPr/>
+        </p:nvSpPr>
+        <p:spPr>
+          <a:xfrm>
+            <a:off x="4389120" y="3337560"/>
             <a:ext cx="3108960" cy="228600"/>
           </a:xfrm>
           <a:prstGeom prst="rect">
@@ -29594,43 +29630,115 @@
           <a:lstStyle/>
           <a:p>
             <a:pPr algn="l">
+              <a:defRPr sz="900" b="1">
+                <a:solidFill>
+                  <a:srgbClr val="E8F0EC"/>
+                </a:solidFill>
+                <a:latin typeface="Segoe UI"/>
+              </a:defRPr>
+            </a:pPr>
+            <a:r>
+              <a:t>Risk detection rate</a:t>
+            </a:r>
+          </a:p>
+        </p:txBody>
+      </p:sp>
+      <p:sp>
+        <p:nvSpPr>
+          <p:cNvPr id="22" name="TextBox 21"/>
+          <p:cNvSpPr txBox="1"/>
+          <p:nvPr/>
+        </p:nvSpPr>
+        <p:spPr>
+          <a:xfrm>
+            <a:off x="4389120" y="3593592"/>
+            <a:ext cx="3108960" cy="228600"/>
+          </a:xfrm>
+          <a:prstGeom prst="rect">
+            <a:avLst/>
+          </a:prstGeom>
+          <a:noFill/>
+        </p:spPr>
+        <p:txBody>
+          <a:bodyPr wrap="square">
+            <a:spAutoFit/>
+          </a:bodyPr>
+          <a:lstStyle/>
+          <a:p>
+            <a:pPr algn="l">
               <a:defRPr sz="800" b="0">
                 <a:solidFill>
+                  <a:srgbClr val="54A0FF"/>
+                </a:solidFill>
+                <a:latin typeface="Consolas"/>
+              </a:defRPr>
+            </a:pPr>
+            <a:r>
+              <a:t>Target: 100% HIGH risk flagged</a:t>
+            </a:r>
+          </a:p>
+        </p:txBody>
+      </p:sp>
+      <p:sp>
+        <p:nvSpPr>
+          <p:cNvPr id="23" name="TextBox 22"/>
+          <p:cNvSpPr txBox="1"/>
+          <p:nvPr/>
+        </p:nvSpPr>
+        <p:spPr>
+          <a:xfrm>
+            <a:off x="4389120" y="3840480"/>
+            <a:ext cx="3108960" cy="274320"/>
+          </a:xfrm>
+          <a:prstGeom prst="rect">
+            <a:avLst/>
+          </a:prstGeom>
+          <a:noFill/>
+        </p:spPr>
+        <p:txBody>
+          <a:bodyPr wrap="square">
+            <a:spAutoFit/>
+          </a:bodyPr>
+          <a:lstStyle/>
+          <a:p>
+            <a:pPr algn="l">
+              <a:defRPr sz="700" b="0">
+                <a:solidFill>
                   <a:srgbClr val="5A7268"/>
                 </a:solidFill>
                 <a:latin typeface="Consolas"/>
               </a:defRPr>
             </a:pPr>
             <a:r>
-              <a:t>Benchmark: expert nutritionist = 92%</a:t>
-            </a:r>
-          </a:p>
-        </p:txBody>
-      </p:sp>
-      <p:sp>
-        <p:nvSpPr>
-          <p:cNvPr id="21" name="TextBox 20"/>
-          <p:cNvSpPr txBox="1"/>
-          <p:nvPr/>
-        </p:nvSpPr>
-        <p:spPr>
-          <a:xfrm>
-            <a:off x="4389120" y="3246120"/>
-            <a:ext cx="3108960" cy="201168"/>
-          </a:xfrm>
-          <a:prstGeom prst="rect">
-            <a:avLst/>
-          </a:prstGeom>
-          <a:noFill/>
-        </p:spPr>
-        <p:txBody>
-          <a:bodyPr wrap="square">
-            <a:spAutoFit/>
-          </a:bodyPr>
-          <a:lstStyle/>
-          <a:p>
-            <a:pPr algn="l">
-              <a:defRPr sz="1000" b="1">
+              <a:t>Benchmark: manual checking = ~60%</a:t>
+            </a:r>
+          </a:p>
+        </p:txBody>
+      </p:sp>
+      <p:sp>
+        <p:nvSpPr>
+          <p:cNvPr id="24" name="TextBox 23"/>
+          <p:cNvSpPr txBox="1"/>
+          <p:nvPr/>
+        </p:nvSpPr>
+        <p:spPr>
+          <a:xfrm>
+            <a:off x="4389120" y="4206240"/>
+            <a:ext cx="3108960" cy="228600"/>
+          </a:xfrm>
+          <a:prstGeom prst="rect">
+            <a:avLst/>
+          </a:prstGeom>
+          <a:noFill/>
+        </p:spPr>
+        <p:txBody>
+          <a:bodyPr wrap="square">
+            <a:spAutoFit/>
+          </a:bodyPr>
+          <a:lstStyle/>
+          <a:p>
+            <a:pPr algn="l">
+              <a:defRPr sz="900" b="1">
                 <a:solidFill>
                   <a:srgbClr val="E8F0EC"/>
                 </a:solidFill>
@@ -29638,20 +29746,20 @@
               </a:defRPr>
             </a:pPr>
             <a:r>
-              <a:t>Risk detection rate</a:t>
-            </a:r>
-          </a:p>
-        </p:txBody>
-      </p:sp>
-      <p:sp>
-        <p:nvSpPr>
-          <p:cNvPr id="22" name="TextBox 21"/>
-          <p:cNvSpPr txBox="1"/>
-          <p:nvPr/>
-        </p:nvSpPr>
-        <p:spPr>
-          <a:xfrm>
-            <a:off x="4389120" y="3474720"/>
+              <a:t>User trust score</a:t>
+            </a:r>
+          </a:p>
+        </p:txBody>
+      </p:sp>
+      <p:sp>
+        <p:nvSpPr>
+          <p:cNvPr id="25" name="TextBox 24"/>
+          <p:cNvSpPr txBox="1"/>
+          <p:nvPr/>
+        </p:nvSpPr>
+        <p:spPr>
+          <a:xfrm>
+            <a:off x="4389120" y="4462272"/>
             <a:ext cx="3108960" cy="228600"/>
           </a:xfrm>
           <a:prstGeom prst="rect">
@@ -29666,7 +29774,7 @@
           <a:lstStyle/>
           <a:p>
             <a:pPr algn="l">
-              <a:defRPr sz="900" b="0">
+              <a:defRPr sz="800" b="0">
                 <a:solidFill>
                   <a:srgbClr val="54A0FF"/>
                 </a:solidFill>
@@ -29674,114 +29782,6 @@
               </a:defRPr>
             </a:pPr>
             <a:r>
-              <a:t>Target: 100% HIGH risk flagged</a:t>
-            </a:r>
-          </a:p>
-        </p:txBody>
-      </p:sp>
-      <p:sp>
-        <p:nvSpPr>
-          <p:cNvPr id="23" name="TextBox 22"/>
-          <p:cNvSpPr txBox="1"/>
-          <p:nvPr/>
-        </p:nvSpPr>
-        <p:spPr>
-          <a:xfrm>
-            <a:off x="4389120" y="3703320"/>
-            <a:ext cx="3108960" cy="228600"/>
-          </a:xfrm>
-          <a:prstGeom prst="rect">
-            <a:avLst/>
-          </a:prstGeom>
-          <a:noFill/>
-        </p:spPr>
-        <p:txBody>
-          <a:bodyPr wrap="square">
-            <a:spAutoFit/>
-          </a:bodyPr>
-          <a:lstStyle/>
-          <a:p>
-            <a:pPr algn="l">
-              <a:defRPr sz="800" b="0">
-                <a:solidFill>
-                  <a:srgbClr val="5A7268"/>
-                </a:solidFill>
-                <a:latin typeface="Consolas"/>
-              </a:defRPr>
-            </a:pPr>
-            <a:r>
-              <a:t>Benchmark: manual checking = ~60%</a:t>
-            </a:r>
-          </a:p>
-        </p:txBody>
-      </p:sp>
-      <p:sp>
-        <p:nvSpPr>
-          <p:cNvPr id="24" name="TextBox 23"/>
-          <p:cNvSpPr txBox="1"/>
-          <p:nvPr/>
-        </p:nvSpPr>
-        <p:spPr>
-          <a:xfrm>
-            <a:off x="4389120" y="4023360"/>
-            <a:ext cx="3108960" cy="201168"/>
-          </a:xfrm>
-          <a:prstGeom prst="rect">
-            <a:avLst/>
-          </a:prstGeom>
-          <a:noFill/>
-        </p:spPr>
-        <p:txBody>
-          <a:bodyPr wrap="square">
-            <a:spAutoFit/>
-          </a:bodyPr>
-          <a:lstStyle/>
-          <a:p>
-            <a:pPr algn="l">
-              <a:defRPr sz="1000" b="1">
-                <a:solidFill>
-                  <a:srgbClr val="E8F0EC"/>
-                </a:solidFill>
-                <a:latin typeface="Segoe UI"/>
-              </a:defRPr>
-            </a:pPr>
-            <a:r>
-              <a:t>User trust score</a:t>
-            </a:r>
-          </a:p>
-        </p:txBody>
-      </p:sp>
-      <p:sp>
-        <p:nvSpPr>
-          <p:cNvPr id="25" name="TextBox 24"/>
-          <p:cNvSpPr txBox="1"/>
-          <p:nvPr/>
-        </p:nvSpPr>
-        <p:spPr>
-          <a:xfrm>
-            <a:off x="4389120" y="4251960"/>
-            <a:ext cx="3108960" cy="228600"/>
-          </a:xfrm>
-          <a:prstGeom prst="rect">
-            <a:avLst/>
-          </a:prstGeom>
-          <a:noFill/>
-        </p:spPr>
-        <p:txBody>
-          <a:bodyPr wrap="square">
-            <a:spAutoFit/>
-          </a:bodyPr>
-          <a:lstStyle/>
-          <a:p>
-            <a:pPr algn="l">
-              <a:defRPr sz="900" b="0">
-                <a:solidFill>
-                  <a:srgbClr val="54A0FF"/>
-                </a:solidFill>
-                <a:latin typeface="Consolas"/>
-              </a:defRPr>
-            </a:pPr>
-            <a:r>
               <a:t>Target: 8+/10 on trust survey</a:t>
             </a:r>
           </a:p>
@@ -29795,22 +29795,22 @@
         </p:nvSpPr>
         <p:spPr>
           <a:xfrm>
-            <a:off x="4389120" y="4480560"/>
-            <a:ext cx="3108960" cy="228600"/>
-          </a:xfrm>
-          <a:prstGeom prst="rect">
-            <a:avLst/>
-          </a:prstGeom>
-          <a:noFill/>
-        </p:spPr>
-        <p:txBody>
-          <a:bodyPr wrap="square">
-            <a:spAutoFit/>
-          </a:bodyPr>
-          <a:lstStyle/>
-          <a:p>
-            <a:pPr algn="l">
-              <a:defRPr sz="800" b="0">
+            <a:off x="4389120" y="4709160"/>
+            <a:ext cx="3108960" cy="274320"/>
+          </a:xfrm>
+          <a:prstGeom prst="rect">
+            <a:avLst/>
+          </a:prstGeom>
+          <a:noFill/>
+        </p:spPr>
+        <p:txBody>
+          <a:bodyPr wrap="square">
+            <a:spAutoFit/>
+          </a:bodyPr>
+          <a:lstStyle/>
+          <a:p>
+            <a:pPr algn="l">
+              <a:defRPr sz="700" b="0">
                 <a:solidFill>
                   <a:srgbClr val="5A7268"/>
                 </a:solidFill>
@@ -29868,21 +29868,21 @@
         <p:spPr>
           <a:xfrm>
             <a:off x="7863840" y="2468880"/>
-            <a:ext cx="3108960" cy="201168"/>
-          </a:xfrm>
-          <a:prstGeom prst="rect">
-            <a:avLst/>
-          </a:prstGeom>
-          <a:noFill/>
-        </p:spPr>
-        <p:txBody>
-          <a:bodyPr wrap="square">
-            <a:spAutoFit/>
-          </a:bodyPr>
-          <a:lstStyle/>
-          <a:p>
-            <a:pPr algn="l">
-              <a:defRPr sz="1000" b="1">
+            <a:ext cx="3108960" cy="228600"/>
+          </a:xfrm>
+          <a:prstGeom prst="rect">
+            <a:avLst/>
+          </a:prstGeom>
+          <a:noFill/>
+        </p:spPr>
+        <p:txBody>
+          <a:bodyPr wrap="square">
+            <a:spAutoFit/>
+          </a:bodyPr>
+          <a:lstStyle/>
+          <a:p>
+            <a:pPr algn="l">
+              <a:defRPr sz="900" b="1">
                 <a:solidFill>
                   <a:srgbClr val="E8F0EC"/>
                 </a:solidFill>
@@ -29903,7 +29903,7 @@
         </p:nvSpPr>
         <p:spPr>
           <a:xfrm>
-            <a:off x="7863840" y="2697480"/>
+            <a:off x="7863840" y="2724912"/>
             <a:ext cx="3108960" cy="228600"/>
           </a:xfrm>
           <a:prstGeom prst="rect">
@@ -29918,7 +29918,7 @@
           <a:lstStyle/>
           <a:p>
             <a:pPr algn="l">
-              <a:defRPr sz="900" b="0">
+              <a:defRPr sz="800" b="0">
                 <a:solidFill>
                   <a:srgbClr val="FF9F43"/>
                 </a:solidFill>
@@ -29939,7 +29939,43 @@
         </p:nvSpPr>
         <p:spPr>
           <a:xfrm>
-            <a:off x="7863840" y="2926080"/>
+            <a:off x="7863840" y="2971800"/>
+            <a:ext cx="3108960" cy="274320"/>
+          </a:xfrm>
+          <a:prstGeom prst="rect">
+            <a:avLst/>
+          </a:prstGeom>
+          <a:noFill/>
+        </p:spPr>
+        <p:txBody>
+          <a:bodyPr wrap="square">
+            <a:spAutoFit/>
+          </a:bodyPr>
+          <a:lstStyle/>
+          <a:p>
+            <a:pPr algn="l">
+              <a:defRPr sz="700" b="0">
+                <a:solidFill>
+                  <a:srgbClr val="5A7268"/>
+                </a:solidFill>
+                <a:latin typeface="Consolas"/>
+              </a:defRPr>
+            </a:pPr>
+            <a:r>
+              <a:t>Benchmark: Adisseo = 12% for pig farms</a:t>
+            </a:r>
+          </a:p>
+        </p:txBody>
+      </p:sp>
+      <p:sp>
+        <p:nvSpPr>
+          <p:cNvPr id="31" name="TextBox 30"/>
+          <p:cNvSpPr txBox="1"/>
+          <p:nvPr/>
+        </p:nvSpPr>
+        <p:spPr>
+          <a:xfrm>
+            <a:off x="7863840" y="3337560"/>
             <a:ext cx="3108960" cy="228600"/>
           </a:xfrm>
           <a:prstGeom prst="rect">
@@ -29954,43 +29990,115 @@
           <a:lstStyle/>
           <a:p>
             <a:pPr algn="l">
+              <a:defRPr sz="900" b="1">
+                <a:solidFill>
+                  <a:srgbClr val="E8F0EC"/>
+                </a:solidFill>
+                <a:latin typeface="Segoe UI"/>
+              </a:defRPr>
+            </a:pPr>
+            <a:r>
+              <a:t>Mycotoxin-related losses</a:t>
+            </a:r>
+          </a:p>
+        </p:txBody>
+      </p:sp>
+      <p:sp>
+        <p:nvSpPr>
+          <p:cNvPr id="32" name="TextBox 31"/>
+          <p:cNvSpPr txBox="1"/>
+          <p:nvPr/>
+        </p:nvSpPr>
+        <p:spPr>
+          <a:xfrm>
+            <a:off x="7863840" y="3593592"/>
+            <a:ext cx="3108960" cy="228600"/>
+          </a:xfrm>
+          <a:prstGeom prst="rect">
+            <a:avLst/>
+          </a:prstGeom>
+          <a:noFill/>
+        </p:spPr>
+        <p:txBody>
+          <a:bodyPr wrap="square">
+            <a:spAutoFit/>
+          </a:bodyPr>
+          <a:lstStyle/>
+          <a:p>
+            <a:pPr algn="l">
               <a:defRPr sz="800" b="0">
                 <a:solidFill>
+                  <a:srgbClr val="FF9F43"/>
+                </a:solidFill>
+                <a:latin typeface="Consolas"/>
+              </a:defRPr>
+            </a:pPr>
+            <a:r>
+              <a:t>Target: 30% reduction</a:t>
+            </a:r>
+          </a:p>
+        </p:txBody>
+      </p:sp>
+      <p:sp>
+        <p:nvSpPr>
+          <p:cNvPr id="33" name="TextBox 32"/>
+          <p:cNvSpPr txBox="1"/>
+          <p:nvPr/>
+        </p:nvSpPr>
+        <p:spPr>
+          <a:xfrm>
+            <a:off x="7863840" y="3840480"/>
+            <a:ext cx="3108960" cy="274320"/>
+          </a:xfrm>
+          <a:prstGeom prst="rect">
+            <a:avLst/>
+          </a:prstGeom>
+          <a:noFill/>
+        </p:spPr>
+        <p:txBody>
+          <a:bodyPr wrap="square">
+            <a:spAutoFit/>
+          </a:bodyPr>
+          <a:lstStyle/>
+          <a:p>
+            <a:pPr algn="l">
+              <a:defRPr sz="700" b="0">
+                <a:solidFill>
                   <a:srgbClr val="5A7268"/>
                 </a:solidFill>
                 <a:latin typeface="Consolas"/>
               </a:defRPr>
             </a:pPr>
             <a:r>
-              <a:t>Benchmark: Adisseo = 12% for pig farms</a:t>
-            </a:r>
-          </a:p>
-        </p:txBody>
-      </p:sp>
-      <p:sp>
-        <p:nvSpPr>
-          <p:cNvPr id="31" name="TextBox 30"/>
-          <p:cNvSpPr txBox="1"/>
-          <p:nvPr/>
-        </p:nvSpPr>
-        <p:spPr>
-          <a:xfrm>
-            <a:off x="7863840" y="3246120"/>
-            <a:ext cx="3108960" cy="201168"/>
-          </a:xfrm>
-          <a:prstGeom prst="rect">
-            <a:avLst/>
-          </a:prstGeom>
-          <a:noFill/>
-        </p:spPr>
-        <p:txBody>
-          <a:bodyPr wrap="square">
-            <a:spAutoFit/>
-          </a:bodyPr>
-          <a:lstStyle/>
-          <a:p>
-            <a:pPr algn="l">
-              <a:defRPr sz="1000" b="1">
+              <a:t>Benchmark: binder alone = 15-20%</a:t>
+            </a:r>
+          </a:p>
+        </p:txBody>
+      </p:sp>
+      <p:sp>
+        <p:nvSpPr>
+          <p:cNvPr id="34" name="TextBox 33"/>
+          <p:cNvSpPr txBox="1"/>
+          <p:nvPr/>
+        </p:nvSpPr>
+        <p:spPr>
+          <a:xfrm>
+            <a:off x="7863840" y="4206240"/>
+            <a:ext cx="3108960" cy="228600"/>
+          </a:xfrm>
+          <a:prstGeom prst="rect">
+            <a:avLst/>
+          </a:prstGeom>
+          <a:noFill/>
+        </p:spPr>
+        <p:txBody>
+          <a:bodyPr wrap="square">
+            <a:spAutoFit/>
+          </a:bodyPr>
+          <a:lstStyle/>
+          <a:p>
+            <a:pPr algn="l">
+              <a:defRPr sz="900" b="1">
                 <a:solidFill>
                   <a:srgbClr val="E8F0EC"/>
                 </a:solidFill>
@@ -29998,20 +30106,20 @@
               </a:defRPr>
             </a:pPr>
             <a:r>
-              <a:t>Mycotoxin-related losses</a:t>
-            </a:r>
-          </a:p>
-        </p:txBody>
-      </p:sp>
-      <p:sp>
-        <p:nvSpPr>
-          <p:cNvPr id="32" name="TextBox 31"/>
-          <p:cNvSpPr txBox="1"/>
-          <p:nvPr/>
-        </p:nvSpPr>
-        <p:spPr>
-          <a:xfrm>
-            <a:off x="7863840" y="3474720"/>
+              <a:t>Knowledge retention</a:t>
+            </a:r>
+          </a:p>
+        </p:txBody>
+      </p:sp>
+      <p:sp>
+        <p:nvSpPr>
+          <p:cNvPr id="35" name="TextBox 34"/>
+          <p:cNvSpPr txBox="1"/>
+          <p:nvPr/>
+        </p:nvSpPr>
+        <p:spPr>
+          <a:xfrm>
+            <a:off x="7863840" y="4462272"/>
             <a:ext cx="3108960" cy="228600"/>
           </a:xfrm>
           <a:prstGeom prst="rect">
@@ -30026,7 +30134,7 @@
           <a:lstStyle/>
           <a:p>
             <a:pPr algn="l">
-              <a:defRPr sz="900" b="0">
+              <a:defRPr sz="800" b="0">
                 <a:solidFill>
                   <a:srgbClr val="FF9F43"/>
                 </a:solidFill>
@@ -30034,114 +30142,6 @@
               </a:defRPr>
             </a:pPr>
             <a:r>
-              <a:t>Target: 30% reduction</a:t>
-            </a:r>
-          </a:p>
-        </p:txBody>
-      </p:sp>
-      <p:sp>
-        <p:nvSpPr>
-          <p:cNvPr id="33" name="TextBox 32"/>
-          <p:cNvSpPr txBox="1"/>
-          <p:nvPr/>
-        </p:nvSpPr>
-        <p:spPr>
-          <a:xfrm>
-            <a:off x="7863840" y="3703320"/>
-            <a:ext cx="3108960" cy="228600"/>
-          </a:xfrm>
-          <a:prstGeom prst="rect">
-            <a:avLst/>
-          </a:prstGeom>
-          <a:noFill/>
-        </p:spPr>
-        <p:txBody>
-          <a:bodyPr wrap="square">
-            <a:spAutoFit/>
-          </a:bodyPr>
-          <a:lstStyle/>
-          <a:p>
-            <a:pPr algn="l">
-              <a:defRPr sz="800" b="0">
-                <a:solidFill>
-                  <a:srgbClr val="5A7268"/>
-                </a:solidFill>
-                <a:latin typeface="Consolas"/>
-              </a:defRPr>
-            </a:pPr>
-            <a:r>
-              <a:t>Benchmark: binder alone = 15-20%</a:t>
-            </a:r>
-          </a:p>
-        </p:txBody>
-      </p:sp>
-      <p:sp>
-        <p:nvSpPr>
-          <p:cNvPr id="34" name="TextBox 33"/>
-          <p:cNvSpPr txBox="1"/>
-          <p:nvPr/>
-        </p:nvSpPr>
-        <p:spPr>
-          <a:xfrm>
-            <a:off x="7863840" y="4023360"/>
-            <a:ext cx="3108960" cy="201168"/>
-          </a:xfrm>
-          <a:prstGeom prst="rect">
-            <a:avLst/>
-          </a:prstGeom>
-          <a:noFill/>
-        </p:spPr>
-        <p:txBody>
-          <a:bodyPr wrap="square">
-            <a:spAutoFit/>
-          </a:bodyPr>
-          <a:lstStyle/>
-          <a:p>
-            <a:pPr algn="l">
-              <a:defRPr sz="1000" b="1">
-                <a:solidFill>
-                  <a:srgbClr val="E8F0EC"/>
-                </a:solidFill>
-                <a:latin typeface="Segoe UI"/>
-              </a:defRPr>
-            </a:pPr>
-            <a:r>
-              <a:t>Knowledge retention</a:t>
-            </a:r>
-          </a:p>
-        </p:txBody>
-      </p:sp>
-      <p:sp>
-        <p:nvSpPr>
-          <p:cNvPr id="35" name="TextBox 34"/>
-          <p:cNvSpPr txBox="1"/>
-          <p:nvPr/>
-        </p:nvSpPr>
-        <p:spPr>
-          <a:xfrm>
-            <a:off x="7863840" y="4251960"/>
-            <a:ext cx="3108960" cy="228600"/>
-          </a:xfrm>
-          <a:prstGeom prst="rect">
-            <a:avLst/>
-          </a:prstGeom>
-          <a:noFill/>
-        </p:spPr>
-        <p:txBody>
-          <a:bodyPr wrap="square">
-            <a:spAutoFit/>
-          </a:bodyPr>
-          <a:lstStyle/>
-          <a:p>
-            <a:pPr algn="l">
-              <a:defRPr sz="900" b="0">
-                <a:solidFill>
-                  <a:srgbClr val="FF9F43"/>
-                </a:solidFill>
-                <a:latin typeface="Consolas"/>
-              </a:defRPr>
-            </a:pPr>
-            <a:r>
               <a:t>Target: capture 90% of SOPs</a:t>
             </a:r>
           </a:p>
@@ -30155,22 +30155,22 @@
         </p:nvSpPr>
         <p:spPr>
           <a:xfrm>
-            <a:off x="7863840" y="4480560"/>
-            <a:ext cx="3108960" cy="228600"/>
-          </a:xfrm>
-          <a:prstGeom prst="rect">
-            <a:avLst/>
-          </a:prstGeom>
-          <a:noFill/>
-        </p:spPr>
-        <p:txBody>
-          <a:bodyPr wrap="square">
-            <a:spAutoFit/>
-          </a:bodyPr>
-          <a:lstStyle/>
-          <a:p>
-            <a:pPr algn="l">
-              <a:defRPr sz="800" b="0">
+            <a:off x="7863840" y="4709160"/>
+            <a:ext cx="3108960" cy="274320"/>
+          </a:xfrm>
+          <a:prstGeom prst="rect">
+            <a:avLst/>
+          </a:prstGeom>
+          <a:noFill/>
+        </p:spPr>
+        <p:txBody>
+          <a:bodyPr wrap="square">
+            <a:spAutoFit/>
+          </a:bodyPr>
+          <a:lstStyle/>
+          <a:p>
+            <a:pPr algn="l">
+              <a:defRPr sz="700" b="0">
                 <a:solidFill>
                   <a:srgbClr val="5A7268"/>
                 </a:solidFill>
@@ -30445,7 +30445,7 @@
         <p:spPr>
           <a:xfrm>
             <a:off x="731520" y="914400"/>
-            <a:ext cx="9144000" cy="1097280"/>
+            <a:ext cx="9144000" cy="594360"/>
           </a:xfrm>
           <a:prstGeom prst="rect">
             <a:avLst/>
@@ -30636,21 +30636,21 @@
         <p:spPr>
           <a:xfrm>
             <a:off x="960120" y="3108960"/>
-            <a:ext cx="2926080" cy="320040"/>
-          </a:xfrm>
-          <a:prstGeom prst="rect">
-            <a:avLst/>
-          </a:prstGeom>
-          <a:noFill/>
-        </p:spPr>
-        <p:txBody>
-          <a:bodyPr wrap="square">
-            <a:spAutoFit/>
-          </a:bodyPr>
-          <a:lstStyle/>
-          <a:p>
-            <a:pPr algn="l">
-              <a:defRPr sz="900" b="0">
+            <a:ext cx="2926080" cy="347472"/>
+          </a:xfrm>
+          <a:prstGeom prst="rect">
+            <a:avLst/>
+          </a:prstGeom>
+          <a:noFill/>
+        </p:spPr>
+        <p:txBody>
+          <a:bodyPr wrap="square">
+            <a:spAutoFit/>
+          </a:bodyPr>
+          <a:lstStyle/>
+          <a:p>
+            <a:pPr algn="l">
+              <a:defRPr sz="800" b="0">
                 <a:solidFill>
                   <a:srgbClr val="00C978"/>
                 </a:solidFill>
@@ -30671,22 +30671,22 @@
         </p:nvSpPr>
         <p:spPr>
           <a:xfrm>
-            <a:off x="960120" y="3429000"/>
-            <a:ext cx="2926080" cy="320040"/>
-          </a:xfrm>
-          <a:prstGeom prst="rect">
-            <a:avLst/>
-          </a:prstGeom>
-          <a:noFill/>
-        </p:spPr>
-        <p:txBody>
-          <a:bodyPr wrap="square">
-            <a:spAutoFit/>
-          </a:bodyPr>
-          <a:lstStyle/>
-          <a:p>
-            <a:pPr algn="l">
-              <a:defRPr sz="900" b="0">
+            <a:off x="960120" y="3456432"/>
+            <a:ext cx="2926080" cy="347472"/>
+          </a:xfrm>
+          <a:prstGeom prst="rect">
+            <a:avLst/>
+          </a:prstGeom>
+          <a:noFill/>
+        </p:spPr>
+        <p:txBody>
+          <a:bodyPr wrap="square">
+            <a:spAutoFit/>
+          </a:bodyPr>
+          <a:lstStyle/>
+          <a:p>
+            <a:pPr algn="l">
+              <a:defRPr sz="800" b="0">
                 <a:solidFill>
                   <a:srgbClr val="00C978"/>
                 </a:solidFill>
@@ -30707,22 +30707,22 @@
         </p:nvSpPr>
         <p:spPr>
           <a:xfrm>
-            <a:off x="960120" y="3749040"/>
-            <a:ext cx="2926080" cy="320040"/>
-          </a:xfrm>
-          <a:prstGeom prst="rect">
-            <a:avLst/>
-          </a:prstGeom>
-          <a:noFill/>
-        </p:spPr>
-        <p:txBody>
-          <a:bodyPr wrap="square">
-            <a:spAutoFit/>
-          </a:bodyPr>
-          <a:lstStyle/>
-          <a:p>
-            <a:pPr algn="l">
-              <a:defRPr sz="900" b="0">
+            <a:off x="960120" y="3803904"/>
+            <a:ext cx="2926080" cy="347472"/>
+          </a:xfrm>
+          <a:prstGeom prst="rect">
+            <a:avLst/>
+          </a:prstGeom>
+          <a:noFill/>
+        </p:spPr>
+        <p:txBody>
+          <a:bodyPr wrap="square">
+            <a:spAutoFit/>
+          </a:bodyPr>
+          <a:lstStyle/>
+          <a:p>
+            <a:pPr algn="l">
+              <a:defRPr sz="800" b="0">
                 <a:solidFill>
                   <a:srgbClr val="8FA89C"/>
                 </a:solidFill>
@@ -30743,22 +30743,22 @@
         </p:nvSpPr>
         <p:spPr>
           <a:xfrm>
-            <a:off x="960120" y="4069080"/>
-            <a:ext cx="2926080" cy="320040"/>
-          </a:xfrm>
-          <a:prstGeom prst="rect">
-            <a:avLst/>
-          </a:prstGeom>
-          <a:noFill/>
-        </p:spPr>
-        <p:txBody>
-          <a:bodyPr wrap="square">
-            <a:spAutoFit/>
-          </a:bodyPr>
-          <a:lstStyle/>
-          <a:p>
-            <a:pPr algn="l">
-              <a:defRPr sz="900" b="0">
+            <a:off x="960120" y="4151376"/>
+            <a:ext cx="2926080" cy="347472"/>
+          </a:xfrm>
+          <a:prstGeom prst="rect">
+            <a:avLst/>
+          </a:prstGeom>
+          <a:noFill/>
+        </p:spPr>
+        <p:txBody>
+          <a:bodyPr wrap="square">
+            <a:spAutoFit/>
+          </a:bodyPr>
+          <a:lstStyle/>
+          <a:p>
+            <a:pPr algn="l">
+              <a:defRPr sz="800" b="0">
                 <a:solidFill>
                   <a:srgbClr val="8FA89C"/>
                 </a:solidFill>
@@ -30779,22 +30779,22 @@
         </p:nvSpPr>
         <p:spPr>
           <a:xfrm>
-            <a:off x="960120" y="4389120"/>
-            <a:ext cx="2926080" cy="320040"/>
-          </a:xfrm>
-          <a:prstGeom prst="rect">
-            <a:avLst/>
-          </a:prstGeom>
-          <a:noFill/>
-        </p:spPr>
-        <p:txBody>
-          <a:bodyPr wrap="square">
-            <a:spAutoFit/>
-          </a:bodyPr>
-          <a:lstStyle/>
-          <a:p>
-            <a:pPr algn="l">
-              <a:defRPr sz="900" b="0">
+            <a:off x="960120" y="4498848"/>
+            <a:ext cx="2926080" cy="347472"/>
+          </a:xfrm>
+          <a:prstGeom prst="rect">
+            <a:avLst/>
+          </a:prstGeom>
+          <a:noFill/>
+        </p:spPr>
+        <p:txBody>
+          <a:bodyPr wrap="square">
+            <a:spAutoFit/>
+          </a:bodyPr>
+          <a:lstStyle/>
+          <a:p>
+            <a:pPr algn="l">
+              <a:defRPr sz="800" b="0">
                 <a:solidFill>
                   <a:srgbClr val="8FA89C"/>
                 </a:solidFill>
@@ -30815,22 +30815,22 @@
         </p:nvSpPr>
         <p:spPr>
           <a:xfrm>
-            <a:off x="960120" y="4709160"/>
-            <a:ext cx="2926080" cy="320040"/>
-          </a:xfrm>
-          <a:prstGeom prst="rect">
-            <a:avLst/>
-          </a:prstGeom>
-          <a:noFill/>
-        </p:spPr>
-        <p:txBody>
-          <a:bodyPr wrap="square">
-            <a:spAutoFit/>
-          </a:bodyPr>
-          <a:lstStyle/>
-          <a:p>
-            <a:pPr algn="l">
-              <a:defRPr sz="900" b="0">
+            <a:off x="960120" y="4846320"/>
+            <a:ext cx="2926080" cy="347472"/>
+          </a:xfrm>
+          <a:prstGeom prst="rect">
+            <a:avLst/>
+          </a:prstGeom>
+          <a:noFill/>
+        </p:spPr>
+        <p:txBody>
+          <a:bodyPr wrap="square">
+            <a:spAutoFit/>
+          </a:bodyPr>
+          <a:lstStyle/>
+          <a:p>
+            <a:pPr algn="l">
+              <a:defRPr sz="800" b="0">
                 <a:solidFill>
                   <a:srgbClr val="8FA89C"/>
                 </a:solidFill>
@@ -31007,21 +31007,21 @@
         <p:spPr>
           <a:xfrm>
             <a:off x="4526280" y="3108960"/>
-            <a:ext cx="2926080" cy="320040"/>
-          </a:xfrm>
-          <a:prstGeom prst="rect">
-            <a:avLst/>
-          </a:prstGeom>
-          <a:noFill/>
-        </p:spPr>
-        <p:txBody>
-          <a:bodyPr wrap="square">
-            <a:spAutoFit/>
-          </a:bodyPr>
-          <a:lstStyle/>
-          <a:p>
-            <a:pPr algn="l">
-              <a:defRPr sz="900" b="0">
+            <a:ext cx="2926080" cy="347472"/>
+          </a:xfrm>
+          <a:prstGeom prst="rect">
+            <a:avLst/>
+          </a:prstGeom>
+          <a:noFill/>
+        </p:spPr>
+        <p:txBody>
+          <a:bodyPr wrap="square">
+            <a:spAutoFit/>
+          </a:bodyPr>
+          <a:lstStyle/>
+          <a:p>
+            <a:pPr algn="l">
+              <a:defRPr sz="800" b="0">
                 <a:solidFill>
                   <a:srgbClr val="8FA89C"/>
                 </a:solidFill>
@@ -31042,22 +31042,22 @@
         </p:nvSpPr>
         <p:spPr>
           <a:xfrm>
-            <a:off x="4526280" y="3429000"/>
-            <a:ext cx="2926080" cy="320040"/>
-          </a:xfrm>
-          <a:prstGeom prst="rect">
-            <a:avLst/>
-          </a:prstGeom>
-          <a:noFill/>
-        </p:spPr>
-        <p:txBody>
-          <a:bodyPr wrap="square">
-            <a:spAutoFit/>
-          </a:bodyPr>
-          <a:lstStyle/>
-          <a:p>
-            <a:pPr algn="l">
-              <a:defRPr sz="900" b="0">
+            <a:off x="4526280" y="3456432"/>
+            <a:ext cx="2926080" cy="347472"/>
+          </a:xfrm>
+          <a:prstGeom prst="rect">
+            <a:avLst/>
+          </a:prstGeom>
+          <a:noFill/>
+        </p:spPr>
+        <p:txBody>
+          <a:bodyPr wrap="square">
+            <a:spAutoFit/>
+          </a:bodyPr>
+          <a:lstStyle/>
+          <a:p>
+            <a:pPr algn="l">
+              <a:defRPr sz="800" b="0">
                 <a:solidFill>
                   <a:srgbClr val="8FA89C"/>
                 </a:solidFill>
@@ -31078,22 +31078,22 @@
         </p:nvSpPr>
         <p:spPr>
           <a:xfrm>
-            <a:off x="4526280" y="3749040"/>
-            <a:ext cx="2926080" cy="320040"/>
-          </a:xfrm>
-          <a:prstGeom prst="rect">
-            <a:avLst/>
-          </a:prstGeom>
-          <a:noFill/>
-        </p:spPr>
-        <p:txBody>
-          <a:bodyPr wrap="square">
-            <a:spAutoFit/>
-          </a:bodyPr>
-          <a:lstStyle/>
-          <a:p>
-            <a:pPr algn="l">
-              <a:defRPr sz="900" b="0">
+            <a:off x="4526280" y="3803904"/>
+            <a:ext cx="2926080" cy="347472"/>
+          </a:xfrm>
+          <a:prstGeom prst="rect">
+            <a:avLst/>
+          </a:prstGeom>
+          <a:noFill/>
+        </p:spPr>
+        <p:txBody>
+          <a:bodyPr wrap="square">
+            <a:spAutoFit/>
+          </a:bodyPr>
+          <a:lstStyle/>
+          <a:p>
+            <a:pPr algn="l">
+              <a:defRPr sz="800" b="0">
                 <a:solidFill>
                   <a:srgbClr val="8FA89C"/>
                 </a:solidFill>
@@ -31114,22 +31114,22 @@
         </p:nvSpPr>
         <p:spPr>
           <a:xfrm>
-            <a:off x="4526280" y="4069080"/>
-            <a:ext cx="2926080" cy="320040"/>
-          </a:xfrm>
-          <a:prstGeom prst="rect">
-            <a:avLst/>
-          </a:prstGeom>
-          <a:noFill/>
-        </p:spPr>
-        <p:txBody>
-          <a:bodyPr wrap="square">
-            <a:spAutoFit/>
-          </a:bodyPr>
-          <a:lstStyle/>
-          <a:p>
-            <a:pPr algn="l">
-              <a:defRPr sz="900" b="0">
+            <a:off x="4526280" y="4151376"/>
+            <a:ext cx="2926080" cy="347472"/>
+          </a:xfrm>
+          <a:prstGeom prst="rect">
+            <a:avLst/>
+          </a:prstGeom>
+          <a:noFill/>
+        </p:spPr>
+        <p:txBody>
+          <a:bodyPr wrap="square">
+            <a:spAutoFit/>
+          </a:bodyPr>
+          <a:lstStyle/>
+          <a:p>
+            <a:pPr algn="l">
+              <a:defRPr sz="800" b="0">
                 <a:solidFill>
                   <a:srgbClr val="8FA89C"/>
                 </a:solidFill>
@@ -31150,22 +31150,22 @@
         </p:nvSpPr>
         <p:spPr>
           <a:xfrm>
-            <a:off x="4526280" y="4389120"/>
-            <a:ext cx="2926080" cy="320040"/>
-          </a:xfrm>
-          <a:prstGeom prst="rect">
-            <a:avLst/>
-          </a:prstGeom>
-          <a:noFill/>
-        </p:spPr>
-        <p:txBody>
-          <a:bodyPr wrap="square">
-            <a:spAutoFit/>
-          </a:bodyPr>
-          <a:lstStyle/>
-          <a:p>
-            <a:pPr algn="l">
-              <a:defRPr sz="900" b="0">
+            <a:off x="4526280" y="4498848"/>
+            <a:ext cx="2926080" cy="347472"/>
+          </a:xfrm>
+          <a:prstGeom prst="rect">
+            <a:avLst/>
+          </a:prstGeom>
+          <a:noFill/>
+        </p:spPr>
+        <p:txBody>
+          <a:bodyPr wrap="square">
+            <a:spAutoFit/>
+          </a:bodyPr>
+          <a:lstStyle/>
+          <a:p>
+            <a:pPr algn="l">
+              <a:defRPr sz="800" b="0">
                 <a:solidFill>
                   <a:srgbClr val="8FA89C"/>
                 </a:solidFill>
@@ -31186,22 +31186,22 @@
         </p:nvSpPr>
         <p:spPr>
           <a:xfrm>
-            <a:off x="4526280" y="4709160"/>
-            <a:ext cx="2926080" cy="320040"/>
-          </a:xfrm>
-          <a:prstGeom prst="rect">
-            <a:avLst/>
-          </a:prstGeom>
-          <a:noFill/>
-        </p:spPr>
-        <p:txBody>
-          <a:bodyPr wrap="square">
-            <a:spAutoFit/>
-          </a:bodyPr>
-          <a:lstStyle/>
-          <a:p>
-            <a:pPr algn="l">
-              <a:defRPr sz="900" b="0">
+            <a:off x="4526280" y="4846320"/>
+            <a:ext cx="2926080" cy="347472"/>
+          </a:xfrm>
+          <a:prstGeom prst="rect">
+            <a:avLst/>
+          </a:prstGeom>
+          <a:noFill/>
+        </p:spPr>
+        <p:txBody>
+          <a:bodyPr wrap="square">
+            <a:spAutoFit/>
+          </a:bodyPr>
+          <a:lstStyle/>
+          <a:p>
+            <a:pPr algn="l">
+              <a:defRPr sz="800" b="0">
                 <a:solidFill>
                   <a:srgbClr val="8FA89C"/>
                 </a:solidFill>
@@ -31378,21 +31378,21 @@
         <p:spPr>
           <a:xfrm>
             <a:off x="8092440" y="3108960"/>
-            <a:ext cx="2926080" cy="320040"/>
-          </a:xfrm>
-          <a:prstGeom prst="rect">
-            <a:avLst/>
-          </a:prstGeom>
-          <a:noFill/>
-        </p:spPr>
-        <p:txBody>
-          <a:bodyPr wrap="square">
-            <a:spAutoFit/>
-          </a:bodyPr>
-          <a:lstStyle/>
-          <a:p>
-            <a:pPr algn="l">
-              <a:defRPr sz="900" b="0">
+            <a:ext cx="2926080" cy="347472"/>
+          </a:xfrm>
+          <a:prstGeom prst="rect">
+            <a:avLst/>
+          </a:prstGeom>
+          <a:noFill/>
+        </p:spPr>
+        <p:txBody>
+          <a:bodyPr wrap="square">
+            <a:spAutoFit/>
+          </a:bodyPr>
+          <a:lstStyle/>
+          <a:p>
+            <a:pPr algn="l">
+              <a:defRPr sz="800" b="0">
                 <a:solidFill>
                   <a:srgbClr val="8FA89C"/>
                 </a:solidFill>
@@ -31413,22 +31413,22 @@
         </p:nvSpPr>
         <p:spPr>
           <a:xfrm>
-            <a:off x="8092440" y="3429000"/>
-            <a:ext cx="2926080" cy="320040"/>
-          </a:xfrm>
-          <a:prstGeom prst="rect">
-            <a:avLst/>
-          </a:prstGeom>
-          <a:noFill/>
-        </p:spPr>
-        <p:txBody>
-          <a:bodyPr wrap="square">
-            <a:spAutoFit/>
-          </a:bodyPr>
-          <a:lstStyle/>
-          <a:p>
-            <a:pPr algn="l">
-              <a:defRPr sz="900" b="0">
+            <a:off x="8092440" y="3456432"/>
+            <a:ext cx="2926080" cy="347472"/>
+          </a:xfrm>
+          <a:prstGeom prst="rect">
+            <a:avLst/>
+          </a:prstGeom>
+          <a:noFill/>
+        </p:spPr>
+        <p:txBody>
+          <a:bodyPr wrap="square">
+            <a:spAutoFit/>
+          </a:bodyPr>
+          <a:lstStyle/>
+          <a:p>
+            <a:pPr algn="l">
+              <a:defRPr sz="800" b="0">
                 <a:solidFill>
                   <a:srgbClr val="8FA89C"/>
                 </a:solidFill>
@@ -31449,22 +31449,22 @@
         </p:nvSpPr>
         <p:spPr>
           <a:xfrm>
-            <a:off x="8092440" y="3749040"/>
-            <a:ext cx="2926080" cy="320040"/>
-          </a:xfrm>
-          <a:prstGeom prst="rect">
-            <a:avLst/>
-          </a:prstGeom>
-          <a:noFill/>
-        </p:spPr>
-        <p:txBody>
-          <a:bodyPr wrap="square">
-            <a:spAutoFit/>
-          </a:bodyPr>
-          <a:lstStyle/>
-          <a:p>
-            <a:pPr algn="l">
-              <a:defRPr sz="900" b="0">
+            <a:off x="8092440" y="3803904"/>
+            <a:ext cx="2926080" cy="347472"/>
+          </a:xfrm>
+          <a:prstGeom prst="rect">
+            <a:avLst/>
+          </a:prstGeom>
+          <a:noFill/>
+        </p:spPr>
+        <p:txBody>
+          <a:bodyPr wrap="square">
+            <a:spAutoFit/>
+          </a:bodyPr>
+          <a:lstStyle/>
+          <a:p>
+            <a:pPr algn="l">
+              <a:defRPr sz="800" b="0">
                 <a:solidFill>
                   <a:srgbClr val="8FA89C"/>
                 </a:solidFill>
@@ -31485,22 +31485,22 @@
         </p:nvSpPr>
         <p:spPr>
           <a:xfrm>
-            <a:off x="8092440" y="4069080"/>
-            <a:ext cx="2926080" cy="320040"/>
-          </a:xfrm>
-          <a:prstGeom prst="rect">
-            <a:avLst/>
-          </a:prstGeom>
-          <a:noFill/>
-        </p:spPr>
-        <p:txBody>
-          <a:bodyPr wrap="square">
-            <a:spAutoFit/>
-          </a:bodyPr>
-          <a:lstStyle/>
-          <a:p>
-            <a:pPr algn="l">
-              <a:defRPr sz="900" b="0">
+            <a:off x="8092440" y="4151376"/>
+            <a:ext cx="2926080" cy="347472"/>
+          </a:xfrm>
+          <a:prstGeom prst="rect">
+            <a:avLst/>
+          </a:prstGeom>
+          <a:noFill/>
+        </p:spPr>
+        <p:txBody>
+          <a:bodyPr wrap="square">
+            <a:spAutoFit/>
+          </a:bodyPr>
+          <a:lstStyle/>
+          <a:p>
+            <a:pPr algn="l">
+              <a:defRPr sz="800" b="0">
                 <a:solidFill>
                   <a:srgbClr val="8FA89C"/>
                 </a:solidFill>
@@ -31521,22 +31521,22 @@
         </p:nvSpPr>
         <p:spPr>
           <a:xfrm>
-            <a:off x="8092440" y="4389120"/>
-            <a:ext cx="2926080" cy="320040"/>
-          </a:xfrm>
-          <a:prstGeom prst="rect">
-            <a:avLst/>
-          </a:prstGeom>
-          <a:noFill/>
-        </p:spPr>
-        <p:txBody>
-          <a:bodyPr wrap="square">
-            <a:spAutoFit/>
-          </a:bodyPr>
-          <a:lstStyle/>
-          <a:p>
-            <a:pPr algn="l">
-              <a:defRPr sz="900" b="0">
+            <a:off x="8092440" y="4498848"/>
+            <a:ext cx="2926080" cy="347472"/>
+          </a:xfrm>
+          <a:prstGeom prst="rect">
+            <a:avLst/>
+          </a:prstGeom>
+          <a:noFill/>
+        </p:spPr>
+        <p:txBody>
+          <a:bodyPr wrap="square">
+            <a:spAutoFit/>
+          </a:bodyPr>
+          <a:lstStyle/>
+          <a:p>
+            <a:pPr algn="l">
+              <a:defRPr sz="800" b="0">
                 <a:solidFill>
                   <a:srgbClr val="8FA89C"/>
                 </a:solidFill>
@@ -31557,22 +31557,22 @@
         </p:nvSpPr>
         <p:spPr>
           <a:xfrm>
-            <a:off x="8092440" y="4709160"/>
-            <a:ext cx="2926080" cy="320040"/>
-          </a:xfrm>
-          <a:prstGeom prst="rect">
-            <a:avLst/>
-          </a:prstGeom>
-          <a:noFill/>
-        </p:spPr>
-        <p:txBody>
-          <a:bodyPr wrap="square">
-            <a:spAutoFit/>
-          </a:bodyPr>
-          <a:lstStyle/>
-          <a:p>
-            <a:pPr algn="l">
-              <a:defRPr sz="900" b="0">
+            <a:off x="8092440" y="4846320"/>
+            <a:ext cx="2926080" cy="347472"/>
+          </a:xfrm>
+          <a:prstGeom prst="rect">
+            <a:avLst/>
+          </a:prstGeom>
+          <a:noFill/>
+        </p:spPr>
+        <p:txBody>
+          <a:bodyPr wrap="square">
+            <a:spAutoFit/>
+          </a:bodyPr>
+          <a:lstStyle/>
+          <a:p>
+            <a:pPr algn="l">
+              <a:defRPr sz="800" b="0">
                 <a:solidFill>
                   <a:srgbClr val="8FA89C"/>
                 </a:solidFill>
@@ -31851,7 +31851,7 @@
         <p:spPr>
           <a:xfrm>
             <a:off x="731520" y="2011680"/>
-            <a:ext cx="10515600" cy="1051560"/>
+            <a:ext cx="10515600" cy="868680"/>
           </a:xfrm>
           <a:prstGeom prst="roundRect">
             <a:avLst>
@@ -31897,7 +31897,7 @@
         </p:nvSpPr>
         <p:spPr>
           <a:xfrm>
-            <a:off x="1005840" y="2084832"/>
+            <a:off x="1005840" y="2066544"/>
             <a:ext cx="2743200" cy="201168"/>
           </a:xfrm>
           <a:prstGeom prst="rect">
@@ -31912,7 +31912,7 @@
           <a:lstStyle/>
           <a:p>
             <a:pPr algn="l">
-              <a:defRPr sz="1100" b="1">
+              <a:defRPr sz="1000" b="1">
                 <a:solidFill>
                   <a:srgbClr val="E8F0EC"/>
                 </a:solidFill>
@@ -31933,7 +31933,7 @@
         </p:nvSpPr>
         <p:spPr>
           <a:xfrm>
-            <a:off x="1005840" y="2331720"/>
+            <a:off x="1005840" y="2304288"/>
             <a:ext cx="2743200" cy="182880"/>
           </a:xfrm>
           <a:prstGeom prst="rect">
@@ -31948,7 +31948,7 @@
           <a:lstStyle/>
           <a:p>
             <a:pPr algn="l">
-              <a:defRPr sz="900" b="0">
+              <a:defRPr sz="800" b="0">
                 <a:solidFill>
                   <a:srgbClr val="5A7268"/>
                 </a:solidFill>
@@ -31969,7 +31969,7 @@
         </p:nvSpPr>
         <p:spPr>
           <a:xfrm>
-            <a:off x="3840480" y="2103120"/>
+            <a:off x="3840480" y="2084832"/>
             <a:ext cx="1645920" cy="320040"/>
           </a:xfrm>
           <a:prstGeom prst="rect">
@@ -31984,7 +31984,7 @@
           <a:lstStyle/>
           <a:p>
             <a:pPr algn="l">
-              <a:defRPr sz="1400" b="1">
+              <a:defRPr sz="1300" b="1">
                 <a:solidFill>
                   <a:srgbClr val="00C978"/>
                 </a:solidFill>
@@ -32005,22 +32005,22 @@
         </p:nvSpPr>
         <p:spPr>
           <a:xfrm>
-            <a:off x="5669280" y="2084832"/>
-            <a:ext cx="5303520" cy="914400"/>
-          </a:xfrm>
-          <a:prstGeom prst="rect">
-            <a:avLst/>
-          </a:prstGeom>
-          <a:noFill/>
-        </p:spPr>
-        <p:txBody>
-          <a:bodyPr wrap="square">
-            <a:spAutoFit/>
-          </a:bodyPr>
-          <a:lstStyle/>
-          <a:p>
-            <a:pPr algn="l">
-              <a:defRPr sz="900" b="0">
+            <a:off x="5669280" y="2066544"/>
+            <a:ext cx="5303520" cy="777240"/>
+          </a:xfrm>
+          <a:prstGeom prst="rect">
+            <a:avLst/>
+          </a:prstGeom>
+          <a:noFill/>
+        </p:spPr>
+        <p:txBody>
+          <a:bodyPr wrap="square">
+            <a:spAutoFit/>
+          </a:bodyPr>
+          <a:lstStyle/>
+          <a:p>
+            <a:pPr algn="l">
+              <a:defRPr sz="800" b="0">
                 <a:solidFill>
                   <a:srgbClr val="8FA89C"/>
                 </a:solidFill>
@@ -32041,8 +32041,8 @@
         </p:nvSpPr>
         <p:spPr>
           <a:xfrm>
-            <a:off x="731520" y="3154680"/>
-            <a:ext cx="10515600" cy="1051560"/>
+            <a:off x="731520" y="2971800"/>
+            <a:ext cx="10515600" cy="868680"/>
           </a:xfrm>
           <a:prstGeom prst="roundRect">
             <a:avLst>
@@ -32088,7 +32088,7 @@
         </p:nvSpPr>
         <p:spPr>
           <a:xfrm>
-            <a:off x="1005840" y="3227832"/>
+            <a:off x="1005840" y="3026664"/>
             <a:ext cx="2743200" cy="201168"/>
           </a:xfrm>
           <a:prstGeom prst="rect">
@@ -32103,7 +32103,7 @@
           <a:lstStyle/>
           <a:p>
             <a:pPr algn="l">
-              <a:defRPr sz="1100" b="1">
+              <a:defRPr sz="1000" b="1">
                 <a:solidFill>
                   <a:srgbClr val="E8F0EC"/>
                 </a:solidFill>
@@ -32124,7 +32124,7 @@
         </p:nvSpPr>
         <p:spPr>
           <a:xfrm>
-            <a:off x="1005840" y="3474720"/>
+            <a:off x="1005840" y="3264408"/>
             <a:ext cx="2743200" cy="182880"/>
           </a:xfrm>
           <a:prstGeom prst="rect">
@@ -32139,7 +32139,7 @@
           <a:lstStyle/>
           <a:p>
             <a:pPr algn="l">
-              <a:defRPr sz="900" b="0">
+              <a:defRPr sz="800" b="0">
                 <a:solidFill>
                   <a:srgbClr val="5A7268"/>
                 </a:solidFill>
@@ -32160,7 +32160,7 @@
         </p:nvSpPr>
         <p:spPr>
           <a:xfrm>
-            <a:off x="3840480" y="3246120"/>
+            <a:off x="3840480" y="3044952"/>
             <a:ext cx="1645920" cy="320040"/>
           </a:xfrm>
           <a:prstGeom prst="rect">
@@ -32175,7 +32175,7 @@
           <a:lstStyle/>
           <a:p>
             <a:pPr algn="l">
-              <a:defRPr sz="1400" b="1">
+              <a:defRPr sz="1300" b="1">
                 <a:solidFill>
                   <a:srgbClr val="54A0FF"/>
                 </a:solidFill>
@@ -32196,22 +32196,22 @@
         </p:nvSpPr>
         <p:spPr>
           <a:xfrm>
-            <a:off x="5669280" y="3227832"/>
-            <a:ext cx="5303520" cy="914400"/>
-          </a:xfrm>
-          <a:prstGeom prst="rect">
-            <a:avLst/>
-          </a:prstGeom>
-          <a:noFill/>
-        </p:spPr>
-        <p:txBody>
-          <a:bodyPr wrap="square">
-            <a:spAutoFit/>
-          </a:bodyPr>
-          <a:lstStyle/>
-          <a:p>
-            <a:pPr algn="l">
-              <a:defRPr sz="900" b="0">
+            <a:off x="5669280" y="3026664"/>
+            <a:ext cx="5303520" cy="777240"/>
+          </a:xfrm>
+          <a:prstGeom prst="rect">
+            <a:avLst/>
+          </a:prstGeom>
+          <a:noFill/>
+        </p:spPr>
+        <p:txBody>
+          <a:bodyPr wrap="square">
+            <a:spAutoFit/>
+          </a:bodyPr>
+          <a:lstStyle/>
+          <a:p>
+            <a:pPr algn="l">
+              <a:defRPr sz="800" b="0">
                 <a:solidFill>
                   <a:srgbClr val="8FA89C"/>
                 </a:solidFill>
@@ -32232,8 +32232,8 @@
         </p:nvSpPr>
         <p:spPr>
           <a:xfrm>
-            <a:off x="731520" y="4297680"/>
-            <a:ext cx="10515600" cy="1051560"/>
+            <a:off x="731520" y="3931920"/>
+            <a:ext cx="10515600" cy="868680"/>
           </a:xfrm>
           <a:prstGeom prst="roundRect">
             <a:avLst>
@@ -32279,7 +32279,7 @@
         </p:nvSpPr>
         <p:spPr>
           <a:xfrm>
-            <a:off x="1005840" y="4370832"/>
+            <a:off x="1005840" y="3986784"/>
             <a:ext cx="2743200" cy="201168"/>
           </a:xfrm>
           <a:prstGeom prst="rect">
@@ -32294,7 +32294,7 @@
           <a:lstStyle/>
           <a:p>
             <a:pPr algn="l">
-              <a:defRPr sz="1100" b="1">
+              <a:defRPr sz="1000" b="1">
                 <a:solidFill>
                   <a:srgbClr val="E8F0EC"/>
                 </a:solidFill>
@@ -32315,7 +32315,7 @@
         </p:nvSpPr>
         <p:spPr>
           <a:xfrm>
-            <a:off x="1005840" y="4617720"/>
+            <a:off x="1005840" y="4224528"/>
             <a:ext cx="2743200" cy="182880"/>
           </a:xfrm>
           <a:prstGeom prst="rect">
@@ -32330,7 +32330,7 @@
           <a:lstStyle/>
           <a:p>
             <a:pPr algn="l">
-              <a:defRPr sz="900" b="0">
+              <a:defRPr sz="800" b="0">
                 <a:solidFill>
                   <a:srgbClr val="5A7268"/>
                 </a:solidFill>
@@ -32351,7 +32351,7 @@
         </p:nvSpPr>
         <p:spPr>
           <a:xfrm>
-            <a:off x="3840480" y="4389120"/>
+            <a:off x="3840480" y="4005072"/>
             <a:ext cx="1645920" cy="320040"/>
           </a:xfrm>
           <a:prstGeom prst="rect">
@@ -32366,7 +32366,7 @@
           <a:lstStyle/>
           <a:p>
             <a:pPr algn="l">
-              <a:defRPr sz="1400" b="1">
+              <a:defRPr sz="1300" b="1">
                 <a:solidFill>
                   <a:srgbClr val="FF9F43"/>
                 </a:solidFill>
@@ -32387,22 +32387,22 @@
         </p:nvSpPr>
         <p:spPr>
           <a:xfrm>
-            <a:off x="5669280" y="4370832"/>
-            <a:ext cx="5303520" cy="914400"/>
-          </a:xfrm>
-          <a:prstGeom prst="rect">
-            <a:avLst/>
-          </a:prstGeom>
-          <a:noFill/>
-        </p:spPr>
-        <p:txBody>
-          <a:bodyPr wrap="square">
-            <a:spAutoFit/>
-          </a:bodyPr>
-          <a:lstStyle/>
-          <a:p>
-            <a:pPr algn="l">
-              <a:defRPr sz="900" b="0">
+            <a:off x="5669280" y="3986784"/>
+            <a:ext cx="5303520" cy="777240"/>
+          </a:xfrm>
+          <a:prstGeom prst="rect">
+            <a:avLst/>
+          </a:prstGeom>
+          <a:noFill/>
+        </p:spPr>
+        <p:txBody>
+          <a:bodyPr wrap="square">
+            <a:spAutoFit/>
+          </a:bodyPr>
+          <a:lstStyle/>
+          <a:p>
+            <a:pPr algn="l">
+              <a:defRPr sz="800" b="0">
                 <a:solidFill>
                   <a:srgbClr val="8FA89C"/>
                 </a:solidFill>
@@ -32423,8 +32423,8 @@
         </p:nvSpPr>
         <p:spPr>
           <a:xfrm>
-            <a:off x="731520" y="5440680"/>
-            <a:ext cx="10515600" cy="1051560"/>
+            <a:off x="731520" y="4892040"/>
+            <a:ext cx="10515600" cy="868680"/>
           </a:xfrm>
           <a:prstGeom prst="roundRect">
             <a:avLst>
@@ -32470,7 +32470,7 @@
         </p:nvSpPr>
         <p:spPr>
           <a:xfrm>
-            <a:off x="1005840" y="5513832"/>
+            <a:off x="1005840" y="4946904"/>
             <a:ext cx="2743200" cy="201168"/>
           </a:xfrm>
           <a:prstGeom prst="rect">
@@ -32485,7 +32485,7 @@
           <a:lstStyle/>
           <a:p>
             <a:pPr algn="l">
-              <a:defRPr sz="1100" b="1">
+              <a:defRPr sz="1000" b="1">
                 <a:solidFill>
                   <a:srgbClr val="E8F0EC"/>
                 </a:solidFill>
@@ -32506,7 +32506,7 @@
         </p:nvSpPr>
         <p:spPr>
           <a:xfrm>
-            <a:off x="1005840" y="5760720"/>
+            <a:off x="1005840" y="5184648"/>
             <a:ext cx="2743200" cy="182880"/>
           </a:xfrm>
           <a:prstGeom prst="rect">
@@ -32521,7 +32521,7 @@
           <a:lstStyle/>
           <a:p>
             <a:pPr algn="l">
-              <a:defRPr sz="900" b="0">
+              <a:defRPr sz="800" b="0">
                 <a:solidFill>
                   <a:srgbClr val="5A7268"/>
                 </a:solidFill>
@@ -32542,7 +32542,7 @@
         </p:nvSpPr>
         <p:spPr>
           <a:xfrm>
-            <a:off x="3840480" y="5532120"/>
+            <a:off x="3840480" y="4965192"/>
             <a:ext cx="1645920" cy="320040"/>
           </a:xfrm>
           <a:prstGeom prst="rect">
@@ -32557,7 +32557,7 @@
           <a:lstStyle/>
           <a:p>
             <a:pPr algn="l">
-              <a:defRPr sz="1400" b="1">
+              <a:defRPr sz="1300" b="1">
                 <a:solidFill>
                   <a:srgbClr val="FF6B6B"/>
                 </a:solidFill>
@@ -32578,22 +32578,22 @@
         </p:nvSpPr>
         <p:spPr>
           <a:xfrm>
-            <a:off x="5669280" y="5513832"/>
-            <a:ext cx="5303520" cy="914400"/>
-          </a:xfrm>
-          <a:prstGeom prst="rect">
-            <a:avLst/>
-          </a:prstGeom>
-          <a:noFill/>
-        </p:spPr>
-        <p:txBody>
-          <a:bodyPr wrap="square">
-            <a:spAutoFit/>
-          </a:bodyPr>
-          <a:lstStyle/>
-          <a:p>
-            <a:pPr algn="l">
-              <a:defRPr sz="900" b="0">
+            <a:off x="5669280" y="4946904"/>
+            <a:ext cx="5303520" cy="777240"/>
+          </a:xfrm>
+          <a:prstGeom prst="rect">
+            <a:avLst/>
+          </a:prstGeom>
+          <a:noFill/>
+        </p:spPr>
+        <p:txBody>
+          <a:bodyPr wrap="square">
+            <a:spAutoFit/>
+          </a:bodyPr>
+          <a:lstStyle/>
+          <a:p>
+            <a:pPr algn="l">
+              <a:defRPr sz="800" b="0">
                 <a:solidFill>
                   <a:srgbClr val="8FA89C"/>
                 </a:solidFill>
@@ -32614,8 +32614,8 @@
         </p:nvSpPr>
         <p:spPr>
           <a:xfrm>
-            <a:off x="731520" y="5577840"/>
-            <a:ext cx="10515600" cy="640080"/>
+            <a:off x="731520" y="5897880"/>
+            <a:ext cx="10515600" cy="502920"/>
           </a:xfrm>
           <a:prstGeom prst="roundRect">
             <a:avLst>
@@ -32661,22 +32661,22 @@
         </p:nvSpPr>
         <p:spPr>
           <a:xfrm>
-            <a:off x="1005840" y="5669280"/>
-            <a:ext cx="9601200" cy="457200"/>
-          </a:xfrm>
-          <a:prstGeom prst="rect">
-            <a:avLst/>
-          </a:prstGeom>
-          <a:noFill/>
-        </p:spPr>
-        <p:txBody>
-          <a:bodyPr wrap="square">
-            <a:spAutoFit/>
-          </a:bodyPr>
-          <a:lstStyle/>
-          <a:p>
-            <a:pPr algn="l">
-              <a:defRPr sz="1100" b="0">
+            <a:off x="1005840" y="5943600"/>
+            <a:ext cx="9601200" cy="411480"/>
+          </a:xfrm>
+          <a:prstGeom prst="rect">
+            <a:avLst/>
+          </a:prstGeom>
+          <a:noFill/>
+        </p:spPr>
+        <p:txBody>
+          <a:bodyPr wrap="square">
+            <a:spAutoFit/>
+          </a:bodyPr>
+          <a:lstStyle/>
+          <a:p>
+            <a:pPr algn="l">
+              <a:defRPr sz="1000" b="0">
                 <a:solidFill>
                   <a:srgbClr val="8FA89C"/>
                 </a:solidFill>
@@ -32684,11 +32684,7 @@
               </a:defRPr>
             </a:pPr>
             <a:r>
-              <a:t>PATTERN: AI tools that connect domain data to user decisions consistently deliver 10-30x ROI.</a:t>
-            </a:r>
-            <a:br/>
-            <a:r>
-              <a:t>FeedIQ applies this proven pattern to a $1.5B market with zero existing interactive tools.</a:t>
+              <a:t>PATTERN: AI tools that connect domain data to user decisions consistently deliver 10-30x ROI. FeedIQ applies this proven pattern to a $1.5B market with zero existing interactive tools.</a:t>
             </a:r>
           </a:p>
         </p:txBody>
@@ -32836,7 +32832,7 @@
         <p:spPr>
           <a:xfrm>
             <a:off x="731520" y="914400"/>
-            <a:ext cx="9144000" cy="1097280"/>
+            <a:ext cx="9144000" cy="594360"/>
           </a:xfrm>
           <a:prstGeom prst="rect">
             <a:avLst/>
@@ -32969,7 +32965,7 @@
           <a:lstStyle/>
           <a:p>
             <a:pPr algn="l">
-              <a:defRPr sz="1100" b="1">
+              <a:defRPr sz="1000" b="1">
                 <a:solidFill>
                   <a:srgbClr val="00C978"/>
                 </a:solidFill>
@@ -32991,21 +32987,21 @@
         <p:spPr>
           <a:xfrm>
             <a:off x="1005840" y="2496312"/>
-            <a:ext cx="4572000" cy="502920"/>
-          </a:xfrm>
-          <a:prstGeom prst="rect">
-            <a:avLst/>
-          </a:prstGeom>
-          <a:noFill/>
-        </p:spPr>
-        <p:txBody>
-          <a:bodyPr wrap="square">
-            <a:spAutoFit/>
-          </a:bodyPr>
-          <a:lstStyle/>
-          <a:p>
-            <a:pPr algn="l">
-              <a:defRPr sz="1000" b="0">
+            <a:ext cx="4572000" cy="548640"/>
+          </a:xfrm>
+          <a:prstGeom prst="rect">
+            <a:avLst/>
+          </a:prstGeom>
+          <a:noFill/>
+        </p:spPr>
+        <p:txBody>
+          <a:bodyPr wrap="square">
+            <a:spAutoFit/>
+          </a:bodyPr>
+          <a:lstStyle/>
+          <a:p>
+            <a:pPr algn="l">
+              <a:defRPr sz="900" b="0">
                 <a:solidFill>
                   <a:srgbClr val="8FA89C"/>
                 </a:solidFill>
@@ -33026,7 +33022,7 @@
         </p:nvSpPr>
         <p:spPr>
           <a:xfrm>
-            <a:off x="1005840" y="2953512"/>
+            <a:off x="1005840" y="3017520"/>
             <a:ext cx="4572000" cy="228600"/>
           </a:xfrm>
           <a:prstGeom prst="rect">
@@ -33041,7 +33037,7 @@
           <a:lstStyle/>
           <a:p>
             <a:pPr algn="l">
-              <a:defRPr sz="1100" b="1">
+              <a:defRPr sz="1000" b="1">
                 <a:solidFill>
                   <a:srgbClr val="54A0FF"/>
                 </a:solidFill>
@@ -33062,22 +33058,22 @@
         </p:nvSpPr>
         <p:spPr>
           <a:xfrm>
-            <a:off x="1005840" y="3209544"/>
-            <a:ext cx="4572000" cy="502920"/>
-          </a:xfrm>
-          <a:prstGeom prst="rect">
-            <a:avLst/>
-          </a:prstGeom>
-          <a:noFill/>
-        </p:spPr>
-        <p:txBody>
-          <a:bodyPr wrap="square">
-            <a:spAutoFit/>
-          </a:bodyPr>
-          <a:lstStyle/>
-          <a:p>
-            <a:pPr algn="l">
-              <a:defRPr sz="1000" b="0">
+            <a:off x="1005840" y="3273552"/>
+            <a:ext cx="4572000" cy="548640"/>
+          </a:xfrm>
+          <a:prstGeom prst="rect">
+            <a:avLst/>
+          </a:prstGeom>
+          <a:noFill/>
+        </p:spPr>
+        <p:txBody>
+          <a:bodyPr wrap="square">
+            <a:spAutoFit/>
+          </a:bodyPr>
+          <a:lstStyle/>
+          <a:p>
+            <a:pPr algn="l">
+              <a:defRPr sz="900" b="0">
                 <a:solidFill>
                   <a:srgbClr val="8FA89C"/>
                 </a:solidFill>
@@ -33098,7 +33094,7 @@
         </p:nvSpPr>
         <p:spPr>
           <a:xfrm>
-            <a:off x="1005840" y="3666744"/>
+            <a:off x="1005840" y="3794760"/>
             <a:ext cx="4572000" cy="228600"/>
           </a:xfrm>
           <a:prstGeom prst="rect">
@@ -33113,7 +33109,7 @@
           <a:lstStyle/>
           <a:p>
             <a:pPr algn="l">
-              <a:defRPr sz="1100" b="1">
+              <a:defRPr sz="1000" b="1">
                 <a:solidFill>
                   <a:srgbClr val="FF9F43"/>
                 </a:solidFill>
@@ -33134,22 +33130,22 @@
         </p:nvSpPr>
         <p:spPr>
           <a:xfrm>
-            <a:off x="1005840" y="3922776"/>
-            <a:ext cx="4572000" cy="502920"/>
-          </a:xfrm>
-          <a:prstGeom prst="rect">
-            <a:avLst/>
-          </a:prstGeom>
-          <a:noFill/>
-        </p:spPr>
-        <p:txBody>
-          <a:bodyPr wrap="square">
-            <a:spAutoFit/>
-          </a:bodyPr>
-          <a:lstStyle/>
-          <a:p>
-            <a:pPr algn="l">
-              <a:defRPr sz="1000" b="0">
+            <a:off x="1005840" y="4050792"/>
+            <a:ext cx="4572000" cy="548640"/>
+          </a:xfrm>
+          <a:prstGeom prst="rect">
+            <a:avLst/>
+          </a:prstGeom>
+          <a:noFill/>
+        </p:spPr>
+        <p:txBody>
+          <a:bodyPr wrap="square">
+            <a:spAutoFit/>
+          </a:bodyPr>
+          <a:lstStyle/>
+          <a:p>
+            <a:pPr algn="l">
+              <a:defRPr sz="900" b="0">
                 <a:solidFill>
                   <a:srgbClr val="8FA89C"/>
                 </a:solidFill>
@@ -33170,7 +33166,7 @@
         </p:nvSpPr>
         <p:spPr>
           <a:xfrm>
-            <a:off x="1005840" y="4379976"/>
+            <a:off x="1005840" y="4572000"/>
             <a:ext cx="4572000" cy="228600"/>
           </a:xfrm>
           <a:prstGeom prst="rect">
@@ -33185,7 +33181,7 @@
           <a:lstStyle/>
           <a:p>
             <a:pPr algn="l">
-              <a:defRPr sz="1100" b="1">
+              <a:defRPr sz="1000" b="1">
                 <a:solidFill>
                   <a:srgbClr val="FF6B6B"/>
                 </a:solidFill>
@@ -33206,22 +33202,22 @@
         </p:nvSpPr>
         <p:spPr>
           <a:xfrm>
-            <a:off x="1005840" y="4636008"/>
-            <a:ext cx="4572000" cy="502920"/>
-          </a:xfrm>
-          <a:prstGeom prst="rect">
-            <a:avLst/>
-          </a:prstGeom>
-          <a:noFill/>
-        </p:spPr>
-        <p:txBody>
-          <a:bodyPr wrap="square">
-            <a:spAutoFit/>
-          </a:bodyPr>
-          <a:lstStyle/>
-          <a:p>
-            <a:pPr algn="l">
-              <a:defRPr sz="1000" b="0">
+            <a:off x="1005840" y="4828032"/>
+            <a:ext cx="4572000" cy="548640"/>
+          </a:xfrm>
+          <a:prstGeom prst="rect">
+            <a:avLst/>
+          </a:prstGeom>
+          <a:noFill/>
+        </p:spPr>
+        <p:txBody>
+          <a:bodyPr wrap="square">
+            <a:spAutoFit/>
+          </a:bodyPr>
+          <a:lstStyle/>
+          <a:p>
+            <a:pPr algn="l">
+              <a:defRPr sz="900" b="0">
                 <a:solidFill>
                   <a:srgbClr val="8FA89C"/>
                 </a:solidFill>
@@ -33340,7 +33336,7 @@
           <a:lstStyle/>
           <a:p>
             <a:pPr algn="l">
-              <a:defRPr sz="1100" b="1">
+              <a:defRPr sz="1000" b="1">
                 <a:solidFill>
                   <a:srgbClr val="54A0FF"/>
                 </a:solidFill>
@@ -33362,21 +33358,21 @@
         <p:spPr>
           <a:xfrm>
             <a:off x="6217920" y="2496312"/>
-            <a:ext cx="4754880" cy="502920"/>
-          </a:xfrm>
-          <a:prstGeom prst="rect">
-            <a:avLst/>
-          </a:prstGeom>
-          <a:noFill/>
-        </p:spPr>
-        <p:txBody>
-          <a:bodyPr wrap="square">
-            <a:spAutoFit/>
-          </a:bodyPr>
-          <a:lstStyle/>
-          <a:p>
-            <a:pPr algn="l">
-              <a:defRPr sz="1000" b="0">
+            <a:ext cx="4754880" cy="548640"/>
+          </a:xfrm>
+          <a:prstGeom prst="rect">
+            <a:avLst/>
+          </a:prstGeom>
+          <a:noFill/>
+        </p:spPr>
+        <p:txBody>
+          <a:bodyPr wrap="square">
+            <a:spAutoFit/>
+          </a:bodyPr>
+          <a:lstStyle/>
+          <a:p>
+            <a:pPr algn="l">
+              <a:defRPr sz="900" b="0">
                 <a:solidFill>
                   <a:srgbClr val="8FA89C"/>
                 </a:solidFill>
@@ -33397,7 +33393,7 @@
         </p:nvSpPr>
         <p:spPr>
           <a:xfrm>
-            <a:off x="6217920" y="2953512"/>
+            <a:off x="6217920" y="3017520"/>
             <a:ext cx="4754880" cy="228600"/>
           </a:xfrm>
           <a:prstGeom prst="rect">
@@ -33412,7 +33408,7 @@
           <a:lstStyle/>
           <a:p>
             <a:pPr algn="l">
-              <a:defRPr sz="1100" b="1">
+              <a:defRPr sz="1000" b="1">
                 <a:solidFill>
                   <a:srgbClr val="00C978"/>
                 </a:solidFill>
@@ -33433,22 +33429,22 @@
         </p:nvSpPr>
         <p:spPr>
           <a:xfrm>
-            <a:off x="6217920" y="3209544"/>
-            <a:ext cx="4754880" cy="502920"/>
-          </a:xfrm>
-          <a:prstGeom prst="rect">
-            <a:avLst/>
-          </a:prstGeom>
-          <a:noFill/>
-        </p:spPr>
-        <p:txBody>
-          <a:bodyPr wrap="square">
-            <a:spAutoFit/>
-          </a:bodyPr>
-          <a:lstStyle/>
-          <a:p>
-            <a:pPr algn="l">
-              <a:defRPr sz="1000" b="0">
+            <a:off x="6217920" y="3273552"/>
+            <a:ext cx="4754880" cy="548640"/>
+          </a:xfrm>
+          <a:prstGeom prst="rect">
+            <a:avLst/>
+          </a:prstGeom>
+          <a:noFill/>
+        </p:spPr>
+        <p:txBody>
+          <a:bodyPr wrap="square">
+            <a:spAutoFit/>
+          </a:bodyPr>
+          <a:lstStyle/>
+          <a:p>
+            <a:pPr algn="l">
+              <a:defRPr sz="900" b="0">
                 <a:solidFill>
                   <a:srgbClr val="8FA89C"/>
                 </a:solidFill>
@@ -33469,7 +33465,7 @@
         </p:nvSpPr>
         <p:spPr>
           <a:xfrm>
-            <a:off x="6217920" y="3666744"/>
+            <a:off x="6217920" y="3794760"/>
             <a:ext cx="4754880" cy="228600"/>
           </a:xfrm>
           <a:prstGeom prst="rect">
@@ -33484,7 +33480,7 @@
           <a:lstStyle/>
           <a:p>
             <a:pPr algn="l">
-              <a:defRPr sz="1100" b="1">
+              <a:defRPr sz="1000" b="1">
                 <a:solidFill>
                   <a:srgbClr val="FF9F43"/>
                 </a:solidFill>
@@ -33505,22 +33501,22 @@
         </p:nvSpPr>
         <p:spPr>
           <a:xfrm>
-            <a:off x="6217920" y="3922776"/>
-            <a:ext cx="4754880" cy="502920"/>
-          </a:xfrm>
-          <a:prstGeom prst="rect">
-            <a:avLst/>
-          </a:prstGeom>
-          <a:noFill/>
-        </p:spPr>
-        <p:txBody>
-          <a:bodyPr wrap="square">
-            <a:spAutoFit/>
-          </a:bodyPr>
-          <a:lstStyle/>
-          <a:p>
-            <a:pPr algn="l">
-              <a:defRPr sz="1000" b="0">
+            <a:off x="6217920" y="4050792"/>
+            <a:ext cx="4754880" cy="548640"/>
+          </a:xfrm>
+          <a:prstGeom prst="rect">
+            <a:avLst/>
+          </a:prstGeom>
+          <a:noFill/>
+        </p:spPr>
+        <p:txBody>
+          <a:bodyPr wrap="square">
+            <a:spAutoFit/>
+          </a:bodyPr>
+          <a:lstStyle/>
+          <a:p>
+            <a:pPr algn="l">
+              <a:defRPr sz="900" b="0">
                 <a:solidFill>
                   <a:srgbClr val="8FA89C"/>
                 </a:solidFill>
@@ -33541,7 +33537,7 @@
         </p:nvSpPr>
         <p:spPr>
           <a:xfrm>
-            <a:off x="6217920" y="4379976"/>
+            <a:off x="6217920" y="4572000"/>
             <a:ext cx="4754880" cy="228600"/>
           </a:xfrm>
           <a:prstGeom prst="rect">
@@ -33556,7 +33552,7 @@
           <a:lstStyle/>
           <a:p>
             <a:pPr algn="l">
-              <a:defRPr sz="1100" b="1">
+              <a:defRPr sz="1000" b="1">
                 <a:solidFill>
                   <a:srgbClr val="FF6B6B"/>
                 </a:solidFill>
@@ -33577,22 +33573,22 @@
         </p:nvSpPr>
         <p:spPr>
           <a:xfrm>
-            <a:off x="6217920" y="4636008"/>
-            <a:ext cx="4754880" cy="502920"/>
-          </a:xfrm>
-          <a:prstGeom prst="rect">
-            <a:avLst/>
-          </a:prstGeom>
-          <a:noFill/>
-        </p:spPr>
-        <p:txBody>
-          <a:bodyPr wrap="square">
-            <a:spAutoFit/>
-          </a:bodyPr>
-          <a:lstStyle/>
-          <a:p>
-            <a:pPr algn="l">
-              <a:defRPr sz="1000" b="0">
+            <a:off x="6217920" y="4828032"/>
+            <a:ext cx="4754880" cy="548640"/>
+          </a:xfrm>
+          <a:prstGeom prst="rect">
+            <a:avLst/>
+          </a:prstGeom>
+          <a:noFill/>
+        </p:spPr>
+        <p:txBody>
+          <a:bodyPr wrap="square">
+            <a:spAutoFit/>
+          </a:bodyPr>
+          <a:lstStyle/>
+          <a:p>
+            <a:pPr algn="l">
+              <a:defRPr sz="900" b="0">
                 <a:solidFill>
                   <a:srgbClr val="8FA89C"/>
                 </a:solidFill>
@@ -33748,7 +33744,7 @@
         <p:spPr>
           <a:xfrm>
             <a:off x="731520" y="914400"/>
-            <a:ext cx="9144000" cy="1097280"/>
+            <a:ext cx="9144000" cy="594360"/>
           </a:xfrm>
           <a:prstGeom prst="rect">
             <a:avLst/>
@@ -33784,7 +33780,7 @@
         <p:spPr>
           <a:xfrm>
             <a:off x="731520" y="1554480"/>
-            <a:ext cx="7315200" cy="2743200"/>
+            <a:ext cx="7315200" cy="365760"/>
           </a:xfrm>
           <a:prstGeom prst="rect">
             <a:avLst/>
@@ -35142,7 +35138,7 @@
           <a:lstStyle/>
           <a:p>
             <a:pPr algn="l">
-              <a:defRPr sz="900" b="0">
+              <a:defRPr sz="800" b="0">
                 <a:solidFill>
                   <a:srgbClr val="5A7268"/>
                 </a:solidFill>
@@ -35178,7 +35174,7 @@
           <a:lstStyle/>
           <a:p>
             <a:pPr algn="l">
-              <a:defRPr sz="900" b="0">
+              <a:defRPr sz="800" b="0">
                 <a:solidFill>
                   <a:srgbClr val="E8F0EC"/>
                 </a:solidFill>
@@ -35199,7 +35195,7 @@
         </p:nvSpPr>
         <p:spPr>
           <a:xfrm>
-            <a:off x="7132320" y="5120640"/>
+            <a:off x="7132320" y="5166360"/>
             <a:ext cx="1371600" cy="228600"/>
           </a:xfrm>
           <a:prstGeom prst="rect">
@@ -35214,7 +35210,7 @@
           <a:lstStyle/>
           <a:p>
             <a:pPr algn="l">
-              <a:defRPr sz="900" b="0">
+              <a:defRPr sz="800" b="0">
                 <a:solidFill>
                   <a:srgbClr val="5A7268"/>
                 </a:solidFill>
@@ -35235,7 +35231,7 @@
         </p:nvSpPr>
         <p:spPr>
           <a:xfrm>
-            <a:off x="8503920" y="5120640"/>
+            <a:off x="8503920" y="5166360"/>
             <a:ext cx="2743200" cy="228600"/>
           </a:xfrm>
           <a:prstGeom prst="rect">
@@ -35250,7 +35246,7 @@
           <a:lstStyle/>
           <a:p>
             <a:pPr algn="l">
-              <a:defRPr sz="900" b="0">
+              <a:defRPr sz="800" b="0">
                 <a:solidFill>
                   <a:srgbClr val="E8F0EC"/>
                 </a:solidFill>
@@ -35271,7 +35267,7 @@
         </p:nvSpPr>
         <p:spPr>
           <a:xfrm>
-            <a:off x="7132320" y="5394960"/>
+            <a:off x="7132320" y="5486400"/>
             <a:ext cx="1371600" cy="228600"/>
           </a:xfrm>
           <a:prstGeom prst="rect">
@@ -35286,7 +35282,7 @@
           <a:lstStyle/>
           <a:p>
             <a:pPr algn="l">
-              <a:defRPr sz="900" b="0">
+              <a:defRPr sz="800" b="0">
                 <a:solidFill>
                   <a:srgbClr val="5A7268"/>
                 </a:solidFill>
@@ -35307,7 +35303,7 @@
         </p:nvSpPr>
         <p:spPr>
           <a:xfrm>
-            <a:off x="8503920" y="5394960"/>
+            <a:off x="8503920" y="5486400"/>
             <a:ext cx="2743200" cy="228600"/>
           </a:xfrm>
           <a:prstGeom prst="rect">
@@ -35322,7 +35318,7 @@
           <a:lstStyle/>
           <a:p>
             <a:pPr algn="l">
-              <a:defRPr sz="900" b="0">
+              <a:defRPr sz="800" b="0">
                 <a:solidFill>
                   <a:srgbClr val="E8F0EC"/>
                 </a:solidFill>
@@ -35343,7 +35339,7 @@
         </p:nvSpPr>
         <p:spPr>
           <a:xfrm>
-            <a:off x="7132320" y="5669280"/>
+            <a:off x="7132320" y="5806440"/>
             <a:ext cx="1371600" cy="228600"/>
           </a:xfrm>
           <a:prstGeom prst="rect">
@@ -35358,7 +35354,7 @@
           <a:lstStyle/>
           <a:p>
             <a:pPr algn="l">
-              <a:defRPr sz="900" b="0">
+              <a:defRPr sz="800" b="0">
                 <a:solidFill>
                   <a:srgbClr val="5A7268"/>
                 </a:solidFill>
@@ -35379,7 +35375,7 @@
         </p:nvSpPr>
         <p:spPr>
           <a:xfrm>
-            <a:off x="8503920" y="5669280"/>
+            <a:off x="8503920" y="5806440"/>
             <a:ext cx="2743200" cy="228600"/>
           </a:xfrm>
           <a:prstGeom prst="rect">
@@ -35394,7 +35390,7 @@
           <a:lstStyle/>
           <a:p>
             <a:pPr algn="l">
-              <a:defRPr sz="900" b="0">
+              <a:defRPr sz="800" b="0">
                 <a:solidFill>
                   <a:srgbClr val="E8F0EC"/>
                 </a:solidFill>
@@ -37322,21 +37318,21 @@
         <p:spPr>
           <a:xfrm>
             <a:off x="914400" y="2606040"/>
-            <a:ext cx="2148840" cy="685800"/>
-          </a:xfrm>
-          <a:prstGeom prst="rect">
-            <a:avLst/>
-          </a:prstGeom>
-          <a:noFill/>
-        </p:spPr>
-        <p:txBody>
-          <a:bodyPr wrap="square">
-            <a:spAutoFit/>
-          </a:bodyPr>
-          <a:lstStyle/>
-          <a:p>
-            <a:pPr algn="l">
-              <a:defRPr sz="1000" b="0">
+            <a:ext cx="2148840" cy="777240"/>
+          </a:xfrm>
+          <a:prstGeom prst="rect">
+            <a:avLst/>
+          </a:prstGeom>
+          <a:noFill/>
+        </p:spPr>
+        <p:txBody>
+          <a:bodyPr wrap="square">
+            <a:spAutoFit/>
+          </a:bodyPr>
+          <a:lstStyle/>
+          <a:p>
+            <a:pPr algn="l">
+              <a:defRPr sz="900" b="0">
                 <a:solidFill>
                   <a:srgbClr val="8FA89C"/>
                 </a:solidFill>
@@ -37357,22 +37353,22 @@
         </p:nvSpPr>
         <p:spPr>
           <a:xfrm>
-            <a:off x="914400" y="3200400"/>
-            <a:ext cx="2148840" cy="685800"/>
-          </a:xfrm>
-          <a:prstGeom prst="rect">
-            <a:avLst/>
-          </a:prstGeom>
-          <a:noFill/>
-        </p:spPr>
-        <p:txBody>
-          <a:bodyPr wrap="square">
-            <a:spAutoFit/>
-          </a:bodyPr>
-          <a:lstStyle/>
-          <a:p>
-            <a:pPr algn="l">
-              <a:defRPr sz="1000" b="0">
+            <a:off x="914400" y="3291840"/>
+            <a:ext cx="2148840" cy="777240"/>
+          </a:xfrm>
+          <a:prstGeom prst="rect">
+            <a:avLst/>
+          </a:prstGeom>
+          <a:noFill/>
+        </p:spPr>
+        <p:txBody>
+          <a:bodyPr wrap="square">
+            <a:spAutoFit/>
+          </a:bodyPr>
+          <a:lstStyle/>
+          <a:p>
+            <a:pPr algn="l">
+              <a:defRPr sz="900" b="0">
                 <a:solidFill>
                   <a:srgbClr val="8FA89C"/>
                 </a:solidFill>
@@ -37393,22 +37389,22 @@
         </p:nvSpPr>
         <p:spPr>
           <a:xfrm>
-            <a:off x="914400" y="3794760"/>
-            <a:ext cx="2148840" cy="685800"/>
-          </a:xfrm>
-          <a:prstGeom prst="rect">
-            <a:avLst/>
-          </a:prstGeom>
-          <a:noFill/>
-        </p:spPr>
-        <p:txBody>
-          <a:bodyPr wrap="square">
-            <a:spAutoFit/>
-          </a:bodyPr>
-          <a:lstStyle/>
-          <a:p>
-            <a:pPr algn="l">
-              <a:defRPr sz="1000" b="0">
+            <a:off x="914400" y="3977640"/>
+            <a:ext cx="2148840" cy="777240"/>
+          </a:xfrm>
+          <a:prstGeom prst="rect">
+            <a:avLst/>
+          </a:prstGeom>
+          <a:noFill/>
+        </p:spPr>
+        <p:txBody>
+          <a:bodyPr wrap="square">
+            <a:spAutoFit/>
+          </a:bodyPr>
+          <a:lstStyle/>
+          <a:p>
+            <a:pPr algn="l">
+              <a:defRPr sz="900" b="0">
                 <a:solidFill>
                   <a:srgbClr val="8FA89C"/>
                 </a:solidFill>
@@ -37429,22 +37425,22 @@
         </p:nvSpPr>
         <p:spPr>
           <a:xfrm>
-            <a:off x="914400" y="4297680"/>
-            <a:ext cx="2148840" cy="685800"/>
-          </a:xfrm>
-          <a:prstGeom prst="rect">
-            <a:avLst/>
-          </a:prstGeom>
-          <a:noFill/>
-        </p:spPr>
-        <p:txBody>
-          <a:bodyPr wrap="square">
-            <a:spAutoFit/>
-          </a:bodyPr>
-          <a:lstStyle/>
-          <a:p>
-            <a:pPr algn="l">
-              <a:defRPr sz="1000" b="0">
+            <a:off x="914400" y="4572000"/>
+            <a:ext cx="2148840" cy="777240"/>
+          </a:xfrm>
+          <a:prstGeom prst="rect">
+            <a:avLst/>
+          </a:prstGeom>
+          <a:noFill/>
+        </p:spPr>
+        <p:txBody>
+          <a:bodyPr wrap="square">
+            <a:spAutoFit/>
+          </a:bodyPr>
+          <a:lstStyle/>
+          <a:p>
+            <a:pPr algn="l">
+              <a:defRPr sz="900" b="0">
                 <a:solidFill>
                   <a:srgbClr val="8FA89C"/>
                 </a:solidFill>
@@ -37549,21 +37545,21 @@
         <p:spPr>
           <a:xfrm>
             <a:off x="3520440" y="2606040"/>
-            <a:ext cx="2148840" cy="685800"/>
-          </a:xfrm>
-          <a:prstGeom prst="rect">
-            <a:avLst/>
-          </a:prstGeom>
-          <a:noFill/>
-        </p:spPr>
-        <p:txBody>
-          <a:bodyPr wrap="square">
-            <a:spAutoFit/>
-          </a:bodyPr>
-          <a:lstStyle/>
-          <a:p>
-            <a:pPr algn="l">
-              <a:defRPr sz="1000" b="0">
+            <a:ext cx="2148840" cy="777240"/>
+          </a:xfrm>
+          <a:prstGeom prst="rect">
+            <a:avLst/>
+          </a:prstGeom>
+          <a:noFill/>
+        </p:spPr>
+        <p:txBody>
+          <a:bodyPr wrap="square">
+            <a:spAutoFit/>
+          </a:bodyPr>
+          <a:lstStyle/>
+          <a:p>
+            <a:pPr algn="l">
+              <a:defRPr sz="900" b="0">
                 <a:solidFill>
                   <a:srgbClr val="8FA89C"/>
                 </a:solidFill>
@@ -37584,22 +37580,22 @@
         </p:nvSpPr>
         <p:spPr>
           <a:xfrm>
-            <a:off x="3520440" y="3108960"/>
-            <a:ext cx="2148840" cy="685800"/>
-          </a:xfrm>
-          <a:prstGeom prst="rect">
-            <a:avLst/>
-          </a:prstGeom>
-          <a:noFill/>
-        </p:spPr>
-        <p:txBody>
-          <a:bodyPr wrap="square">
-            <a:spAutoFit/>
-          </a:bodyPr>
-          <a:lstStyle/>
-          <a:p>
-            <a:pPr algn="l">
-              <a:defRPr sz="1000" b="0">
+            <a:off x="3520440" y="3200400"/>
+            <a:ext cx="2148840" cy="777240"/>
+          </a:xfrm>
+          <a:prstGeom prst="rect">
+            <a:avLst/>
+          </a:prstGeom>
+          <a:noFill/>
+        </p:spPr>
+        <p:txBody>
+          <a:bodyPr wrap="square">
+            <a:spAutoFit/>
+          </a:bodyPr>
+          <a:lstStyle/>
+          <a:p>
+            <a:pPr algn="l">
+              <a:defRPr sz="900" b="0">
                 <a:solidFill>
                   <a:srgbClr val="8FA89C"/>
                 </a:solidFill>
@@ -37620,22 +37616,22 @@
         </p:nvSpPr>
         <p:spPr>
           <a:xfrm>
-            <a:off x="3520440" y="3703320"/>
-            <a:ext cx="2148840" cy="685800"/>
-          </a:xfrm>
-          <a:prstGeom prst="rect">
-            <a:avLst/>
-          </a:prstGeom>
-          <a:noFill/>
-        </p:spPr>
-        <p:txBody>
-          <a:bodyPr wrap="square">
-            <a:spAutoFit/>
-          </a:bodyPr>
-          <a:lstStyle/>
-          <a:p>
-            <a:pPr algn="l">
-              <a:defRPr sz="1000" b="0">
+            <a:off x="3520440" y="3886200"/>
+            <a:ext cx="2148840" cy="777240"/>
+          </a:xfrm>
+          <a:prstGeom prst="rect">
+            <a:avLst/>
+          </a:prstGeom>
+          <a:noFill/>
+        </p:spPr>
+        <p:txBody>
+          <a:bodyPr wrap="square">
+            <a:spAutoFit/>
+          </a:bodyPr>
+          <a:lstStyle/>
+          <a:p>
+            <a:pPr algn="l">
+              <a:defRPr sz="900" b="0">
                 <a:solidFill>
                   <a:srgbClr val="8FA89C"/>
                 </a:solidFill>
@@ -37656,22 +37652,22 @@
         </p:nvSpPr>
         <p:spPr>
           <a:xfrm>
-            <a:off x="3520440" y="4297680"/>
-            <a:ext cx="2148840" cy="685800"/>
-          </a:xfrm>
-          <a:prstGeom prst="rect">
-            <a:avLst/>
-          </a:prstGeom>
-          <a:noFill/>
-        </p:spPr>
-        <p:txBody>
-          <a:bodyPr wrap="square">
-            <a:spAutoFit/>
-          </a:bodyPr>
-          <a:lstStyle/>
-          <a:p>
-            <a:pPr algn="l">
-              <a:defRPr sz="1000" b="0">
+            <a:off x="3520440" y="4572000"/>
+            <a:ext cx="2148840" cy="777240"/>
+          </a:xfrm>
+          <a:prstGeom prst="rect">
+            <a:avLst/>
+          </a:prstGeom>
+          <a:noFill/>
+        </p:spPr>
+        <p:txBody>
+          <a:bodyPr wrap="square">
+            <a:spAutoFit/>
+          </a:bodyPr>
+          <a:lstStyle/>
+          <a:p>
+            <a:pPr algn="l">
+              <a:defRPr sz="900" b="0">
                 <a:solidFill>
                   <a:srgbClr val="8FA89C"/>
                 </a:solidFill>
@@ -37776,21 +37772,21 @@
         <p:spPr>
           <a:xfrm>
             <a:off x="6126480" y="2606040"/>
-            <a:ext cx="2148840" cy="685800"/>
-          </a:xfrm>
-          <a:prstGeom prst="rect">
-            <a:avLst/>
-          </a:prstGeom>
-          <a:noFill/>
-        </p:spPr>
-        <p:txBody>
-          <a:bodyPr wrap="square">
-            <a:spAutoFit/>
-          </a:bodyPr>
-          <a:lstStyle/>
-          <a:p>
-            <a:pPr algn="l">
-              <a:defRPr sz="1000" b="0">
+            <a:ext cx="2148840" cy="777240"/>
+          </a:xfrm>
+          <a:prstGeom prst="rect">
+            <a:avLst/>
+          </a:prstGeom>
+          <a:noFill/>
+        </p:spPr>
+        <p:txBody>
+          <a:bodyPr wrap="square">
+            <a:spAutoFit/>
+          </a:bodyPr>
+          <a:lstStyle/>
+          <a:p>
+            <a:pPr algn="l">
+              <a:defRPr sz="900" b="0">
                 <a:solidFill>
                   <a:srgbClr val="8FA89C"/>
                 </a:solidFill>
@@ -37811,22 +37807,22 @@
         </p:nvSpPr>
         <p:spPr>
           <a:xfrm>
-            <a:off x="6126480" y="3108960"/>
-            <a:ext cx="2148840" cy="685800"/>
-          </a:xfrm>
-          <a:prstGeom prst="rect">
-            <a:avLst/>
-          </a:prstGeom>
-          <a:noFill/>
-        </p:spPr>
-        <p:txBody>
-          <a:bodyPr wrap="square">
-            <a:spAutoFit/>
-          </a:bodyPr>
-          <a:lstStyle/>
-          <a:p>
-            <a:pPr algn="l">
-              <a:defRPr sz="1000" b="0">
+            <a:off x="6126480" y="3200400"/>
+            <a:ext cx="2148840" cy="777240"/>
+          </a:xfrm>
+          <a:prstGeom prst="rect">
+            <a:avLst/>
+          </a:prstGeom>
+          <a:noFill/>
+        </p:spPr>
+        <p:txBody>
+          <a:bodyPr wrap="square">
+            <a:spAutoFit/>
+          </a:bodyPr>
+          <a:lstStyle/>
+          <a:p>
+            <a:pPr algn="l">
+              <a:defRPr sz="900" b="0">
                 <a:solidFill>
                   <a:srgbClr val="8FA89C"/>
                 </a:solidFill>
@@ -37847,22 +37843,22 @@
         </p:nvSpPr>
         <p:spPr>
           <a:xfrm>
-            <a:off x="6126480" y="3611880"/>
-            <a:ext cx="2148840" cy="685800"/>
-          </a:xfrm>
-          <a:prstGeom prst="rect">
-            <a:avLst/>
-          </a:prstGeom>
-          <a:noFill/>
-        </p:spPr>
-        <p:txBody>
-          <a:bodyPr wrap="square">
-            <a:spAutoFit/>
-          </a:bodyPr>
-          <a:lstStyle/>
-          <a:p>
-            <a:pPr algn="l">
-              <a:defRPr sz="1000" b="0">
+            <a:off x="6126480" y="3794760"/>
+            <a:ext cx="2148840" cy="777240"/>
+          </a:xfrm>
+          <a:prstGeom prst="rect">
+            <a:avLst/>
+          </a:prstGeom>
+          <a:noFill/>
+        </p:spPr>
+        <p:txBody>
+          <a:bodyPr wrap="square">
+            <a:spAutoFit/>
+          </a:bodyPr>
+          <a:lstStyle/>
+          <a:p>
+            <a:pPr algn="l">
+              <a:defRPr sz="900" b="0">
                 <a:solidFill>
                   <a:srgbClr val="8FA89C"/>
                 </a:solidFill>
@@ -37883,22 +37879,22 @@
         </p:nvSpPr>
         <p:spPr>
           <a:xfrm>
-            <a:off x="6126480" y="4206240"/>
-            <a:ext cx="2148840" cy="685800"/>
-          </a:xfrm>
-          <a:prstGeom prst="rect">
-            <a:avLst/>
-          </a:prstGeom>
-          <a:noFill/>
-        </p:spPr>
-        <p:txBody>
-          <a:bodyPr wrap="square">
-            <a:spAutoFit/>
-          </a:bodyPr>
-          <a:lstStyle/>
-          <a:p>
-            <a:pPr algn="l">
-              <a:defRPr sz="1000" b="0">
+            <a:off x="6126480" y="4480560"/>
+            <a:ext cx="2148840" cy="777240"/>
+          </a:xfrm>
+          <a:prstGeom prst="rect">
+            <a:avLst/>
+          </a:prstGeom>
+          <a:noFill/>
+        </p:spPr>
+        <p:txBody>
+          <a:bodyPr wrap="square">
+            <a:spAutoFit/>
+          </a:bodyPr>
+          <a:lstStyle/>
+          <a:p>
+            <a:pPr algn="l">
+              <a:defRPr sz="900" b="0">
                 <a:solidFill>
                   <a:srgbClr val="8FA89C"/>
                 </a:solidFill>
@@ -38003,21 +37999,21 @@
         <p:spPr>
           <a:xfrm>
             <a:off x="8732520" y="2606040"/>
-            <a:ext cx="2148840" cy="685800"/>
-          </a:xfrm>
-          <a:prstGeom prst="rect">
-            <a:avLst/>
-          </a:prstGeom>
-          <a:noFill/>
-        </p:spPr>
-        <p:txBody>
-          <a:bodyPr wrap="square">
-            <a:spAutoFit/>
-          </a:bodyPr>
-          <a:lstStyle/>
-          <a:p>
-            <a:pPr algn="l">
-              <a:defRPr sz="1000" b="0">
+            <a:ext cx="2148840" cy="777240"/>
+          </a:xfrm>
+          <a:prstGeom prst="rect">
+            <a:avLst/>
+          </a:prstGeom>
+          <a:noFill/>
+        </p:spPr>
+        <p:txBody>
+          <a:bodyPr wrap="square">
+            <a:spAutoFit/>
+          </a:bodyPr>
+          <a:lstStyle/>
+          <a:p>
+            <a:pPr algn="l">
+              <a:defRPr sz="900" b="0">
                 <a:solidFill>
                   <a:srgbClr val="8FA89C"/>
                 </a:solidFill>
@@ -38038,22 +38034,22 @@
         </p:nvSpPr>
         <p:spPr>
           <a:xfrm>
-            <a:off x="8732520" y="3200400"/>
-            <a:ext cx="2148840" cy="685800"/>
-          </a:xfrm>
-          <a:prstGeom prst="rect">
-            <a:avLst/>
-          </a:prstGeom>
-          <a:noFill/>
-        </p:spPr>
-        <p:txBody>
-          <a:bodyPr wrap="square">
-            <a:spAutoFit/>
-          </a:bodyPr>
-          <a:lstStyle/>
-          <a:p>
-            <a:pPr algn="l">
-              <a:defRPr sz="1000" b="0">
+            <a:off x="8732520" y="3291840"/>
+            <a:ext cx="2148840" cy="777240"/>
+          </a:xfrm>
+          <a:prstGeom prst="rect">
+            <a:avLst/>
+          </a:prstGeom>
+          <a:noFill/>
+        </p:spPr>
+        <p:txBody>
+          <a:bodyPr wrap="square">
+            <a:spAutoFit/>
+          </a:bodyPr>
+          <a:lstStyle/>
+          <a:p>
+            <a:pPr algn="l">
+              <a:defRPr sz="900" b="0">
                 <a:solidFill>
                   <a:srgbClr val="8FA89C"/>
                 </a:solidFill>
@@ -38074,22 +38070,22 @@
         </p:nvSpPr>
         <p:spPr>
           <a:xfrm>
-            <a:off x="8732520" y="3703320"/>
-            <a:ext cx="2148840" cy="685800"/>
-          </a:xfrm>
-          <a:prstGeom prst="rect">
-            <a:avLst/>
-          </a:prstGeom>
-          <a:noFill/>
-        </p:spPr>
-        <p:txBody>
-          <a:bodyPr wrap="square">
-            <a:spAutoFit/>
-          </a:bodyPr>
-          <a:lstStyle/>
-          <a:p>
-            <a:pPr algn="l">
-              <a:defRPr sz="1000" b="0">
+            <a:off x="8732520" y="3886200"/>
+            <a:ext cx="2148840" cy="777240"/>
+          </a:xfrm>
+          <a:prstGeom prst="rect">
+            <a:avLst/>
+          </a:prstGeom>
+          <a:noFill/>
+        </p:spPr>
+        <p:txBody>
+          <a:bodyPr wrap="square">
+            <a:spAutoFit/>
+          </a:bodyPr>
+          <a:lstStyle/>
+          <a:p>
+            <a:pPr algn="l">
+              <a:defRPr sz="900" b="0">
                 <a:solidFill>
                   <a:srgbClr val="8FA89C"/>
                 </a:solidFill>
@@ -38110,22 +38106,22 @@
         </p:nvSpPr>
         <p:spPr>
           <a:xfrm>
-            <a:off x="8732520" y="4297680"/>
-            <a:ext cx="2148840" cy="685800"/>
-          </a:xfrm>
-          <a:prstGeom prst="rect">
-            <a:avLst/>
-          </a:prstGeom>
-          <a:noFill/>
-        </p:spPr>
-        <p:txBody>
-          <a:bodyPr wrap="square">
-            <a:spAutoFit/>
-          </a:bodyPr>
-          <a:lstStyle/>
-          <a:p>
-            <a:pPr algn="l">
-              <a:defRPr sz="1000" b="0">
+            <a:off x="8732520" y="4572000"/>
+            <a:ext cx="2148840" cy="777240"/>
+          </a:xfrm>
+          <a:prstGeom prst="rect">
+            <a:avLst/>
+          </a:prstGeom>
+          <a:noFill/>
+        </p:spPr>
+        <p:txBody>
+          <a:bodyPr wrap="square">
+            <a:spAutoFit/>
+          </a:bodyPr>
+          <a:lstStyle/>
+          <a:p>
+            <a:pPr algn="l">
+              <a:defRPr sz="900" b="0">
                 <a:solidFill>
                   <a:srgbClr val="8FA89C"/>
                 </a:solidFill>
@@ -38400,7 +38396,7 @@
         <p:spPr>
           <a:xfrm>
             <a:off x="731520" y="914400"/>
-            <a:ext cx="9144000" cy="1097280"/>
+            <a:ext cx="9144000" cy="594360"/>
           </a:xfrm>
           <a:prstGeom prst="rect">
             <a:avLst/>
@@ -38436,7 +38432,7 @@
         <p:spPr>
           <a:xfrm>
             <a:off x="731520" y="1554480"/>
-            <a:ext cx="9144000" cy="2743200"/>
+            <a:ext cx="9144000" cy="493776"/>
           </a:xfrm>
           <a:prstGeom prst="rect">
             <a:avLst/>
@@ -38476,7 +38472,7 @@
         <p:spPr>
           <a:xfrm>
             <a:off x="731520" y="2468880"/>
-            <a:ext cx="3291840" cy="1554480"/>
+            <a:ext cx="3291840" cy="1645920"/>
           </a:xfrm>
           <a:prstGeom prst="roundRect">
             <a:avLst>
@@ -38522,7 +38518,7 @@
         </p:nvSpPr>
         <p:spPr>
           <a:xfrm>
-            <a:off x="960120" y="2606040"/>
+            <a:off x="960120" y="2578608"/>
             <a:ext cx="2834640" cy="457200"/>
           </a:xfrm>
           <a:prstGeom prst="rect">
@@ -38537,7 +38533,7 @@
           <a:lstStyle/>
           <a:p>
             <a:pPr algn="l">
-              <a:defRPr sz="3600" b="1">
+              <a:defRPr sz="3200" b="1">
                 <a:solidFill>
                   <a:srgbClr val="00C978"/>
                 </a:solidFill>
@@ -38558,7 +38554,7 @@
         </p:nvSpPr>
         <p:spPr>
           <a:xfrm>
-            <a:off x="960120" y="3108960"/>
+            <a:off x="960120" y="3063240"/>
             <a:ext cx="2834640" cy="228600"/>
           </a:xfrm>
           <a:prstGeom prst="rect">
@@ -38573,7 +38569,7 @@
           <a:lstStyle/>
           <a:p>
             <a:pPr algn="l">
-              <a:defRPr sz="900" b="1">
+              <a:defRPr sz="800" b="1">
                 <a:solidFill>
                   <a:srgbClr val="5A7268"/>
                 </a:solidFill>
@@ -38594,22 +38590,22 @@
         </p:nvSpPr>
         <p:spPr>
           <a:xfrm>
-            <a:off x="960120" y="3383280"/>
-            <a:ext cx="2834640" cy="548640"/>
-          </a:xfrm>
-          <a:prstGeom prst="rect">
-            <a:avLst/>
-          </a:prstGeom>
-          <a:noFill/>
-        </p:spPr>
-        <p:txBody>
-          <a:bodyPr wrap="square">
-            <a:spAutoFit/>
-          </a:bodyPr>
-          <a:lstStyle/>
-          <a:p>
-            <a:pPr algn="l">
-              <a:defRPr sz="1000" b="0">
+            <a:off x="960120" y="3337560"/>
+            <a:ext cx="2834640" cy="685800"/>
+          </a:xfrm>
+          <a:prstGeom prst="rect">
+            <a:avLst/>
+          </a:prstGeom>
+          <a:noFill/>
+        </p:spPr>
+        <p:txBody>
+          <a:bodyPr wrap="square">
+            <a:spAutoFit/>
+          </a:bodyPr>
+          <a:lstStyle/>
+          <a:p>
+            <a:pPr algn="l">
+              <a:defRPr sz="900" b="0">
                 <a:solidFill>
                   <a:srgbClr val="8FA89C"/>
                 </a:solidFill>
@@ -38631,7 +38627,7 @@
         <p:spPr>
           <a:xfrm>
             <a:off x="4206240" y="2468880"/>
-            <a:ext cx="3291840" cy="1554480"/>
+            <a:ext cx="3291840" cy="1645920"/>
           </a:xfrm>
           <a:prstGeom prst="roundRect">
             <a:avLst>
@@ -38677,7 +38673,7 @@
         </p:nvSpPr>
         <p:spPr>
           <a:xfrm>
-            <a:off x="4434840" y="2606040"/>
+            <a:off x="4434840" y="2578608"/>
             <a:ext cx="2834640" cy="457200"/>
           </a:xfrm>
           <a:prstGeom prst="rect">
@@ -38692,7 +38688,7 @@
           <a:lstStyle/>
           <a:p>
             <a:pPr algn="l">
-              <a:defRPr sz="3600" b="1">
+              <a:defRPr sz="3200" b="1">
                 <a:solidFill>
                   <a:srgbClr val="FF9F43"/>
                 </a:solidFill>
@@ -38713,7 +38709,7 @@
         </p:nvSpPr>
         <p:spPr>
           <a:xfrm>
-            <a:off x="4434840" y="3108960"/>
+            <a:off x="4434840" y="3063240"/>
             <a:ext cx="2834640" cy="228600"/>
           </a:xfrm>
           <a:prstGeom prst="rect">
@@ -38728,7 +38724,7 @@
           <a:lstStyle/>
           <a:p>
             <a:pPr algn="l">
-              <a:defRPr sz="900" b="1">
+              <a:defRPr sz="800" b="1">
                 <a:solidFill>
                   <a:srgbClr val="5A7268"/>
                 </a:solidFill>
@@ -38749,22 +38745,22 @@
         </p:nvSpPr>
         <p:spPr>
           <a:xfrm>
-            <a:off x="4434840" y="3383280"/>
-            <a:ext cx="2834640" cy="548640"/>
-          </a:xfrm>
-          <a:prstGeom prst="rect">
-            <a:avLst/>
-          </a:prstGeom>
-          <a:noFill/>
-        </p:spPr>
-        <p:txBody>
-          <a:bodyPr wrap="square">
-            <a:spAutoFit/>
-          </a:bodyPr>
-          <a:lstStyle/>
-          <a:p>
-            <a:pPr algn="l">
-              <a:defRPr sz="1000" b="0">
+            <a:off x="4434840" y="3337560"/>
+            <a:ext cx="2834640" cy="685800"/>
+          </a:xfrm>
+          <a:prstGeom prst="rect">
+            <a:avLst/>
+          </a:prstGeom>
+          <a:noFill/>
+        </p:spPr>
+        <p:txBody>
+          <a:bodyPr wrap="square">
+            <a:spAutoFit/>
+          </a:bodyPr>
+          <a:lstStyle/>
+          <a:p>
+            <a:pPr algn="l">
+              <a:defRPr sz="900" b="0">
                 <a:solidFill>
                   <a:srgbClr val="8FA89C"/>
                 </a:solidFill>
@@ -38786,7 +38782,7 @@
         <p:spPr>
           <a:xfrm>
             <a:off x="7680960" y="2468880"/>
-            <a:ext cx="3566160" cy="1554480"/>
+            <a:ext cx="3566160" cy="1645920"/>
           </a:xfrm>
           <a:prstGeom prst="roundRect">
             <a:avLst>
@@ -38832,7 +38828,7 @@
         </p:nvSpPr>
         <p:spPr>
           <a:xfrm>
-            <a:off x="7909560" y="2606040"/>
+            <a:off x="7909560" y="2578608"/>
             <a:ext cx="3108960" cy="457200"/>
           </a:xfrm>
           <a:prstGeom prst="rect">
@@ -38847,7 +38843,7 @@
           <a:lstStyle/>
           <a:p>
             <a:pPr algn="l">
-              <a:defRPr sz="3600" b="1">
+              <a:defRPr sz="3200" b="1">
                 <a:solidFill>
                   <a:srgbClr val="FF6B6B"/>
                 </a:solidFill>
@@ -38868,7 +38864,7 @@
         </p:nvSpPr>
         <p:spPr>
           <a:xfrm>
-            <a:off x="7909560" y="3108960"/>
+            <a:off x="7909560" y="3063240"/>
             <a:ext cx="3108960" cy="228600"/>
           </a:xfrm>
           <a:prstGeom prst="rect">
@@ -38883,7 +38879,7 @@
           <a:lstStyle/>
           <a:p>
             <a:pPr algn="l">
-              <a:defRPr sz="900" b="1">
+              <a:defRPr sz="800" b="1">
                 <a:solidFill>
                   <a:srgbClr val="5A7268"/>
                 </a:solidFill>
@@ -38904,22 +38900,22 @@
         </p:nvSpPr>
         <p:spPr>
           <a:xfrm>
-            <a:off x="7909560" y="3383280"/>
-            <a:ext cx="3108960" cy="548640"/>
-          </a:xfrm>
-          <a:prstGeom prst="rect">
-            <a:avLst/>
-          </a:prstGeom>
-          <a:noFill/>
-        </p:spPr>
-        <p:txBody>
-          <a:bodyPr wrap="square">
-            <a:spAutoFit/>
-          </a:bodyPr>
-          <a:lstStyle/>
-          <a:p>
-            <a:pPr algn="l">
-              <a:defRPr sz="1000" b="0">
+            <a:off x="7909560" y="3337560"/>
+            <a:ext cx="3108960" cy="685800"/>
+          </a:xfrm>
+          <a:prstGeom prst="rect">
+            <a:avLst/>
+          </a:prstGeom>
+          <a:noFill/>
+        </p:spPr>
+        <p:txBody>
+          <a:bodyPr wrap="square">
+            <a:spAutoFit/>
+          </a:bodyPr>
+          <a:lstStyle/>
+          <a:p>
+            <a:pPr algn="l">
+              <a:defRPr sz="900" b="0">
                 <a:solidFill>
                   <a:srgbClr val="8FA89C"/>
                 </a:solidFill>
@@ -39038,7 +39034,7 @@
           <a:lstStyle/>
           <a:p>
             <a:pPr algn="l">
-              <a:defRPr sz="1000" b="1">
+              <a:defRPr sz="900" b="1">
                 <a:solidFill>
                   <a:srgbClr val="00C978"/>
                 </a:solidFill>
@@ -39074,7 +39070,7 @@
           <a:lstStyle/>
           <a:p>
             <a:pPr algn="l">
-              <a:defRPr sz="1000" b="1">
+              <a:defRPr sz="900" b="1">
                 <a:solidFill>
                   <a:srgbClr val="E8F0EC"/>
                 </a:solidFill>
@@ -39096,21 +39092,21 @@
         <p:spPr>
           <a:xfrm>
             <a:off x="1920240" y="4709160"/>
-            <a:ext cx="2377440" cy="594360"/>
-          </a:xfrm>
-          <a:prstGeom prst="rect">
-            <a:avLst/>
-          </a:prstGeom>
-          <a:noFill/>
-        </p:spPr>
-        <p:txBody>
-          <a:bodyPr wrap="square">
-            <a:spAutoFit/>
-          </a:bodyPr>
-          <a:lstStyle/>
-          <a:p>
-            <a:pPr algn="l">
-              <a:defRPr sz="900" b="0">
+            <a:ext cx="2377440" cy="685800"/>
+          </a:xfrm>
+          <a:prstGeom prst="rect">
+            <a:avLst/>
+          </a:prstGeom>
+          <a:noFill/>
+        </p:spPr>
+        <p:txBody>
+          <a:bodyPr wrap="square">
+            <a:spAutoFit/>
+          </a:bodyPr>
+          <a:lstStyle/>
+          <a:p>
+            <a:pPr algn="l">
+              <a:defRPr sz="800" b="0">
                 <a:solidFill>
                   <a:srgbClr val="8FA89C"/>
                 </a:solidFill>
@@ -39146,7 +39142,7 @@
           <a:lstStyle/>
           <a:p>
             <a:pPr algn="l">
-              <a:defRPr sz="1000" b="1">
+              <a:defRPr sz="900" b="1">
                 <a:solidFill>
                   <a:srgbClr val="00C978"/>
                 </a:solidFill>
@@ -39182,7 +39178,7 @@
           <a:lstStyle/>
           <a:p>
             <a:pPr algn="l">
-              <a:defRPr sz="1000" b="1">
+              <a:defRPr sz="900" b="1">
                 <a:solidFill>
                   <a:srgbClr val="E8F0EC"/>
                 </a:solidFill>
@@ -39204,21 +39200,21 @@
         <p:spPr>
           <a:xfrm>
             <a:off x="5349240" y="4709160"/>
-            <a:ext cx="2377440" cy="594360"/>
-          </a:xfrm>
-          <a:prstGeom prst="rect">
-            <a:avLst/>
-          </a:prstGeom>
-          <a:noFill/>
-        </p:spPr>
-        <p:txBody>
-          <a:bodyPr wrap="square">
-            <a:spAutoFit/>
-          </a:bodyPr>
-          <a:lstStyle/>
-          <a:p>
-            <a:pPr algn="l">
-              <a:defRPr sz="900" b="0">
+            <a:ext cx="2377440" cy="685800"/>
+          </a:xfrm>
+          <a:prstGeom prst="rect">
+            <a:avLst/>
+          </a:prstGeom>
+          <a:noFill/>
+        </p:spPr>
+        <p:txBody>
+          <a:bodyPr wrap="square">
+            <a:spAutoFit/>
+          </a:bodyPr>
+          <a:lstStyle/>
+          <a:p>
+            <a:pPr algn="l">
+              <a:defRPr sz="800" b="0">
                 <a:solidFill>
                   <a:srgbClr val="8FA89C"/>
                 </a:solidFill>
@@ -39254,7 +39250,7 @@
           <a:lstStyle/>
           <a:p>
             <a:pPr algn="l">
-              <a:defRPr sz="1000" b="1">
+              <a:defRPr sz="900" b="1">
                 <a:solidFill>
                   <a:srgbClr val="00C978"/>
                 </a:solidFill>
@@ -39290,7 +39286,7 @@
           <a:lstStyle/>
           <a:p>
             <a:pPr algn="l">
-              <a:defRPr sz="1000" b="1">
+              <a:defRPr sz="900" b="1">
                 <a:solidFill>
                   <a:srgbClr val="E8F0EC"/>
                 </a:solidFill>
@@ -39312,21 +39308,21 @@
         <p:spPr>
           <a:xfrm>
             <a:off x="8778240" y="4709160"/>
-            <a:ext cx="2377440" cy="594360"/>
-          </a:xfrm>
-          <a:prstGeom prst="rect">
-            <a:avLst/>
-          </a:prstGeom>
-          <a:noFill/>
-        </p:spPr>
-        <p:txBody>
-          <a:bodyPr wrap="square">
-            <a:spAutoFit/>
-          </a:bodyPr>
-          <a:lstStyle/>
-          <a:p>
-            <a:pPr algn="l">
-              <a:defRPr sz="900" b="0">
+            <a:ext cx="2377440" cy="685800"/>
+          </a:xfrm>
+          <a:prstGeom prst="rect">
+            <a:avLst/>
+          </a:prstGeom>
+          <a:noFill/>
+        </p:spPr>
+        <p:txBody>
+          <a:bodyPr wrap="square">
+            <a:spAutoFit/>
+          </a:bodyPr>
+          <a:lstStyle/>
+          <a:p>
+            <a:pPr algn="l">
+              <a:defRPr sz="800" b="0">
                 <a:solidFill>
                   <a:srgbClr val="8FA89C"/>
                 </a:solidFill>
@@ -39347,7 +39343,7 @@
         </p:nvSpPr>
         <p:spPr>
           <a:xfrm>
-            <a:off x="1005840" y="5440680"/>
+            <a:off x="1005840" y="5486400"/>
             <a:ext cx="457200" cy="228600"/>
           </a:xfrm>
           <a:prstGeom prst="rect">
@@ -39362,7 +39358,7 @@
           <a:lstStyle/>
           <a:p>
             <a:pPr algn="l">
-              <a:defRPr sz="1000" b="1">
+              <a:defRPr sz="900" b="1">
                 <a:solidFill>
                   <a:srgbClr val="00C978"/>
                 </a:solidFill>
@@ -39383,7 +39379,7 @@
         </p:nvSpPr>
         <p:spPr>
           <a:xfrm>
-            <a:off x="1463040" y="5440680"/>
+            <a:off x="1463040" y="5486400"/>
             <a:ext cx="457200" cy="228600"/>
           </a:xfrm>
           <a:prstGeom prst="rect">
@@ -39398,7 +39394,7 @@
           <a:lstStyle/>
           <a:p>
             <a:pPr algn="l">
-              <a:defRPr sz="1000" b="1">
+              <a:defRPr sz="900" b="1">
                 <a:solidFill>
                   <a:srgbClr val="E8F0EC"/>
                 </a:solidFill>
@@ -39419,22 +39415,22 @@
         </p:nvSpPr>
         <p:spPr>
           <a:xfrm>
-            <a:off x="1920240" y="5440680"/>
-            <a:ext cx="2377440" cy="594360"/>
-          </a:xfrm>
-          <a:prstGeom prst="rect">
-            <a:avLst/>
-          </a:prstGeom>
-          <a:noFill/>
-        </p:spPr>
-        <p:txBody>
-          <a:bodyPr wrap="square">
-            <a:spAutoFit/>
-          </a:bodyPr>
-          <a:lstStyle/>
-          <a:p>
-            <a:pPr algn="l">
-              <a:defRPr sz="900" b="0">
+            <a:off x="1920240" y="5486400"/>
+            <a:ext cx="2377440" cy="685800"/>
+          </a:xfrm>
+          <a:prstGeom prst="rect">
+            <a:avLst/>
+          </a:prstGeom>
+          <a:noFill/>
+        </p:spPr>
+        <p:txBody>
+          <a:bodyPr wrap="square">
+            <a:spAutoFit/>
+          </a:bodyPr>
+          <a:lstStyle/>
+          <a:p>
+            <a:pPr algn="l">
+              <a:defRPr sz="800" b="0">
                 <a:solidFill>
                   <a:srgbClr val="8FA89C"/>
                 </a:solidFill>
@@ -39455,7 +39451,7 @@
         </p:nvSpPr>
         <p:spPr>
           <a:xfrm>
-            <a:off x="4434840" y="5440680"/>
+            <a:off x="4434840" y="5486400"/>
             <a:ext cx="457200" cy="228600"/>
           </a:xfrm>
           <a:prstGeom prst="rect">
@@ -39470,7 +39466,7 @@
           <a:lstStyle/>
           <a:p>
             <a:pPr algn="l">
-              <a:defRPr sz="1000" b="1">
+              <a:defRPr sz="900" b="1">
                 <a:solidFill>
                   <a:srgbClr val="00C978"/>
                 </a:solidFill>
@@ -39491,7 +39487,7 @@
         </p:nvSpPr>
         <p:spPr>
           <a:xfrm>
-            <a:off x="4892040" y="5440680"/>
+            <a:off x="4892040" y="5486400"/>
             <a:ext cx="457200" cy="228600"/>
           </a:xfrm>
           <a:prstGeom prst="rect">
@@ -39506,7 +39502,7 @@
           <a:lstStyle/>
           <a:p>
             <a:pPr algn="l">
-              <a:defRPr sz="1000" b="1">
+              <a:defRPr sz="900" b="1">
                 <a:solidFill>
                   <a:srgbClr val="E8F0EC"/>
                 </a:solidFill>
@@ -39527,22 +39523,22 @@
         </p:nvSpPr>
         <p:spPr>
           <a:xfrm>
-            <a:off x="5349240" y="5440680"/>
-            <a:ext cx="2377440" cy="594360"/>
-          </a:xfrm>
-          <a:prstGeom prst="rect">
-            <a:avLst/>
-          </a:prstGeom>
-          <a:noFill/>
-        </p:spPr>
-        <p:txBody>
-          <a:bodyPr wrap="square">
-            <a:spAutoFit/>
-          </a:bodyPr>
-          <a:lstStyle/>
-          <a:p>
-            <a:pPr algn="l">
-              <a:defRPr sz="900" b="0">
+            <a:off x="5349240" y="5486400"/>
+            <a:ext cx="2377440" cy="685800"/>
+          </a:xfrm>
+          <a:prstGeom prst="rect">
+            <a:avLst/>
+          </a:prstGeom>
+          <a:noFill/>
+        </p:spPr>
+        <p:txBody>
+          <a:bodyPr wrap="square">
+            <a:spAutoFit/>
+          </a:bodyPr>
+          <a:lstStyle/>
+          <a:p>
+            <a:pPr algn="l">
+              <a:defRPr sz="800" b="0">
                 <a:solidFill>
                   <a:srgbClr val="8FA89C"/>
                 </a:solidFill>
@@ -39563,7 +39559,7 @@
         </p:nvSpPr>
         <p:spPr>
           <a:xfrm>
-            <a:off x="7863840" y="5440680"/>
+            <a:off x="7863840" y="5486400"/>
             <a:ext cx="457200" cy="228600"/>
           </a:xfrm>
           <a:prstGeom prst="rect">
@@ -39578,7 +39574,7 @@
           <a:lstStyle/>
           <a:p>
             <a:pPr algn="l">
-              <a:defRPr sz="1000" b="1">
+              <a:defRPr sz="900" b="1">
                 <a:solidFill>
                   <a:srgbClr val="00C978"/>
                 </a:solidFill>
@@ -39599,7 +39595,7 @@
         </p:nvSpPr>
         <p:spPr>
           <a:xfrm>
-            <a:off x="8321040" y="5440680"/>
+            <a:off x="8321040" y="5486400"/>
             <a:ext cx="457200" cy="228600"/>
           </a:xfrm>
           <a:prstGeom prst="rect">
@@ -39614,7 +39610,7 @@
           <a:lstStyle/>
           <a:p>
             <a:pPr algn="l">
-              <a:defRPr sz="1000" b="1">
+              <a:defRPr sz="900" b="1">
                 <a:solidFill>
                   <a:srgbClr val="E8F0EC"/>
                 </a:solidFill>
@@ -39635,22 +39631,22 @@
         </p:nvSpPr>
         <p:spPr>
           <a:xfrm>
-            <a:off x="8778240" y="5440680"/>
-            <a:ext cx="2377440" cy="594360"/>
-          </a:xfrm>
-          <a:prstGeom prst="rect">
-            <a:avLst/>
-          </a:prstGeom>
-          <a:noFill/>
-        </p:spPr>
-        <p:txBody>
-          <a:bodyPr wrap="square">
-            <a:spAutoFit/>
-          </a:bodyPr>
-          <a:lstStyle/>
-          <a:p>
-            <a:pPr algn="l">
-              <a:defRPr sz="900" b="0">
+            <a:off x="8778240" y="5486400"/>
+            <a:ext cx="2377440" cy="685800"/>
+          </a:xfrm>
+          <a:prstGeom prst="rect">
+            <a:avLst/>
+          </a:prstGeom>
+          <a:noFill/>
+        </p:spPr>
+        <p:txBody>
+          <a:bodyPr wrap="square">
+            <a:spAutoFit/>
+          </a:bodyPr>
+          <a:lstStyle/>
+          <a:p>
+            <a:pPr algn="l">
+              <a:defRPr sz="800" b="0">
                 <a:solidFill>
                   <a:srgbClr val="8FA89C"/>
                 </a:solidFill>
@@ -39929,7 +39925,7 @@
         <p:spPr>
           <a:xfrm>
             <a:off x="731520" y="1737360"/>
-            <a:ext cx="9144000" cy="2743200"/>
+            <a:ext cx="9144000" cy="694944"/>
           </a:xfrm>
           <a:prstGeom prst="rect">
             <a:avLst/>
@@ -41037,7 +41033,7 @@
         <p:spPr>
           <a:xfrm>
             <a:off x="731520" y="914400"/>
-            <a:ext cx="9144000" cy="1097280"/>
+            <a:ext cx="9144000" cy="594360"/>
           </a:xfrm>
           <a:prstGeom prst="rect">
             <a:avLst/>
@@ -41829,7 +41825,7 @@
           <a:lstStyle/>
           <a:p>
             <a:pPr algn="l">
-              <a:defRPr sz="1000" b="1">
+              <a:defRPr sz="900" b="1">
                 <a:solidFill>
                   <a:srgbClr val="E8F0EC"/>
                 </a:solidFill>
@@ -41851,21 +41847,21 @@
         <p:spPr>
           <a:xfrm>
             <a:off x="6492240" y="2615184"/>
-            <a:ext cx="4480560" cy="457200"/>
-          </a:xfrm>
-          <a:prstGeom prst="rect">
-            <a:avLst/>
-          </a:prstGeom>
-          <a:noFill/>
-        </p:spPr>
-        <p:txBody>
-          <a:bodyPr wrap="square">
-            <a:spAutoFit/>
-          </a:bodyPr>
-          <a:lstStyle/>
-          <a:p>
-            <a:pPr algn="l">
-              <a:defRPr sz="900" b="0">
+            <a:ext cx="4480560" cy="502920"/>
+          </a:xfrm>
+          <a:prstGeom prst="rect">
+            <a:avLst/>
+          </a:prstGeom>
+          <a:noFill/>
+        </p:spPr>
+        <p:txBody>
+          <a:bodyPr wrap="square">
+            <a:spAutoFit/>
+          </a:bodyPr>
+          <a:lstStyle/>
+          <a:p>
+            <a:pPr algn="l">
+              <a:defRPr sz="800" b="0">
                 <a:solidFill>
                   <a:srgbClr val="8FA89C"/>
                 </a:solidFill>
@@ -41886,7 +41882,7 @@
         </p:nvSpPr>
         <p:spPr>
           <a:xfrm>
-            <a:off x="6217920" y="3035808"/>
+            <a:off x="6217920" y="3127248"/>
             <a:ext cx="4754880" cy="228600"/>
           </a:xfrm>
           <a:prstGeom prst="rect">
@@ -41901,7 +41897,7 @@
           <a:lstStyle/>
           <a:p>
             <a:pPr algn="l">
-              <a:defRPr sz="1000" b="1">
+              <a:defRPr sz="900" b="1">
                 <a:solidFill>
                   <a:srgbClr val="E8F0EC"/>
                 </a:solidFill>
@@ -41922,22 +41918,22 @@
         </p:nvSpPr>
         <p:spPr>
           <a:xfrm>
-            <a:off x="6492240" y="3273552"/>
-            <a:ext cx="4480560" cy="457200"/>
-          </a:xfrm>
-          <a:prstGeom prst="rect">
-            <a:avLst/>
-          </a:prstGeom>
-          <a:noFill/>
-        </p:spPr>
-        <p:txBody>
-          <a:bodyPr wrap="square">
-            <a:spAutoFit/>
-          </a:bodyPr>
-          <a:lstStyle/>
-          <a:p>
-            <a:pPr algn="l">
-              <a:defRPr sz="900" b="0">
+            <a:off x="6492240" y="3364992"/>
+            <a:ext cx="4480560" cy="502920"/>
+          </a:xfrm>
+          <a:prstGeom prst="rect">
+            <a:avLst/>
+          </a:prstGeom>
+          <a:noFill/>
+        </p:spPr>
+        <p:txBody>
+          <a:bodyPr wrap="square">
+            <a:spAutoFit/>
+          </a:bodyPr>
+          <a:lstStyle/>
+          <a:p>
+            <a:pPr algn="l">
+              <a:defRPr sz="800" b="0">
                 <a:solidFill>
                   <a:srgbClr val="8FA89C"/>
                 </a:solidFill>
@@ -41958,7 +41954,7 @@
         </p:nvSpPr>
         <p:spPr>
           <a:xfrm>
-            <a:off x="6217920" y="3694176"/>
+            <a:off x="6217920" y="3877056"/>
             <a:ext cx="4754880" cy="228600"/>
           </a:xfrm>
           <a:prstGeom prst="rect">
@@ -41973,7 +41969,7 @@
           <a:lstStyle/>
           <a:p>
             <a:pPr algn="l">
-              <a:defRPr sz="1000" b="1">
+              <a:defRPr sz="900" b="1">
                 <a:solidFill>
                   <a:srgbClr val="E8F0EC"/>
                 </a:solidFill>
@@ -41994,22 +41990,22 @@
         </p:nvSpPr>
         <p:spPr>
           <a:xfrm>
-            <a:off x="6492240" y="3931920"/>
-            <a:ext cx="4480560" cy="457200"/>
-          </a:xfrm>
-          <a:prstGeom prst="rect">
-            <a:avLst/>
-          </a:prstGeom>
-          <a:noFill/>
-        </p:spPr>
-        <p:txBody>
-          <a:bodyPr wrap="square">
-            <a:spAutoFit/>
-          </a:bodyPr>
-          <a:lstStyle/>
-          <a:p>
-            <a:pPr algn="l">
-              <a:defRPr sz="900" b="0">
+            <a:off x="6492240" y="4114800"/>
+            <a:ext cx="4480560" cy="502920"/>
+          </a:xfrm>
+          <a:prstGeom prst="rect">
+            <a:avLst/>
+          </a:prstGeom>
+          <a:noFill/>
+        </p:spPr>
+        <p:txBody>
+          <a:bodyPr wrap="square">
+            <a:spAutoFit/>
+          </a:bodyPr>
+          <a:lstStyle/>
+          <a:p>
+            <a:pPr algn="l">
+              <a:defRPr sz="800" b="0">
                 <a:solidFill>
                   <a:srgbClr val="8FA89C"/>
                 </a:solidFill>
@@ -42030,7 +42026,7 @@
         </p:nvSpPr>
         <p:spPr>
           <a:xfrm>
-            <a:off x="6217920" y="4352544"/>
+            <a:off x="6217920" y="4626864"/>
             <a:ext cx="4754880" cy="228600"/>
           </a:xfrm>
           <a:prstGeom prst="rect">
@@ -42045,7 +42041,7 @@
           <a:lstStyle/>
           <a:p>
             <a:pPr algn="l">
-              <a:defRPr sz="1000" b="1">
+              <a:defRPr sz="900" b="1">
                 <a:solidFill>
                   <a:srgbClr val="E8F0EC"/>
                 </a:solidFill>
@@ -42066,22 +42062,22 @@
         </p:nvSpPr>
         <p:spPr>
           <a:xfrm>
-            <a:off x="6492240" y="4590288"/>
-            <a:ext cx="4480560" cy="457200"/>
-          </a:xfrm>
-          <a:prstGeom prst="rect">
-            <a:avLst/>
-          </a:prstGeom>
-          <a:noFill/>
-        </p:spPr>
-        <p:txBody>
-          <a:bodyPr wrap="square">
-            <a:spAutoFit/>
-          </a:bodyPr>
-          <a:lstStyle/>
-          <a:p>
-            <a:pPr algn="l">
-              <a:defRPr sz="900" b="0">
+            <a:off x="6492240" y="4864608"/>
+            <a:ext cx="4480560" cy="502920"/>
+          </a:xfrm>
+          <a:prstGeom prst="rect">
+            <a:avLst/>
+          </a:prstGeom>
+          <a:noFill/>
+        </p:spPr>
+        <p:txBody>
+          <a:bodyPr wrap="square">
+            <a:spAutoFit/>
+          </a:bodyPr>
+          <a:lstStyle/>
+          <a:p>
+            <a:pPr algn="l">
+              <a:defRPr sz="800" b="0">
                 <a:solidFill>
                   <a:srgbClr val="8FA89C"/>
                 </a:solidFill>
@@ -42102,7 +42098,7 @@
         </p:nvSpPr>
         <p:spPr>
           <a:xfrm>
-            <a:off x="6217920" y="5010912"/>
+            <a:off x="6217920" y="5376672"/>
             <a:ext cx="4754880" cy="228600"/>
           </a:xfrm>
           <a:prstGeom prst="rect">
@@ -42117,7 +42113,7 @@
           <a:lstStyle/>
           <a:p>
             <a:pPr algn="l">
-              <a:defRPr sz="1000" b="1">
+              <a:defRPr sz="900" b="1">
                 <a:solidFill>
                   <a:srgbClr val="E8F0EC"/>
                 </a:solidFill>
@@ -42138,22 +42134,22 @@
         </p:nvSpPr>
         <p:spPr>
           <a:xfrm>
-            <a:off x="6492240" y="5248656"/>
-            <a:ext cx="4480560" cy="457200"/>
-          </a:xfrm>
-          <a:prstGeom prst="rect">
-            <a:avLst/>
-          </a:prstGeom>
-          <a:noFill/>
-        </p:spPr>
-        <p:txBody>
-          <a:bodyPr wrap="square">
-            <a:spAutoFit/>
-          </a:bodyPr>
-          <a:lstStyle/>
-          <a:p>
-            <a:pPr algn="l">
-              <a:defRPr sz="900" b="0">
+            <a:off x="6492240" y="5614416"/>
+            <a:ext cx="4480560" cy="502920"/>
+          </a:xfrm>
+          <a:prstGeom prst="rect">
+            <a:avLst/>
+          </a:prstGeom>
+          <a:noFill/>
+        </p:spPr>
+        <p:txBody>
+          <a:bodyPr wrap="square">
+            <a:spAutoFit/>
+          </a:bodyPr>
+          <a:lstStyle/>
+          <a:p>
+            <a:pPr algn="l">
+              <a:defRPr sz="800" b="0">
                 <a:solidFill>
                   <a:srgbClr val="8FA89C"/>
                 </a:solidFill>
@@ -42392,7 +42388,7 @@
         <p:spPr>
           <a:xfrm>
             <a:off x="731520" y="914400"/>
-            <a:ext cx="9144000" cy="1097280"/>
+            <a:ext cx="9144000" cy="594360"/>
           </a:xfrm>
           <a:prstGeom prst="rect">
             <a:avLst/>
@@ -42698,21 +42694,21 @@
         <p:spPr>
           <a:xfrm>
             <a:off x="914400" y="2560320"/>
-            <a:ext cx="1371600" cy="365760"/>
-          </a:xfrm>
-          <a:prstGeom prst="rect">
-            <a:avLst/>
-          </a:prstGeom>
-          <a:noFill/>
-        </p:spPr>
-        <p:txBody>
-          <a:bodyPr wrap="square">
-            <a:spAutoFit/>
-          </a:bodyPr>
-          <a:lstStyle/>
-          <a:p>
-            <a:pPr algn="l">
-              <a:defRPr sz="900" b="1">
+            <a:ext cx="1371600" cy="411480"/>
+          </a:xfrm>
+          <a:prstGeom prst="rect">
+            <a:avLst/>
+          </a:prstGeom>
+          <a:noFill/>
+        </p:spPr>
+        <p:txBody>
+          <a:bodyPr wrap="square">
+            <a:spAutoFit/>
+          </a:bodyPr>
+          <a:lstStyle/>
+          <a:p>
+            <a:pPr algn="l">
+              <a:defRPr sz="800" b="1">
                 <a:solidFill>
                   <a:srgbClr val="E8F0EC"/>
                 </a:solidFill>
@@ -42734,21 +42730,21 @@
         <p:spPr>
           <a:xfrm>
             <a:off x="2286000" y="2560320"/>
-            <a:ext cx="1097280" cy="365760"/>
-          </a:xfrm>
-          <a:prstGeom prst="rect">
-            <a:avLst/>
-          </a:prstGeom>
-          <a:noFill/>
-        </p:spPr>
-        <p:txBody>
-          <a:bodyPr wrap="square">
-            <a:spAutoFit/>
-          </a:bodyPr>
-          <a:lstStyle/>
-          <a:p>
-            <a:pPr algn="l">
-              <a:defRPr sz="900" b="0">
+            <a:ext cx="1097280" cy="411480"/>
+          </a:xfrm>
+          <a:prstGeom prst="rect">
+            <a:avLst/>
+          </a:prstGeom>
+          <a:noFill/>
+        </p:spPr>
+        <p:txBody>
+          <a:bodyPr wrap="square">
+            <a:spAutoFit/>
+          </a:bodyPr>
+          <a:lstStyle/>
+          <a:p>
+            <a:pPr algn="l">
+              <a:defRPr sz="800" b="0">
                 <a:solidFill>
                   <a:srgbClr val="8FA89C"/>
                 </a:solidFill>
@@ -42770,21 +42766,21 @@
         <p:spPr>
           <a:xfrm>
             <a:off x="3383280" y="2560320"/>
-            <a:ext cx="1828800" cy="365760"/>
-          </a:xfrm>
-          <a:prstGeom prst="rect">
-            <a:avLst/>
-          </a:prstGeom>
-          <a:noFill/>
-        </p:spPr>
-        <p:txBody>
-          <a:bodyPr wrap="square">
-            <a:spAutoFit/>
-          </a:bodyPr>
-          <a:lstStyle/>
-          <a:p>
-            <a:pPr algn="l">
-              <a:defRPr sz="900" b="0">
+            <a:ext cx="1828800" cy="411480"/>
+          </a:xfrm>
+          <a:prstGeom prst="rect">
+            <a:avLst/>
+          </a:prstGeom>
+          <a:noFill/>
+        </p:spPr>
+        <p:txBody>
+          <a:bodyPr wrap="square">
+            <a:spAutoFit/>
+          </a:bodyPr>
+          <a:lstStyle/>
+          <a:p>
+            <a:pPr algn="l">
+              <a:defRPr sz="800" b="0">
                 <a:solidFill>
                   <a:srgbClr val="8FA89C"/>
                 </a:solidFill>
@@ -42806,21 +42802,21 @@
         <p:spPr>
           <a:xfrm>
             <a:off x="5212080" y="2560320"/>
-            <a:ext cx="2286000" cy="365760"/>
-          </a:xfrm>
-          <a:prstGeom prst="rect">
-            <a:avLst/>
-          </a:prstGeom>
-          <a:noFill/>
-        </p:spPr>
-        <p:txBody>
-          <a:bodyPr wrap="square">
-            <a:spAutoFit/>
-          </a:bodyPr>
-          <a:lstStyle/>
-          <a:p>
-            <a:pPr algn="l">
-              <a:defRPr sz="900" b="0">
+            <a:ext cx="2286000" cy="411480"/>
+          </a:xfrm>
+          <a:prstGeom prst="rect">
+            <a:avLst/>
+          </a:prstGeom>
+          <a:noFill/>
+        </p:spPr>
+        <p:txBody>
+          <a:bodyPr wrap="square">
+            <a:spAutoFit/>
+          </a:bodyPr>
+          <a:lstStyle/>
+          <a:p>
+            <a:pPr algn="l">
+              <a:defRPr sz="800" b="0">
                 <a:solidFill>
                   <a:srgbClr val="8FA89C"/>
                 </a:solidFill>
@@ -42842,21 +42838,21 @@
         <p:spPr>
           <a:xfrm>
             <a:off x="7498080" y="2560320"/>
-            <a:ext cx="3474720" cy="365760"/>
-          </a:xfrm>
-          <a:prstGeom prst="rect">
-            <a:avLst/>
-          </a:prstGeom>
-          <a:noFill/>
-        </p:spPr>
-        <p:txBody>
-          <a:bodyPr wrap="square">
-            <a:spAutoFit/>
-          </a:bodyPr>
-          <a:lstStyle/>
-          <a:p>
-            <a:pPr algn="l">
-              <a:defRPr sz="900" b="0">
+            <a:ext cx="3474720" cy="411480"/>
+          </a:xfrm>
+          <a:prstGeom prst="rect">
+            <a:avLst/>
+          </a:prstGeom>
+          <a:noFill/>
+        </p:spPr>
+        <p:txBody>
+          <a:bodyPr wrap="square">
+            <a:spAutoFit/>
+          </a:bodyPr>
+          <a:lstStyle/>
+          <a:p>
+            <a:pPr algn="l">
+              <a:defRPr sz="800" b="0">
                 <a:solidFill>
                   <a:srgbClr val="00C978"/>
                 </a:solidFill>
@@ -42877,22 +42873,22 @@
         </p:nvSpPr>
         <p:spPr>
           <a:xfrm>
-            <a:off x="914400" y="2971800"/>
-            <a:ext cx="1371600" cy="365760"/>
-          </a:xfrm>
-          <a:prstGeom prst="rect">
-            <a:avLst/>
-          </a:prstGeom>
-          <a:noFill/>
-        </p:spPr>
-        <p:txBody>
-          <a:bodyPr wrap="square">
-            <a:spAutoFit/>
-          </a:bodyPr>
-          <a:lstStyle/>
-          <a:p>
-            <a:pPr algn="l">
-              <a:defRPr sz="900" b="1">
+            <a:off x="914400" y="3017520"/>
+            <a:ext cx="1371600" cy="411480"/>
+          </a:xfrm>
+          <a:prstGeom prst="rect">
+            <a:avLst/>
+          </a:prstGeom>
+          <a:noFill/>
+        </p:spPr>
+        <p:txBody>
+          <a:bodyPr wrap="square">
+            <a:spAutoFit/>
+          </a:bodyPr>
+          <a:lstStyle/>
+          <a:p>
+            <a:pPr algn="l">
+              <a:defRPr sz="800" b="1">
                 <a:solidFill>
                   <a:srgbClr val="E8F0EC"/>
                 </a:solidFill>
@@ -42913,22 +42909,22 @@
         </p:nvSpPr>
         <p:spPr>
           <a:xfrm>
-            <a:off x="2286000" y="2971800"/>
-            <a:ext cx="1097280" cy="365760"/>
-          </a:xfrm>
-          <a:prstGeom prst="rect">
-            <a:avLst/>
-          </a:prstGeom>
-          <a:noFill/>
-        </p:spPr>
-        <p:txBody>
-          <a:bodyPr wrap="square">
-            <a:spAutoFit/>
-          </a:bodyPr>
-          <a:lstStyle/>
-          <a:p>
-            <a:pPr algn="l">
-              <a:defRPr sz="900" b="0">
+            <a:off x="2286000" y="3017520"/>
+            <a:ext cx="1097280" cy="411480"/>
+          </a:xfrm>
+          <a:prstGeom prst="rect">
+            <a:avLst/>
+          </a:prstGeom>
+          <a:noFill/>
+        </p:spPr>
+        <p:txBody>
+          <a:bodyPr wrap="square">
+            <a:spAutoFit/>
+          </a:bodyPr>
+          <a:lstStyle/>
+          <a:p>
+            <a:pPr algn="l">
+              <a:defRPr sz="800" b="0">
                 <a:solidFill>
                   <a:srgbClr val="8FA89C"/>
                 </a:solidFill>
@@ -42949,22 +42945,22 @@
         </p:nvSpPr>
         <p:spPr>
           <a:xfrm>
-            <a:off x="3383280" y="2971800"/>
-            <a:ext cx="1828800" cy="365760"/>
-          </a:xfrm>
-          <a:prstGeom prst="rect">
-            <a:avLst/>
-          </a:prstGeom>
-          <a:noFill/>
-        </p:spPr>
-        <p:txBody>
-          <a:bodyPr wrap="square">
-            <a:spAutoFit/>
-          </a:bodyPr>
-          <a:lstStyle/>
-          <a:p>
-            <a:pPr algn="l">
-              <a:defRPr sz="900" b="0">
+            <a:off x="3383280" y="3017520"/>
+            <a:ext cx="1828800" cy="411480"/>
+          </a:xfrm>
+          <a:prstGeom prst="rect">
+            <a:avLst/>
+          </a:prstGeom>
+          <a:noFill/>
+        </p:spPr>
+        <p:txBody>
+          <a:bodyPr wrap="square">
+            <a:spAutoFit/>
+          </a:bodyPr>
+          <a:lstStyle/>
+          <a:p>
+            <a:pPr algn="l">
+              <a:defRPr sz="800" b="0">
                 <a:solidFill>
                   <a:srgbClr val="8FA89C"/>
                 </a:solidFill>
@@ -42985,22 +42981,22 @@
         </p:nvSpPr>
         <p:spPr>
           <a:xfrm>
-            <a:off x="5212080" y="2971800"/>
-            <a:ext cx="2286000" cy="365760"/>
-          </a:xfrm>
-          <a:prstGeom prst="rect">
-            <a:avLst/>
-          </a:prstGeom>
-          <a:noFill/>
-        </p:spPr>
-        <p:txBody>
-          <a:bodyPr wrap="square">
-            <a:spAutoFit/>
-          </a:bodyPr>
-          <a:lstStyle/>
-          <a:p>
-            <a:pPr algn="l">
-              <a:defRPr sz="900" b="0">
+            <a:off x="5212080" y="3017520"/>
+            <a:ext cx="2286000" cy="411480"/>
+          </a:xfrm>
+          <a:prstGeom prst="rect">
+            <a:avLst/>
+          </a:prstGeom>
+          <a:noFill/>
+        </p:spPr>
+        <p:txBody>
+          <a:bodyPr wrap="square">
+            <a:spAutoFit/>
+          </a:bodyPr>
+          <a:lstStyle/>
+          <a:p>
+            <a:pPr algn="l">
+              <a:defRPr sz="800" b="0">
                 <a:solidFill>
                   <a:srgbClr val="8FA89C"/>
                 </a:solidFill>
@@ -43021,22 +43017,22 @@
         </p:nvSpPr>
         <p:spPr>
           <a:xfrm>
-            <a:off x="7498080" y="2971800"/>
-            <a:ext cx="3474720" cy="365760"/>
-          </a:xfrm>
-          <a:prstGeom prst="rect">
-            <a:avLst/>
-          </a:prstGeom>
-          <a:noFill/>
-        </p:spPr>
-        <p:txBody>
-          <a:bodyPr wrap="square">
-            <a:spAutoFit/>
-          </a:bodyPr>
-          <a:lstStyle/>
-          <a:p>
-            <a:pPr algn="l">
-              <a:defRPr sz="900" b="0">
+            <a:off x="7498080" y="3017520"/>
+            <a:ext cx="3474720" cy="411480"/>
+          </a:xfrm>
+          <a:prstGeom prst="rect">
+            <a:avLst/>
+          </a:prstGeom>
+          <a:noFill/>
+        </p:spPr>
+        <p:txBody>
+          <a:bodyPr wrap="square">
+            <a:spAutoFit/>
+          </a:bodyPr>
+          <a:lstStyle/>
+          <a:p>
+            <a:pPr algn="l">
+              <a:defRPr sz="800" b="0">
                 <a:solidFill>
                   <a:srgbClr val="00C978"/>
                 </a:solidFill>
@@ -43057,22 +43053,22 @@
         </p:nvSpPr>
         <p:spPr>
           <a:xfrm>
-            <a:off x="914400" y="3383280"/>
-            <a:ext cx="1371600" cy="365760"/>
-          </a:xfrm>
-          <a:prstGeom prst="rect">
-            <a:avLst/>
-          </a:prstGeom>
-          <a:noFill/>
-        </p:spPr>
-        <p:txBody>
-          <a:bodyPr wrap="square">
-            <a:spAutoFit/>
-          </a:bodyPr>
-          <a:lstStyle/>
-          <a:p>
-            <a:pPr algn="l">
-              <a:defRPr sz="900" b="1">
+            <a:off x="914400" y="3474720"/>
+            <a:ext cx="1371600" cy="411480"/>
+          </a:xfrm>
+          <a:prstGeom prst="rect">
+            <a:avLst/>
+          </a:prstGeom>
+          <a:noFill/>
+        </p:spPr>
+        <p:txBody>
+          <a:bodyPr wrap="square">
+            <a:spAutoFit/>
+          </a:bodyPr>
+          <a:lstStyle/>
+          <a:p>
+            <a:pPr algn="l">
+              <a:defRPr sz="800" b="1">
                 <a:solidFill>
                   <a:srgbClr val="E8F0EC"/>
                 </a:solidFill>
@@ -43093,22 +43089,22 @@
         </p:nvSpPr>
         <p:spPr>
           <a:xfrm>
-            <a:off x="2286000" y="3383280"/>
-            <a:ext cx="1097280" cy="365760"/>
-          </a:xfrm>
-          <a:prstGeom prst="rect">
-            <a:avLst/>
-          </a:prstGeom>
-          <a:noFill/>
-        </p:spPr>
-        <p:txBody>
-          <a:bodyPr wrap="square">
-            <a:spAutoFit/>
-          </a:bodyPr>
-          <a:lstStyle/>
-          <a:p>
-            <a:pPr algn="l">
-              <a:defRPr sz="900" b="0">
+            <a:off x="2286000" y="3474720"/>
+            <a:ext cx="1097280" cy="411480"/>
+          </a:xfrm>
+          <a:prstGeom prst="rect">
+            <a:avLst/>
+          </a:prstGeom>
+          <a:noFill/>
+        </p:spPr>
+        <p:txBody>
+          <a:bodyPr wrap="square">
+            <a:spAutoFit/>
+          </a:bodyPr>
+          <a:lstStyle/>
+          <a:p>
+            <a:pPr algn="l">
+              <a:defRPr sz="800" b="0">
                 <a:solidFill>
                   <a:srgbClr val="8FA89C"/>
                 </a:solidFill>
@@ -43129,22 +43125,22 @@
         </p:nvSpPr>
         <p:spPr>
           <a:xfrm>
-            <a:off x="3383280" y="3383280"/>
-            <a:ext cx="1828800" cy="365760"/>
-          </a:xfrm>
-          <a:prstGeom prst="rect">
-            <a:avLst/>
-          </a:prstGeom>
-          <a:noFill/>
-        </p:spPr>
-        <p:txBody>
-          <a:bodyPr wrap="square">
-            <a:spAutoFit/>
-          </a:bodyPr>
-          <a:lstStyle/>
-          <a:p>
-            <a:pPr algn="l">
-              <a:defRPr sz="900" b="0">
+            <a:off x="3383280" y="3474720"/>
+            <a:ext cx="1828800" cy="411480"/>
+          </a:xfrm>
+          <a:prstGeom prst="rect">
+            <a:avLst/>
+          </a:prstGeom>
+          <a:noFill/>
+        </p:spPr>
+        <p:txBody>
+          <a:bodyPr wrap="square">
+            <a:spAutoFit/>
+          </a:bodyPr>
+          <a:lstStyle/>
+          <a:p>
+            <a:pPr algn="l">
+              <a:defRPr sz="800" b="0">
                 <a:solidFill>
                   <a:srgbClr val="8FA89C"/>
                 </a:solidFill>
@@ -43165,22 +43161,22 @@
         </p:nvSpPr>
         <p:spPr>
           <a:xfrm>
-            <a:off x="5212080" y="3383280"/>
-            <a:ext cx="2286000" cy="365760"/>
-          </a:xfrm>
-          <a:prstGeom prst="rect">
-            <a:avLst/>
-          </a:prstGeom>
-          <a:noFill/>
-        </p:spPr>
-        <p:txBody>
-          <a:bodyPr wrap="square">
-            <a:spAutoFit/>
-          </a:bodyPr>
-          <a:lstStyle/>
-          <a:p>
-            <a:pPr algn="l">
-              <a:defRPr sz="900" b="0">
+            <a:off x="5212080" y="3474720"/>
+            <a:ext cx="2286000" cy="411480"/>
+          </a:xfrm>
+          <a:prstGeom prst="rect">
+            <a:avLst/>
+          </a:prstGeom>
+          <a:noFill/>
+        </p:spPr>
+        <p:txBody>
+          <a:bodyPr wrap="square">
+            <a:spAutoFit/>
+          </a:bodyPr>
+          <a:lstStyle/>
+          <a:p>
+            <a:pPr algn="l">
+              <a:defRPr sz="800" b="0">
                 <a:solidFill>
                   <a:srgbClr val="8FA89C"/>
                 </a:solidFill>
@@ -43201,22 +43197,22 @@
         </p:nvSpPr>
         <p:spPr>
           <a:xfrm>
-            <a:off x="7498080" y="3383280"/>
-            <a:ext cx="3474720" cy="365760"/>
-          </a:xfrm>
-          <a:prstGeom prst="rect">
-            <a:avLst/>
-          </a:prstGeom>
-          <a:noFill/>
-        </p:spPr>
-        <p:txBody>
-          <a:bodyPr wrap="square">
-            <a:spAutoFit/>
-          </a:bodyPr>
-          <a:lstStyle/>
-          <a:p>
-            <a:pPr algn="l">
-              <a:defRPr sz="900" b="0">
+            <a:off x="7498080" y="3474720"/>
+            <a:ext cx="3474720" cy="411480"/>
+          </a:xfrm>
+          <a:prstGeom prst="rect">
+            <a:avLst/>
+          </a:prstGeom>
+          <a:noFill/>
+        </p:spPr>
+        <p:txBody>
+          <a:bodyPr wrap="square">
+            <a:spAutoFit/>
+          </a:bodyPr>
+          <a:lstStyle/>
+          <a:p>
+            <a:pPr algn="l">
+              <a:defRPr sz="800" b="0">
                 <a:solidFill>
                   <a:srgbClr val="00C978"/>
                 </a:solidFill>
@@ -43237,22 +43233,22 @@
         </p:nvSpPr>
         <p:spPr>
           <a:xfrm>
-            <a:off x="914400" y="3794760"/>
-            <a:ext cx="1371600" cy="365760"/>
-          </a:xfrm>
-          <a:prstGeom prst="rect">
-            <a:avLst/>
-          </a:prstGeom>
-          <a:noFill/>
-        </p:spPr>
-        <p:txBody>
-          <a:bodyPr wrap="square">
-            <a:spAutoFit/>
-          </a:bodyPr>
-          <a:lstStyle/>
-          <a:p>
-            <a:pPr algn="l">
-              <a:defRPr sz="900" b="1">
+            <a:off x="914400" y="3931920"/>
+            <a:ext cx="1371600" cy="411480"/>
+          </a:xfrm>
+          <a:prstGeom prst="rect">
+            <a:avLst/>
+          </a:prstGeom>
+          <a:noFill/>
+        </p:spPr>
+        <p:txBody>
+          <a:bodyPr wrap="square">
+            <a:spAutoFit/>
+          </a:bodyPr>
+          <a:lstStyle/>
+          <a:p>
+            <a:pPr algn="l">
+              <a:defRPr sz="800" b="1">
                 <a:solidFill>
                   <a:srgbClr val="E8F0EC"/>
                 </a:solidFill>
@@ -43273,22 +43269,22 @@
         </p:nvSpPr>
         <p:spPr>
           <a:xfrm>
-            <a:off x="2286000" y="3794760"/>
-            <a:ext cx="1097280" cy="365760"/>
-          </a:xfrm>
-          <a:prstGeom prst="rect">
-            <a:avLst/>
-          </a:prstGeom>
-          <a:noFill/>
-        </p:spPr>
-        <p:txBody>
-          <a:bodyPr wrap="square">
-            <a:spAutoFit/>
-          </a:bodyPr>
-          <a:lstStyle/>
-          <a:p>
-            <a:pPr algn="l">
-              <a:defRPr sz="900" b="0">
+            <a:off x="2286000" y="3931920"/>
+            <a:ext cx="1097280" cy="411480"/>
+          </a:xfrm>
+          <a:prstGeom prst="rect">
+            <a:avLst/>
+          </a:prstGeom>
+          <a:noFill/>
+        </p:spPr>
+        <p:txBody>
+          <a:bodyPr wrap="square">
+            <a:spAutoFit/>
+          </a:bodyPr>
+          <a:lstStyle/>
+          <a:p>
+            <a:pPr algn="l">
+              <a:defRPr sz="800" b="0">
                 <a:solidFill>
                   <a:srgbClr val="8FA89C"/>
                 </a:solidFill>
@@ -43309,22 +43305,22 @@
         </p:nvSpPr>
         <p:spPr>
           <a:xfrm>
-            <a:off x="3383280" y="3794760"/>
-            <a:ext cx="1828800" cy="365760"/>
-          </a:xfrm>
-          <a:prstGeom prst="rect">
-            <a:avLst/>
-          </a:prstGeom>
-          <a:noFill/>
-        </p:spPr>
-        <p:txBody>
-          <a:bodyPr wrap="square">
-            <a:spAutoFit/>
-          </a:bodyPr>
-          <a:lstStyle/>
-          <a:p>
-            <a:pPr algn="l">
-              <a:defRPr sz="900" b="0">
+            <a:off x="3383280" y="3931920"/>
+            <a:ext cx="1828800" cy="411480"/>
+          </a:xfrm>
+          <a:prstGeom prst="rect">
+            <a:avLst/>
+          </a:prstGeom>
+          <a:noFill/>
+        </p:spPr>
+        <p:txBody>
+          <a:bodyPr wrap="square">
+            <a:spAutoFit/>
+          </a:bodyPr>
+          <a:lstStyle/>
+          <a:p>
+            <a:pPr algn="l">
+              <a:defRPr sz="800" b="0">
                 <a:solidFill>
                   <a:srgbClr val="8FA89C"/>
                 </a:solidFill>
@@ -43345,22 +43341,22 @@
         </p:nvSpPr>
         <p:spPr>
           <a:xfrm>
-            <a:off x="5212080" y="3794760"/>
-            <a:ext cx="2286000" cy="365760"/>
-          </a:xfrm>
-          <a:prstGeom prst="rect">
-            <a:avLst/>
-          </a:prstGeom>
-          <a:noFill/>
-        </p:spPr>
-        <p:txBody>
-          <a:bodyPr wrap="square">
-            <a:spAutoFit/>
-          </a:bodyPr>
-          <a:lstStyle/>
-          <a:p>
-            <a:pPr algn="l">
-              <a:defRPr sz="900" b="0">
+            <a:off x="5212080" y="3931920"/>
+            <a:ext cx="2286000" cy="411480"/>
+          </a:xfrm>
+          <a:prstGeom prst="rect">
+            <a:avLst/>
+          </a:prstGeom>
+          <a:noFill/>
+        </p:spPr>
+        <p:txBody>
+          <a:bodyPr wrap="square">
+            <a:spAutoFit/>
+          </a:bodyPr>
+          <a:lstStyle/>
+          <a:p>
+            <a:pPr algn="l">
+              <a:defRPr sz="800" b="0">
                 <a:solidFill>
                   <a:srgbClr val="8FA89C"/>
                 </a:solidFill>
@@ -43381,22 +43377,22 @@
         </p:nvSpPr>
         <p:spPr>
           <a:xfrm>
-            <a:off x="7498080" y="3794760"/>
-            <a:ext cx="3474720" cy="365760"/>
-          </a:xfrm>
-          <a:prstGeom prst="rect">
-            <a:avLst/>
-          </a:prstGeom>
-          <a:noFill/>
-        </p:spPr>
-        <p:txBody>
-          <a:bodyPr wrap="square">
-            <a:spAutoFit/>
-          </a:bodyPr>
-          <a:lstStyle/>
-          <a:p>
-            <a:pPr algn="l">
-              <a:defRPr sz="900" b="0">
+            <a:off x="7498080" y="3931920"/>
+            <a:ext cx="3474720" cy="411480"/>
+          </a:xfrm>
+          <a:prstGeom prst="rect">
+            <a:avLst/>
+          </a:prstGeom>
+          <a:noFill/>
+        </p:spPr>
+        <p:txBody>
+          <a:bodyPr wrap="square">
+            <a:spAutoFit/>
+          </a:bodyPr>
+          <a:lstStyle/>
+          <a:p>
+            <a:pPr algn="l">
+              <a:defRPr sz="800" b="0">
                 <a:solidFill>
                   <a:srgbClr val="00C978"/>
                 </a:solidFill>
@@ -43417,22 +43413,22 @@
         </p:nvSpPr>
         <p:spPr>
           <a:xfrm>
-            <a:off x="914400" y="4206240"/>
-            <a:ext cx="1371600" cy="365760"/>
-          </a:xfrm>
-          <a:prstGeom prst="rect">
-            <a:avLst/>
-          </a:prstGeom>
-          <a:noFill/>
-        </p:spPr>
-        <p:txBody>
-          <a:bodyPr wrap="square">
-            <a:spAutoFit/>
-          </a:bodyPr>
-          <a:lstStyle/>
-          <a:p>
-            <a:pPr algn="l">
-              <a:defRPr sz="900" b="1">
+            <a:off x="914400" y="4389120"/>
+            <a:ext cx="1371600" cy="411480"/>
+          </a:xfrm>
+          <a:prstGeom prst="rect">
+            <a:avLst/>
+          </a:prstGeom>
+          <a:noFill/>
+        </p:spPr>
+        <p:txBody>
+          <a:bodyPr wrap="square">
+            <a:spAutoFit/>
+          </a:bodyPr>
+          <a:lstStyle/>
+          <a:p>
+            <a:pPr algn="l">
+              <a:defRPr sz="800" b="1">
                 <a:solidFill>
                   <a:srgbClr val="E8F0EC"/>
                 </a:solidFill>
@@ -43453,22 +43449,22 @@
         </p:nvSpPr>
         <p:spPr>
           <a:xfrm>
-            <a:off x="2286000" y="4206240"/>
-            <a:ext cx="1097280" cy="365760"/>
-          </a:xfrm>
-          <a:prstGeom prst="rect">
-            <a:avLst/>
-          </a:prstGeom>
-          <a:noFill/>
-        </p:spPr>
-        <p:txBody>
-          <a:bodyPr wrap="square">
-            <a:spAutoFit/>
-          </a:bodyPr>
-          <a:lstStyle/>
-          <a:p>
-            <a:pPr algn="l">
-              <a:defRPr sz="900" b="0">
+            <a:off x="2286000" y="4389120"/>
+            <a:ext cx="1097280" cy="411480"/>
+          </a:xfrm>
+          <a:prstGeom prst="rect">
+            <a:avLst/>
+          </a:prstGeom>
+          <a:noFill/>
+        </p:spPr>
+        <p:txBody>
+          <a:bodyPr wrap="square">
+            <a:spAutoFit/>
+          </a:bodyPr>
+          <a:lstStyle/>
+          <a:p>
+            <a:pPr algn="l">
+              <a:defRPr sz="800" b="0">
                 <a:solidFill>
                   <a:srgbClr val="8FA89C"/>
                 </a:solidFill>
@@ -43489,22 +43485,22 @@
         </p:nvSpPr>
         <p:spPr>
           <a:xfrm>
-            <a:off x="3383280" y="4206240"/>
-            <a:ext cx="1828800" cy="365760"/>
-          </a:xfrm>
-          <a:prstGeom prst="rect">
-            <a:avLst/>
-          </a:prstGeom>
-          <a:noFill/>
-        </p:spPr>
-        <p:txBody>
-          <a:bodyPr wrap="square">
-            <a:spAutoFit/>
-          </a:bodyPr>
-          <a:lstStyle/>
-          <a:p>
-            <a:pPr algn="l">
-              <a:defRPr sz="900" b="0">
+            <a:off x="3383280" y="4389120"/>
+            <a:ext cx="1828800" cy="411480"/>
+          </a:xfrm>
+          <a:prstGeom prst="rect">
+            <a:avLst/>
+          </a:prstGeom>
+          <a:noFill/>
+        </p:spPr>
+        <p:txBody>
+          <a:bodyPr wrap="square">
+            <a:spAutoFit/>
+          </a:bodyPr>
+          <a:lstStyle/>
+          <a:p>
+            <a:pPr algn="l">
+              <a:defRPr sz="800" b="0">
                 <a:solidFill>
                   <a:srgbClr val="8FA89C"/>
                 </a:solidFill>
@@ -43525,22 +43521,22 @@
         </p:nvSpPr>
         <p:spPr>
           <a:xfrm>
-            <a:off x="5212080" y="4206240"/>
-            <a:ext cx="2286000" cy="365760"/>
-          </a:xfrm>
-          <a:prstGeom prst="rect">
-            <a:avLst/>
-          </a:prstGeom>
-          <a:noFill/>
-        </p:spPr>
-        <p:txBody>
-          <a:bodyPr wrap="square">
-            <a:spAutoFit/>
-          </a:bodyPr>
-          <a:lstStyle/>
-          <a:p>
-            <a:pPr algn="l">
-              <a:defRPr sz="900" b="0">
+            <a:off x="5212080" y="4389120"/>
+            <a:ext cx="2286000" cy="411480"/>
+          </a:xfrm>
+          <a:prstGeom prst="rect">
+            <a:avLst/>
+          </a:prstGeom>
+          <a:noFill/>
+        </p:spPr>
+        <p:txBody>
+          <a:bodyPr wrap="square">
+            <a:spAutoFit/>
+          </a:bodyPr>
+          <a:lstStyle/>
+          <a:p>
+            <a:pPr algn="l">
+              <a:defRPr sz="800" b="0">
                 <a:solidFill>
                   <a:srgbClr val="8FA89C"/>
                 </a:solidFill>
@@ -43561,22 +43557,22 @@
         </p:nvSpPr>
         <p:spPr>
           <a:xfrm>
-            <a:off x="7498080" y="4206240"/>
-            <a:ext cx="3474720" cy="365760"/>
-          </a:xfrm>
-          <a:prstGeom prst="rect">
-            <a:avLst/>
-          </a:prstGeom>
-          <a:noFill/>
-        </p:spPr>
-        <p:txBody>
-          <a:bodyPr wrap="square">
-            <a:spAutoFit/>
-          </a:bodyPr>
-          <a:lstStyle/>
-          <a:p>
-            <a:pPr algn="l">
-              <a:defRPr sz="900" b="0">
+            <a:off x="7498080" y="4389120"/>
+            <a:ext cx="3474720" cy="411480"/>
+          </a:xfrm>
+          <a:prstGeom prst="rect">
+            <a:avLst/>
+          </a:prstGeom>
+          <a:noFill/>
+        </p:spPr>
+        <p:txBody>
+          <a:bodyPr wrap="square">
+            <a:spAutoFit/>
+          </a:bodyPr>
+          <a:lstStyle/>
+          <a:p>
+            <a:pPr algn="l">
+              <a:defRPr sz="800" b="0">
                 <a:solidFill>
                   <a:srgbClr val="00C978"/>
                 </a:solidFill>
@@ -43597,22 +43593,22 @@
         </p:nvSpPr>
         <p:spPr>
           <a:xfrm>
-            <a:off x="914400" y="4617720"/>
-            <a:ext cx="1371600" cy="365760"/>
-          </a:xfrm>
-          <a:prstGeom prst="rect">
-            <a:avLst/>
-          </a:prstGeom>
-          <a:noFill/>
-        </p:spPr>
-        <p:txBody>
-          <a:bodyPr wrap="square">
-            <a:spAutoFit/>
-          </a:bodyPr>
-          <a:lstStyle/>
-          <a:p>
-            <a:pPr algn="l">
-              <a:defRPr sz="900" b="1">
+            <a:off x="914400" y="4846320"/>
+            <a:ext cx="1371600" cy="411480"/>
+          </a:xfrm>
+          <a:prstGeom prst="rect">
+            <a:avLst/>
+          </a:prstGeom>
+          <a:noFill/>
+        </p:spPr>
+        <p:txBody>
+          <a:bodyPr wrap="square">
+            <a:spAutoFit/>
+          </a:bodyPr>
+          <a:lstStyle/>
+          <a:p>
+            <a:pPr algn="l">
+              <a:defRPr sz="800" b="1">
                 <a:solidFill>
                   <a:srgbClr val="E8F0EC"/>
                 </a:solidFill>
@@ -43633,22 +43629,22 @@
         </p:nvSpPr>
         <p:spPr>
           <a:xfrm>
-            <a:off x="2286000" y="4617720"/>
-            <a:ext cx="1097280" cy="365760"/>
-          </a:xfrm>
-          <a:prstGeom prst="rect">
-            <a:avLst/>
-          </a:prstGeom>
-          <a:noFill/>
-        </p:spPr>
-        <p:txBody>
-          <a:bodyPr wrap="square">
-            <a:spAutoFit/>
-          </a:bodyPr>
-          <a:lstStyle/>
-          <a:p>
-            <a:pPr algn="l">
-              <a:defRPr sz="900" b="0">
+            <a:off x="2286000" y="4846320"/>
+            <a:ext cx="1097280" cy="411480"/>
+          </a:xfrm>
+          <a:prstGeom prst="rect">
+            <a:avLst/>
+          </a:prstGeom>
+          <a:noFill/>
+        </p:spPr>
+        <p:txBody>
+          <a:bodyPr wrap="square">
+            <a:spAutoFit/>
+          </a:bodyPr>
+          <a:lstStyle/>
+          <a:p>
+            <a:pPr algn="l">
+              <a:defRPr sz="800" b="0">
                 <a:solidFill>
                   <a:srgbClr val="8FA89C"/>
                 </a:solidFill>
@@ -43669,22 +43665,22 @@
         </p:nvSpPr>
         <p:spPr>
           <a:xfrm>
-            <a:off x="3383280" y="4617720"/>
-            <a:ext cx="1828800" cy="365760"/>
-          </a:xfrm>
-          <a:prstGeom prst="rect">
-            <a:avLst/>
-          </a:prstGeom>
-          <a:noFill/>
-        </p:spPr>
-        <p:txBody>
-          <a:bodyPr wrap="square">
-            <a:spAutoFit/>
-          </a:bodyPr>
-          <a:lstStyle/>
-          <a:p>
-            <a:pPr algn="l">
-              <a:defRPr sz="900" b="0">
+            <a:off x="3383280" y="4846320"/>
+            <a:ext cx="1828800" cy="411480"/>
+          </a:xfrm>
+          <a:prstGeom prst="rect">
+            <a:avLst/>
+          </a:prstGeom>
+          <a:noFill/>
+        </p:spPr>
+        <p:txBody>
+          <a:bodyPr wrap="square">
+            <a:spAutoFit/>
+          </a:bodyPr>
+          <a:lstStyle/>
+          <a:p>
+            <a:pPr algn="l">
+              <a:defRPr sz="800" b="0">
                 <a:solidFill>
                   <a:srgbClr val="8FA89C"/>
                 </a:solidFill>
@@ -43705,22 +43701,22 @@
         </p:nvSpPr>
         <p:spPr>
           <a:xfrm>
-            <a:off x="5212080" y="4617720"/>
-            <a:ext cx="2286000" cy="365760"/>
-          </a:xfrm>
-          <a:prstGeom prst="rect">
-            <a:avLst/>
-          </a:prstGeom>
-          <a:noFill/>
-        </p:spPr>
-        <p:txBody>
-          <a:bodyPr wrap="square">
-            <a:spAutoFit/>
-          </a:bodyPr>
-          <a:lstStyle/>
-          <a:p>
-            <a:pPr algn="l">
-              <a:defRPr sz="900" b="0">
+            <a:off x="5212080" y="4846320"/>
+            <a:ext cx="2286000" cy="411480"/>
+          </a:xfrm>
+          <a:prstGeom prst="rect">
+            <a:avLst/>
+          </a:prstGeom>
+          <a:noFill/>
+        </p:spPr>
+        <p:txBody>
+          <a:bodyPr wrap="square">
+            <a:spAutoFit/>
+          </a:bodyPr>
+          <a:lstStyle/>
+          <a:p>
+            <a:pPr algn="l">
+              <a:defRPr sz="800" b="0">
                 <a:solidFill>
                   <a:srgbClr val="8FA89C"/>
                 </a:solidFill>
@@ -43741,22 +43737,22 @@
         </p:nvSpPr>
         <p:spPr>
           <a:xfrm>
-            <a:off x="7498080" y="4617720"/>
-            <a:ext cx="3474720" cy="365760"/>
-          </a:xfrm>
-          <a:prstGeom prst="rect">
-            <a:avLst/>
-          </a:prstGeom>
-          <a:noFill/>
-        </p:spPr>
-        <p:txBody>
-          <a:bodyPr wrap="square">
-            <a:spAutoFit/>
-          </a:bodyPr>
-          <a:lstStyle/>
-          <a:p>
-            <a:pPr algn="l">
-              <a:defRPr sz="900" b="0">
+            <a:off x="7498080" y="4846320"/>
+            <a:ext cx="3474720" cy="411480"/>
+          </a:xfrm>
+          <a:prstGeom prst="rect">
+            <a:avLst/>
+          </a:prstGeom>
+          <a:noFill/>
+        </p:spPr>
+        <p:txBody>
+          <a:bodyPr wrap="square">
+            <a:spAutoFit/>
+          </a:bodyPr>
+          <a:lstStyle/>
+          <a:p>
+            <a:pPr algn="l">
+              <a:defRPr sz="800" b="0">
                 <a:solidFill>
                   <a:srgbClr val="00C978"/>
                 </a:solidFill>
@@ -43777,8 +43773,8 @@
         </p:nvSpPr>
         <p:spPr>
           <a:xfrm>
-            <a:off x="731520" y="5669280"/>
-            <a:ext cx="10515600" cy="640080"/>
+            <a:off x="731520" y="5760720"/>
+            <a:ext cx="10515600" cy="548640"/>
           </a:xfrm>
           <a:prstGeom prst="roundRect">
             <a:avLst>
@@ -43824,7 +43820,7 @@
         </p:nvSpPr>
         <p:spPr>
           <a:xfrm>
-            <a:off x="1005840" y="5760720"/>
+            <a:off x="1005840" y="5806440"/>
             <a:ext cx="9601200" cy="457200"/>
           </a:xfrm>
           <a:prstGeom prst="rect">
@@ -43839,7 +43835,7 @@
           <a:lstStyle/>
           <a:p>
             <a:pPr algn="l">
-              <a:defRPr sz="1100" b="0">
+              <a:defRPr sz="1000" b="0">
                 <a:solidFill>
                   <a:srgbClr val="8FA89C"/>
                 </a:solidFill>
